--- a/作成中事業計画書/★0930Gライン_レイアウト工程ビフォーアフター_トンボ飲料様_v3.pptx
+++ b/作成中事業計画書/★0930Gライン_レイアウト工程ビフォーアフター_トンボ飲料様_v3.pptx
@@ -312,7 +312,7 @@
               <a:rPr lang="en-US"/>
               <a:t>1</a:t>
             </a:fld>
-            <a:endParaRPr lang="en-US"/>
+            <a:endParaRPr lang="en-US" dirty="0"/>
           </a:p>
         </p:txBody>
       </p:sp>
@@ -396,7 +396,7 @@
               <a:rPr lang="en-US"/>
               <a:t>2</a:t>
             </a:fld>
-            <a:endParaRPr lang="en-US"/>
+            <a:endParaRPr lang="en-US" dirty="0"/>
           </a:p>
         </p:txBody>
       </p:sp>
@@ -480,7 +480,7 @@
               <a:rPr lang="en-US"/>
               <a:t>4</a:t>
             </a:fld>
-            <a:endParaRPr lang="en-US"/>
+            <a:endParaRPr lang="en-US" dirty="0"/>
           </a:p>
         </p:txBody>
       </p:sp>
@@ -1196,7 +1196,10 @@
         </p:spPr>
         <p:txBody>
           <a:bodyPr/>
-          <a:p/>
+          <a:lstStyle/>
+          <a:p>
+            <a:endParaRPr dirty="0"/>
+          </a:p>
         </p:txBody>
       </p:sp>
       <p:sp>
@@ -1380,7 +1383,7 @@
               <a:buNone/>
             </a:pPr>
             <a:r>
-              <a:rPr sz="900" b="0">
+              <a:rPr sz="900" b="0" dirty="0">
                 <a:solidFill>
                   <a:srgbClr val="8A9BA8"/>
                 </a:solidFill>
@@ -1455,7 +1458,7 @@
           <a:bodyPr/>
           <a:lstStyle/>
           <a:p>
-            <a:endParaRPr/>
+            <a:endParaRPr dirty="0"/>
           </a:p>
         </p:txBody>
       </p:sp>
@@ -1487,7 +1490,7 @@
           <a:bodyPr/>
           <a:lstStyle/>
           <a:p>
-            <a:endParaRPr/>
+            <a:endParaRPr dirty="0"/>
           </a:p>
         </p:txBody>
       </p:sp>
@@ -1516,7 +1519,7 @@
               <a:buNone/>
             </a:pPr>
             <a:r>
-              <a:rPr sz="2200" b="1">
+              <a:rPr sz="2200" b="1" dirty="0">
                 <a:solidFill>
                   <a:srgbClr val="FFFFFF"/>
                 </a:solidFill>
@@ -1555,7 +1558,7 @@
               <a:buNone/>
             </a:pPr>
             <a:r>
-              <a:rPr sz="950" b="0">
+              <a:rPr sz="950" b="0" dirty="0">
                 <a:solidFill>
                   <a:srgbClr val="5B6770"/>
                 </a:solidFill>
@@ -1633,7 +1636,7 @@
               <a:buNone/>
             </a:pPr>
             <a:r>
-              <a:rPr sz="900" b="0">
+              <a:rPr sz="900" b="0" dirty="0">
                 <a:solidFill>
                   <a:srgbClr val="8A9BA8"/>
                 </a:solidFill>
@@ -1675,7 +1678,7 @@
           <a:bodyPr/>
           <a:lstStyle/>
           <a:p>
-            <a:endParaRPr/>
+            <a:endParaRPr dirty="0"/>
           </a:p>
         </p:txBody>
       </p:sp>
@@ -1707,7 +1710,7 @@
           <a:bodyPr/>
           <a:lstStyle/>
           <a:p>
-            <a:endParaRPr/>
+            <a:endParaRPr dirty="0"/>
           </a:p>
         </p:txBody>
       </p:sp>
@@ -1775,7 +1778,7 @@
               <a:buNone/>
             </a:pPr>
             <a:r>
-              <a:rPr sz="900" b="1">
+              <a:rPr sz="900" b="1" dirty="0">
                 <a:solidFill>
                   <a:srgbClr val="0F4C5C"/>
                 </a:solidFill>
@@ -1817,7 +1820,7 @@
           <a:bodyPr/>
           <a:lstStyle/>
           <a:p>
-            <a:endParaRPr/>
+            <a:endParaRPr dirty="0"/>
           </a:p>
         </p:txBody>
       </p:sp>
@@ -1849,7 +1852,7 @@
           <a:bodyPr/>
           <a:lstStyle/>
           <a:p>
-            <a:endParaRPr/>
+            <a:endParaRPr dirty="0"/>
           </a:p>
         </p:txBody>
       </p:sp>
@@ -1878,7 +1881,7 @@
               <a:buNone/>
             </a:pPr>
             <a:r>
-              <a:rPr sz="900" b="1">
+              <a:rPr sz="900" b="1" dirty="0">
                 <a:solidFill>
                   <a:srgbClr val="FFFFFF"/>
                 </a:solidFill>
@@ -1920,7 +1923,7 @@
               <a:buNone/>
             </a:pPr>
             <a:r>
-              <a:rPr lang="en-US" sz="900" dirty="0">
+              <a:rPr lang="en-US" sz="1000" dirty="0">
                 <a:solidFill>
                   <a:srgbClr val="1F2A30"/>
                 </a:solidFill>
@@ -1930,7 +1933,7 @@
               </a:rPr>
               <a:t>空パウチ（1束50袋・段ボール）</a:t>
             </a:r>
-            <a:endParaRPr lang="en-US" sz="900" dirty="0"/>
+            <a:endParaRPr lang="en-US" sz="1000" dirty="0"/>
           </a:p>
           <a:p>
             <a:pPr marL="0" indent="0">
@@ -1940,7 +1943,7 @@
               <a:buNone/>
             </a:pPr>
             <a:r>
-              <a:rPr lang="en-US" sz="900" b="1" u="sng" dirty="0">
+              <a:rPr lang="en-US" sz="1000" b="1" u="sng" dirty="0">
                 <a:solidFill>
                   <a:srgbClr val="0F4C5C"/>
                 </a:solidFill>
@@ -1950,7 +1953,7 @@
               </a:rPr>
               <a:t>人手 ① 搬入</a:t>
             </a:r>
-            <a:endParaRPr lang="en-US" sz="900" u="sng" dirty="0"/>
+            <a:endParaRPr lang="en-US" sz="1000" u="sng" dirty="0"/>
           </a:p>
           <a:p>
             <a:pPr marL="0" indent="0">
@@ -1960,7 +1963,7 @@
               <a:buNone/>
             </a:pPr>
             <a:r>
-              <a:rPr lang="en-US" sz="900" dirty="0">
+              <a:rPr lang="en-US" sz="1000" dirty="0">
                 <a:solidFill>
                   <a:srgbClr val="1F2A30"/>
                 </a:solidFill>
@@ -1970,7 +1973,7 @@
               </a:rPr>
               <a:t>投入担当が数箱ずつ製袋室へ運ぶ</a:t>
             </a:r>
-            <a:endParaRPr lang="en-US" sz="900" dirty="0"/>
+            <a:endParaRPr lang="en-US" sz="1000" dirty="0"/>
           </a:p>
         </p:txBody>
       </p:sp>
@@ -2002,7 +2005,7 @@
           <a:bodyPr/>
           <a:lstStyle/>
           <a:p>
-            <a:endParaRPr/>
+            <a:endParaRPr dirty="0"/>
           </a:p>
         </p:txBody>
       </p:sp>
@@ -2034,7 +2037,7 @@
           <a:bodyPr/>
           <a:lstStyle/>
           <a:p>
-            <a:endParaRPr/>
+            <a:endParaRPr dirty="0"/>
           </a:p>
         </p:txBody>
       </p:sp>
@@ -2105,7 +2108,7 @@
           <a:bodyPr/>
           <a:lstStyle/>
           <a:p>
-            <a:endParaRPr/>
+            <a:endParaRPr dirty="0"/>
           </a:p>
         </p:txBody>
       </p:sp>
@@ -2137,7 +2140,7 @@
           <a:bodyPr/>
           <a:lstStyle/>
           <a:p>
-            <a:endParaRPr/>
+            <a:endParaRPr dirty="0"/>
           </a:p>
         </p:txBody>
       </p:sp>
@@ -2208,7 +2211,7 @@
               <a:buNone/>
             </a:pPr>
             <a:r>
-              <a:rPr sz="800" b="1">
+              <a:rPr sz="900" b="1" dirty="0">
                 <a:solidFill>
                   <a:srgbClr val="0F4C5C"/>
                 </a:solidFill>
@@ -2218,7 +2221,7 @@
               </a:rPr>
               <a:t>人手 投入担当（②〜⑦）</a:t>
             </a:r>
-            <a:endParaRPr lang="en-US" sz="900" u="sng" dirty="0"/>
+            <a:endParaRPr lang="en-US" sz="1000" u="sng" dirty="0"/>
           </a:p>
           <a:p>
             <a:pPr marL="0" indent="0">
@@ -2228,7 +2231,7 @@
               <a:buNone/>
             </a:pPr>
             <a:r>
-              <a:rPr sz="800" b="0">
+              <a:rPr sz="900" b="0" dirty="0">
                 <a:solidFill>
                   <a:srgbClr val="1F2A30"/>
                 </a:solidFill>
@@ -2247,7 +2250,7 @@
               <a:buNone/>
             </a:pPr>
             <a:r>
-              <a:rPr sz="800" b="1">
+              <a:rPr sz="900" b="1" dirty="0">
                 <a:solidFill>
                   <a:srgbClr val="0F4C5C"/>
                 </a:solidFill>
@@ -2266,7 +2269,7 @@
               <a:buNone/>
             </a:pPr>
             <a:r>
-              <a:rPr sz="800" b="0">
+              <a:rPr sz="900" b="0" dirty="0">
                 <a:solidFill>
                   <a:srgbClr val="1F2A30"/>
                 </a:solidFill>
@@ -2285,7 +2288,7 @@
               <a:buNone/>
             </a:pPr>
             <a:r>
-              <a:rPr sz="800" b="0">
+              <a:rPr sz="900" b="0" dirty="0">
                 <a:solidFill>
                   <a:srgbClr val="5B6770"/>
                 </a:solidFill>
@@ -2326,7 +2329,7 @@
           <a:bodyPr/>
           <a:lstStyle/>
           <a:p>
-            <a:endParaRPr/>
+            <a:endParaRPr dirty="0"/>
           </a:p>
         </p:txBody>
       </p:sp>
@@ -2360,7 +2363,7 @@
           <a:bodyPr/>
           <a:lstStyle/>
           <a:p>
-            <a:endParaRPr/>
+            <a:endParaRPr dirty="0"/>
           </a:p>
         </p:txBody>
       </p:sp>
@@ -2392,7 +2395,7 @@
           <a:bodyPr/>
           <a:lstStyle/>
           <a:p>
-            <a:endParaRPr/>
+            <a:endParaRPr dirty="0"/>
           </a:p>
         </p:txBody>
       </p:sp>
@@ -2426,7 +2429,7 @@
           <a:bodyPr/>
           <a:lstStyle/>
           <a:p>
-            <a:endParaRPr/>
+            <a:endParaRPr dirty="0"/>
           </a:p>
         </p:txBody>
       </p:sp>
@@ -2531,7 +2534,7 @@
           <a:bodyPr/>
           <a:lstStyle/>
           <a:p>
-            <a:endParaRPr/>
+            <a:endParaRPr dirty="0"/>
           </a:p>
         </p:txBody>
       </p:sp>
@@ -2563,7 +2566,7 @@
           <a:bodyPr/>
           <a:lstStyle/>
           <a:p>
-            <a:endParaRPr/>
+            <a:endParaRPr dirty="0"/>
           </a:p>
         </p:txBody>
       </p:sp>
@@ -2592,7 +2595,7 @@
               <a:buNone/>
             </a:pPr>
             <a:r>
-              <a:rPr sz="1000" b="1">
+              <a:rPr sz="1000" b="1" dirty="0">
                 <a:solidFill>
                   <a:srgbClr val="FFFFFF"/>
                 </a:solidFill>
@@ -2634,7 +2637,7 @@
               <a:buNone/>
             </a:pPr>
             <a:r>
-              <a:rPr sz="800" b="1">
+              <a:rPr sz="900" b="1" dirty="0">
                 <a:solidFill>
                   <a:srgbClr val="0F4C5C"/>
                 </a:solidFill>
@@ -2644,7 +2647,7 @@
               </a:rPr>
               <a:t>人手 充填担当1名（⑨）</a:t>
             </a:r>
-            <a:endParaRPr lang="en-US" sz="900" u="sng" dirty="0"/>
+            <a:endParaRPr lang="en-US" sz="1000" u="sng" dirty="0"/>
           </a:p>
           <a:p>
             <a:pPr marL="0" indent="0">
@@ -2654,7 +2657,7 @@
               <a:buNone/>
             </a:pPr>
             <a:r>
-              <a:rPr sz="800" b="0">
+              <a:rPr sz="900" b="0" dirty="0">
                 <a:solidFill>
                   <a:srgbClr val="1F2A30"/>
                 </a:solidFill>
@@ -2673,7 +2676,7 @@
               <a:buNone/>
             </a:pPr>
             <a:r>
-              <a:rPr sz="800" b="0">
+              <a:rPr sz="900" b="0" dirty="0">
                 <a:solidFill>
                   <a:srgbClr val="5B6770"/>
                 </a:solidFill>
@@ -2714,7 +2717,7 @@
           <a:bodyPr/>
           <a:lstStyle/>
           <a:p>
-            <a:endParaRPr/>
+            <a:endParaRPr dirty="0"/>
           </a:p>
         </p:txBody>
       </p:sp>
@@ -2748,7 +2751,7 @@
           <a:bodyPr/>
           <a:lstStyle/>
           <a:p>
-            <a:endParaRPr/>
+            <a:endParaRPr dirty="0"/>
           </a:p>
         </p:txBody>
       </p:sp>
@@ -2819,7 +2822,7 @@
           <a:bodyPr/>
           <a:lstStyle/>
           <a:p>
-            <a:endParaRPr/>
+            <a:endParaRPr dirty="0"/>
           </a:p>
         </p:txBody>
       </p:sp>
@@ -2851,7 +2854,7 @@
           <a:bodyPr/>
           <a:lstStyle/>
           <a:p>
-            <a:endParaRPr/>
+            <a:endParaRPr dirty="0"/>
           </a:p>
         </p:txBody>
       </p:sp>
@@ -2922,7 +2925,7 @@
               <a:buNone/>
             </a:pPr>
             <a:r>
-              <a:rPr sz="900" b="1">
+              <a:rPr sz="1000" b="1" dirty="0">
                 <a:solidFill>
                   <a:srgbClr val="0F4C5C"/>
                 </a:solidFill>
@@ -2932,7 +2935,7 @@
               </a:rPr>
               <a:t>人手 包装担当2〜3名（⑩）</a:t>
             </a:r>
-            <a:endParaRPr lang="en-US" sz="900" u="sng" dirty="0"/>
+            <a:endParaRPr lang="en-US" sz="1000" u="sng" dirty="0"/>
           </a:p>
           <a:p>
             <a:pPr marL="0" indent="0">
@@ -2942,7 +2945,7 @@
               <a:buNone/>
             </a:pPr>
             <a:r>
-              <a:rPr sz="900" b="0">
+              <a:rPr sz="1000" b="0" dirty="0">
                 <a:solidFill>
                   <a:srgbClr val="1F2A30"/>
                 </a:solidFill>
@@ -2983,7 +2986,7 @@
           <a:bodyPr/>
           <a:lstStyle/>
           <a:p>
-            <a:endParaRPr/>
+            <a:endParaRPr dirty="0"/>
           </a:p>
         </p:txBody>
       </p:sp>
@@ -3017,7 +3020,7 @@
           <a:bodyPr/>
           <a:lstStyle/>
           <a:p>
-            <a:endParaRPr/>
+            <a:endParaRPr dirty="0"/>
           </a:p>
         </p:txBody>
       </p:sp>
@@ -3049,7 +3052,7 @@
           <a:bodyPr/>
           <a:lstStyle/>
           <a:p>
-            <a:endParaRPr/>
+            <a:endParaRPr dirty="0"/>
           </a:p>
         </p:txBody>
       </p:sp>
@@ -3083,7 +3086,7 @@
           <a:bodyPr/>
           <a:lstStyle/>
           <a:p>
-            <a:endParaRPr/>
+            <a:endParaRPr dirty="0"/>
           </a:p>
         </p:txBody>
       </p:sp>
@@ -3115,7 +3118,7 @@
           <a:bodyPr/>
           <a:lstStyle/>
           <a:p>
-            <a:endParaRPr/>
+            <a:endParaRPr dirty="0"/>
           </a:p>
         </p:txBody>
       </p:sp>
@@ -3149,7 +3152,7 @@
           <a:bodyPr/>
           <a:lstStyle/>
           <a:p>
-            <a:endParaRPr/>
+            <a:endParaRPr dirty="0"/>
           </a:p>
         </p:txBody>
       </p:sp>
@@ -3220,7 +3223,7 @@
           <a:bodyPr/>
           <a:lstStyle/>
           <a:p>
-            <a:endParaRPr/>
+            <a:endParaRPr sz="2000" dirty="0"/>
           </a:p>
         </p:txBody>
       </p:sp>
@@ -3252,7 +3255,7 @@
           <a:bodyPr/>
           <a:lstStyle/>
           <a:p>
-            <a:endParaRPr/>
+            <a:endParaRPr sz="2000" dirty="0"/>
           </a:p>
         </p:txBody>
       </p:sp>
@@ -3284,7 +3287,7 @@
           <a:bodyPr/>
           <a:lstStyle/>
           <a:p>
-            <a:endParaRPr/>
+            <a:endParaRPr sz="2000" dirty="0"/>
           </a:p>
         </p:txBody>
       </p:sp>
@@ -3316,7 +3319,7 @@
           <a:bodyPr/>
           <a:lstStyle/>
           <a:p>
-            <a:endParaRPr/>
+            <a:endParaRPr dirty="0"/>
           </a:p>
         </p:txBody>
       </p:sp>
@@ -3348,7 +3351,7 @@
           <a:bodyPr/>
           <a:lstStyle/>
           <a:p>
-            <a:endParaRPr/>
+            <a:endParaRPr dirty="0"/>
           </a:p>
         </p:txBody>
       </p:sp>
@@ -3417,7 +3420,7 @@
               <a:buChar char="•"/>
             </a:pPr>
             <a:r>
-              <a:rPr sz="850" b="0">
+              <a:rPr sz="900" b="0" dirty="0">
                 <a:solidFill>
                   <a:srgbClr val="1F2A30"/>
                 </a:solidFill>
@@ -3427,7 +3430,7 @@
               </a:rPr>
               <a:t>稼働 8:30〜26:00（17.5時間）</a:t>
             </a:r>
-            <a:endParaRPr lang="en-US" sz="850" dirty="0"/>
+            <a:endParaRPr lang="en-US" sz="900" dirty="0"/>
           </a:p>
           <a:p>
             <a:pPr marL="127000" indent="-127000">
@@ -3435,7 +3438,7 @@
               <a:buChar char="•"/>
             </a:pPr>
             <a:r>
-              <a:rPr sz="850" b="0">
+              <a:rPr sz="900" b="0" dirty="0">
                 <a:solidFill>
                   <a:srgbClr val="1F2A30"/>
                 </a:solidFill>
@@ -3452,7 +3455,7 @@
               <a:buChar char="•"/>
             </a:pPr>
             <a:r>
-              <a:rPr sz="850" b="0">
+              <a:rPr sz="900" b="0" dirty="0">
                 <a:solidFill>
                   <a:srgbClr val="1F2A30"/>
                 </a:solidFill>
@@ -3469,7 +3472,7 @@
               <a:buChar char="•"/>
             </a:pPr>
             <a:r>
-              <a:rPr sz="850" b="0">
+              <a:rPr sz="900" b="0" dirty="0">
                 <a:solidFill>
                   <a:srgbClr val="1F2A30"/>
                 </a:solidFill>
@@ -3510,7 +3513,7 @@
           <a:bodyPr/>
           <a:lstStyle/>
           <a:p>
-            <a:endParaRPr/>
+            <a:endParaRPr dirty="0"/>
           </a:p>
         </p:txBody>
       </p:sp>
@@ -3542,7 +3545,7 @@
           <a:bodyPr/>
           <a:lstStyle/>
           <a:p>
-            <a:endParaRPr/>
+            <a:endParaRPr dirty="0"/>
           </a:p>
         </p:txBody>
       </p:sp>
@@ -3611,7 +3614,7 @@
               <a:buChar char="•"/>
             </a:pPr>
             <a:r>
-              <a:rPr sz="850" b="0">
+              <a:rPr sz="900" b="0" dirty="0">
                 <a:solidFill>
                   <a:srgbClr val="1F2A30"/>
                 </a:solidFill>
@@ -3621,7 +3624,7 @@
               </a:rPr>
               <a:t>1品種の日 15万袋／日（稼働日の約半分）</a:t>
             </a:r>
-            <a:endParaRPr lang="en-US" sz="850" dirty="0"/>
+            <a:endParaRPr lang="en-US" sz="900" dirty="0"/>
           </a:p>
           <a:p>
             <a:pPr marL="127000" indent="-127000">
@@ -3629,7 +3632,7 @@
               <a:buChar char="•"/>
             </a:pPr>
             <a:r>
-              <a:rPr sz="850" b="0">
+              <a:rPr sz="900" b="0" dirty="0">
                 <a:solidFill>
                   <a:srgbClr val="1F2A30"/>
                 </a:solidFill>
@@ -3646,7 +3649,7 @@
               <a:buChar char="•"/>
             </a:pPr>
             <a:r>
-              <a:rPr sz="850" b="0">
+              <a:rPr sz="900" b="0" dirty="0">
                 <a:solidFill>
                   <a:srgbClr val="1F2A30"/>
                 </a:solidFill>
@@ -3663,7 +3666,7 @@
               <a:buChar char="•"/>
             </a:pPr>
             <a:r>
-              <a:rPr sz="850" b="0">
+              <a:rPr sz="900" b="0" dirty="0">
                 <a:solidFill>
                   <a:srgbClr val="1F2A30"/>
                 </a:solidFill>
@@ -3704,7 +3707,7 @@
           <a:bodyPr/>
           <a:lstStyle/>
           <a:p>
-            <a:endParaRPr/>
+            <a:endParaRPr dirty="0"/>
           </a:p>
         </p:txBody>
       </p:sp>
@@ -3736,7 +3739,7 @@
           <a:bodyPr/>
           <a:lstStyle/>
           <a:p>
-            <a:endParaRPr/>
+            <a:endParaRPr dirty="0"/>
           </a:p>
         </p:txBody>
       </p:sp>
@@ -3805,7 +3808,7 @@
               <a:buChar char="•"/>
             </a:pPr>
             <a:r>
-              <a:rPr lang="en-US" sz="850" dirty="0">
+              <a:rPr lang="en-US" sz="900" dirty="0">
                 <a:solidFill>
                   <a:srgbClr val="1F2A30"/>
                 </a:solidFill>
@@ -3815,7 +3818,7 @@
               </a:rPr>
               <a:t>製袋室 2名（オペレーター＋投入パート）</a:t>
             </a:r>
-            <a:endParaRPr lang="en-US" sz="850" dirty="0"/>
+            <a:endParaRPr lang="en-US" sz="900" dirty="0"/>
           </a:p>
           <a:p>
             <a:pPr marL="127000" indent="-127000">
@@ -3823,7 +3826,7 @@
               <a:buChar char="•"/>
             </a:pPr>
             <a:r>
-              <a:rPr lang="en-US" sz="850" dirty="0">
+              <a:rPr lang="en-US" sz="900" dirty="0">
                 <a:solidFill>
                   <a:srgbClr val="1F2A30"/>
                 </a:solidFill>
@@ -3833,7 +3836,7 @@
               </a:rPr>
               <a:t>充填室 1名／包装室 2〜3名</a:t>
             </a:r>
-            <a:endParaRPr lang="en-US" sz="850" dirty="0"/>
+            <a:endParaRPr lang="en-US" sz="900" dirty="0"/>
           </a:p>
           <a:p>
             <a:pPr marL="127000" indent="-127000">
@@ -3841,7 +3844,7 @@
               <a:buChar char="•"/>
             </a:pPr>
             <a:r>
-              <a:rPr lang="en-US" sz="850" dirty="0">
+              <a:rPr lang="en-US" sz="900" dirty="0">
                 <a:solidFill>
                   <a:srgbClr val="1F2A30"/>
                 </a:solidFill>
@@ -3851,7 +3854,7 @@
               </a:rPr>
               <a:t>合計 5〜6名／シフト（日勤・夜勤同じ）</a:t>
             </a:r>
-            <a:endParaRPr lang="en-US" sz="850" dirty="0"/>
+            <a:endParaRPr lang="en-US" sz="900" dirty="0"/>
           </a:p>
           <a:p>
             <a:pPr marL="127000" indent="-127000">
@@ -3859,7 +3862,7 @@
               <a:buChar char="•"/>
             </a:pPr>
             <a:r>
-              <a:rPr lang="en-US" sz="850" dirty="0">
+              <a:rPr lang="en-US" sz="900" dirty="0">
                 <a:solidFill>
                   <a:srgbClr val="1F2A30"/>
                 </a:solidFill>
@@ -3869,7 +3872,7 @@
               </a:rPr>
               <a:t>投入パートの作業を自動化するのが本事業</a:t>
             </a:r>
-            <a:endParaRPr lang="en-US" sz="850" dirty="0"/>
+            <a:endParaRPr lang="en-US" sz="900" dirty="0"/>
           </a:p>
         </p:txBody>
       </p:sp>
@@ -3901,7 +3904,7 @@
           <a:lstStyle/>
           <a:p>
             <a:pPr algn="ctr"/>
-            <a:endParaRPr/>
+            <a:endParaRPr dirty="0"/>
           </a:p>
         </p:txBody>
       </p:sp>
@@ -4003,7 +4006,7 @@
           <a:lstStyle/>
           <a:p>
             <a:pPr algn="ctr"/>
-            <a:endParaRPr/>
+            <a:endParaRPr dirty="0"/>
           </a:p>
         </p:txBody>
       </p:sp>
@@ -4035,7 +4038,7 @@
           <a:lstStyle/>
           <a:p>
             <a:pPr algn="ctr"/>
-            <a:endParaRPr/>
+            <a:endParaRPr dirty="0"/>
           </a:p>
         </p:txBody>
       </p:sp>
@@ -4063,7 +4066,7 @@
           <a:p>
             <a:pPr algn="l"/>
             <a:r>
-              <a:rPr sz="2200" b="1">
+              <a:rPr sz="2200" b="1" dirty="0">
                 <a:solidFill>
                   <a:srgbClr val="FFFFFF"/>
                 </a:solidFill>
@@ -4100,7 +4103,7 @@
           <a:p>
             <a:pPr algn="l"/>
             <a:r>
-              <a:rPr sz="1100" b="0">
+              <a:rPr sz="1100" b="0" dirty="0">
                 <a:solidFill>
                   <a:srgbClr val="5B6770"/>
                 </a:solidFill>
@@ -4137,7 +4140,7 @@
           <a:p>
             <a:pPr algn="l"/>
             <a:r>
-              <a:rPr sz="900" b="0">
+              <a:rPr sz="900" b="0" dirty="0">
                 <a:solidFill>
                   <a:srgbClr val="8A9BA8"/>
                 </a:solidFill>
@@ -4174,7 +4177,7 @@
           <a:p>
             <a:pPr algn="r"/>
             <a:r>
-              <a:rPr sz="900" b="0">
+              <a:rPr sz="900" b="0" dirty="0">
                 <a:solidFill>
                   <a:srgbClr val="8A9BA8"/>
                 </a:solidFill>
@@ -4189,13 +4192,520 @@
       </p:sp>
       <p:sp>
         <p:nvSpPr>
-          <p:cNvPr id="8" name="Rectangle 7"/>
+          <p:cNvPr id="9" name="Rectangle 8"/>
           <p:cNvSpPr/>
           <p:nvPr/>
         </p:nvSpPr>
         <p:spPr>
           <a:xfrm>
             <a:off x="320040" y="1097280"/>
+            <a:ext cx="1463040" cy="274320"/>
+          </a:xfrm>
+          <a:prstGeom prst="rect">
+            <a:avLst/>
+          </a:prstGeom>
+          <a:solidFill>
+            <a:srgbClr val="5B6770"/>
+          </a:solidFill>
+          <a:ln w="12700">
+            <a:solidFill>
+              <a:srgbClr val="5B6770"/>
+            </a:solidFill>
+          </a:ln>
+        </p:spPr>
+        <p:txBody>
+          <a:bodyPr rtlCol="0" anchor="ctr"/>
+          <a:lstStyle/>
+          <a:p>
+            <a:pPr algn="ctr"/>
+            <a:endParaRPr dirty="0"/>
+          </a:p>
+        </p:txBody>
+      </p:sp>
+      <p:sp>
+        <p:nvSpPr>
+          <p:cNvPr id="10" name="TextBox 9"/>
+          <p:cNvSpPr txBox="1"/>
+          <p:nvPr/>
+        </p:nvSpPr>
+        <p:spPr>
+          <a:xfrm>
+            <a:off x="320040" y="1097280"/>
+            <a:ext cx="1463040" cy="274320"/>
+          </a:xfrm>
+          <a:prstGeom prst="rect">
+            <a:avLst/>
+          </a:prstGeom>
+          <a:noFill/>
+        </p:spPr>
+        <p:txBody>
+          <a:bodyPr wrap="square" lIns="0" tIns="0" rIns="0" bIns="0" anchor="ctr">
+            <a:noAutofit/>
+          </a:bodyPr>
+          <a:lstStyle/>
+          <a:p>
+            <a:pPr algn="ctr"/>
+            <a:r>
+              <a:rPr sz="1100" b="1" dirty="0">
+                <a:solidFill>
+                  <a:srgbClr val="FFFFFF"/>
+                </a:solidFill>
+                <a:latin typeface="BIZ UDPGothic"/>
+                <a:ea typeface="BIZ UDPGothic"/>
+                <a:cs typeface="BIZ UDPGothic"/>
+              </a:rPr>
+              <a:t>製品と容器の写真</a:t>
+            </a:r>
+          </a:p>
+        </p:txBody>
+      </p:sp>
+      <p:sp>
+        <p:nvSpPr>
+          <p:cNvPr id="11" name="Rectangle 10"/>
+          <p:cNvSpPr/>
+          <p:nvPr/>
+        </p:nvSpPr>
+        <p:spPr>
+          <a:xfrm>
+            <a:off x="411480" y="1463040"/>
+            <a:ext cx="1933955" cy="969264"/>
+          </a:xfrm>
+          <a:prstGeom prst="rect">
+            <a:avLst/>
+          </a:prstGeom>
+          <a:solidFill>
+            <a:srgbClr val="FFFFFF"/>
+          </a:solidFill>
+          <a:ln w="9525">
+            <a:solidFill>
+              <a:srgbClr val="C9D3D8"/>
+            </a:solidFill>
+          </a:ln>
+        </p:spPr>
+        <p:txBody>
+          <a:bodyPr rtlCol="0" anchor="ctr"/>
+          <a:lstStyle/>
+          <a:p>
+            <a:pPr algn="ctr"/>
+            <a:endParaRPr sz="2400" dirty="0"/>
+          </a:p>
+        </p:txBody>
+      </p:sp>
+      <p:pic>
+        <p:nvPicPr>
+          <p:cNvPr id="12" name="Picture 11" descr="balance_pawamina_orange_product.jpg"/>
+          <p:cNvPicPr>
+            <a:picLocks noChangeAspect="1"/>
+          </p:cNvPicPr>
+          <p:nvPr/>
+        </p:nvPicPr>
+        <p:blipFill>
+          <a:blip r:embed="rId2"/>
+          <a:stretch>
+            <a:fillRect/>
+          </a:stretch>
+        </p:blipFill>
+        <p:spPr>
+          <a:xfrm>
+            <a:off x="951496" y="1499616"/>
+            <a:ext cx="853922" cy="896112"/>
+          </a:xfrm>
+          <a:prstGeom prst="rect">
+            <a:avLst/>
+          </a:prstGeom>
+        </p:spPr>
+      </p:pic>
+      <p:sp>
+        <p:nvSpPr>
+          <p:cNvPr id="13" name="TextBox 12"/>
+          <p:cNvSpPr txBox="1"/>
+          <p:nvPr/>
+        </p:nvSpPr>
+        <p:spPr>
+          <a:xfrm>
+            <a:off x="411480" y="2450592"/>
+            <a:ext cx="1933955" cy="310896"/>
+          </a:xfrm>
+          <a:prstGeom prst="rect">
+            <a:avLst/>
+          </a:prstGeom>
+          <a:noFill/>
+        </p:spPr>
+        <p:txBody>
+          <a:bodyPr wrap="square" lIns="0" tIns="0" rIns="0" bIns="0" anchor="t">
+            <a:noAutofit/>
+          </a:bodyPr>
+          <a:lstStyle/>
+          <a:p>
+            <a:pPr algn="l"/>
+            <a:r>
+              <a:rPr sz="1000" b="0" dirty="0">
+                <a:solidFill>
+                  <a:srgbClr val="1F2A30"/>
+                </a:solidFill>
+                <a:latin typeface="BIZ UDPGothic"/>
+                <a:ea typeface="BIZ UDPGothic"/>
+                <a:cs typeface="BIZ UDPGothic"/>
+              </a:rPr>
+              <a:t>① 完成品の例：自社グループ製品「パワミナ200 Jelly」</a:t>
+            </a:r>
+            <a:endParaRPr lang="en-US" sz="1000" b="0" dirty="0">
+              <a:solidFill>
+                <a:srgbClr val="1F2A30"/>
+              </a:solidFill>
+              <a:latin typeface="BIZ UDPGothic"/>
+              <a:ea typeface="BIZ UDPGothic"/>
+              <a:cs typeface="BIZ UDPGothic"/>
+            </a:endParaRPr>
+          </a:p>
+          <a:p>
+            <a:pPr algn="l"/>
+            <a:r>
+              <a:rPr sz="1000" b="0" dirty="0">
+                <a:solidFill>
+                  <a:srgbClr val="1F2A30"/>
+                </a:solidFill>
+                <a:latin typeface="BIZ UDPGothic"/>
+                <a:ea typeface="BIZ UDPGothic"/>
+                <a:cs typeface="BIZ UDPGothic"/>
+              </a:rPr>
+              <a:t>（バランス㈱販売）</a:t>
+            </a:r>
+          </a:p>
+        </p:txBody>
+      </p:sp>
+      <p:sp>
+        <p:nvSpPr>
+          <p:cNvPr id="14" name="Rectangle 13"/>
+          <p:cNvSpPr/>
+          <p:nvPr/>
+        </p:nvSpPr>
+        <p:spPr>
+          <a:xfrm>
+            <a:off x="2455164" y="1463040"/>
+            <a:ext cx="1933955" cy="969264"/>
+          </a:xfrm>
+          <a:prstGeom prst="rect">
+            <a:avLst/>
+          </a:prstGeom>
+          <a:solidFill>
+            <a:srgbClr val="FFFFFF"/>
+          </a:solidFill>
+          <a:ln w="9525">
+            <a:solidFill>
+              <a:srgbClr val="C9D3D8"/>
+            </a:solidFill>
+          </a:ln>
+        </p:spPr>
+        <p:txBody>
+          <a:bodyPr rtlCol="0" anchor="ctr"/>
+          <a:lstStyle/>
+          <a:p>
+            <a:pPr algn="ctr"/>
+            <a:endParaRPr sz="2400" dirty="0"/>
+          </a:p>
+        </p:txBody>
+      </p:sp>
+      <p:pic>
+        <p:nvPicPr>
+          <p:cNvPr id="15" name="Picture 14" descr="tombow_spout_pouch_1.jpg"/>
+          <p:cNvPicPr>
+            <a:picLocks noChangeAspect="1"/>
+          </p:cNvPicPr>
+          <p:nvPr/>
+        </p:nvPicPr>
+        <p:blipFill>
+          <a:blip r:embed="rId3"/>
+          <a:stretch>
+            <a:fillRect/>
+          </a:stretch>
+        </p:blipFill>
+        <p:spPr>
+          <a:xfrm>
+            <a:off x="2748897" y="1499616"/>
+            <a:ext cx="1346489" cy="896112"/>
+          </a:xfrm>
+          <a:prstGeom prst="rect">
+            <a:avLst/>
+          </a:prstGeom>
+        </p:spPr>
+      </p:pic>
+      <p:sp>
+        <p:nvSpPr>
+          <p:cNvPr id="16" name="TextBox 15"/>
+          <p:cNvSpPr txBox="1"/>
+          <p:nvPr/>
+        </p:nvSpPr>
+        <p:spPr>
+          <a:xfrm>
+            <a:off x="2455164" y="2450592"/>
+            <a:ext cx="1933955" cy="310896"/>
+          </a:xfrm>
+          <a:prstGeom prst="rect">
+            <a:avLst/>
+          </a:prstGeom>
+          <a:noFill/>
+        </p:spPr>
+        <p:txBody>
+          <a:bodyPr wrap="square" lIns="0" tIns="0" rIns="0" bIns="0" anchor="t">
+            <a:noAutofit/>
+          </a:bodyPr>
+          <a:lstStyle/>
+          <a:p>
+            <a:pPr algn="l"/>
+            <a:r>
+              <a:rPr sz="1000" b="0" dirty="0">
+                <a:solidFill>
+                  <a:srgbClr val="1F2A30"/>
+                </a:solidFill>
+                <a:latin typeface="BIZ UDPGothic"/>
+                <a:ea typeface="BIZ UDPGothic"/>
+                <a:cs typeface="BIZ UDPGothic"/>
+              </a:rPr>
+              <a:t>② 口栓（スパウト）付きパウチ。アルミ袋にスパウトを付けた状態</a:t>
+            </a:r>
+          </a:p>
+        </p:txBody>
+      </p:sp>
+      <p:sp>
+        <p:nvSpPr>
+          <p:cNvPr id="17" name="Rectangle 16"/>
+          <p:cNvSpPr/>
+          <p:nvPr/>
+        </p:nvSpPr>
+        <p:spPr>
+          <a:xfrm>
+            <a:off x="411480" y="2975121"/>
+            <a:ext cx="1933955" cy="969264"/>
+          </a:xfrm>
+          <a:prstGeom prst="rect">
+            <a:avLst/>
+          </a:prstGeom>
+          <a:solidFill>
+            <a:srgbClr val="FFFFFF"/>
+          </a:solidFill>
+          <a:ln w="9525">
+            <a:solidFill>
+              <a:srgbClr val="C9D3D8"/>
+            </a:solidFill>
+          </a:ln>
+        </p:spPr>
+        <p:txBody>
+          <a:bodyPr rtlCol="0" anchor="ctr"/>
+          <a:lstStyle/>
+          <a:p>
+            <a:pPr algn="ctr"/>
+            <a:endParaRPr sz="2400" dirty="0"/>
+          </a:p>
+        </p:txBody>
+      </p:sp>
+      <p:pic>
+        <p:nvPicPr>
+          <p:cNvPr id="18" name="Picture 17" descr="tombow_spout_pouch_cap_2.jpg"/>
+          <p:cNvPicPr>
+            <a:picLocks noChangeAspect="1"/>
+          </p:cNvPicPr>
+          <p:nvPr/>
+        </p:nvPicPr>
+        <p:blipFill>
+          <a:blip r:embed="rId4"/>
+          <a:stretch>
+            <a:fillRect/>
+          </a:stretch>
+        </p:blipFill>
+        <p:spPr>
+          <a:xfrm>
+            <a:off x="693125" y="3011697"/>
+            <a:ext cx="1370665" cy="896112"/>
+          </a:xfrm>
+          <a:prstGeom prst="rect">
+            <a:avLst/>
+          </a:prstGeom>
+        </p:spPr>
+      </p:pic>
+      <p:sp>
+        <p:nvSpPr>
+          <p:cNvPr id="19" name="TextBox 18"/>
+          <p:cNvSpPr txBox="1"/>
+          <p:nvPr/>
+        </p:nvSpPr>
+        <p:spPr>
+          <a:xfrm>
+            <a:off x="411480" y="3962673"/>
+            <a:ext cx="1933955" cy="310896"/>
+          </a:xfrm>
+          <a:prstGeom prst="rect">
+            <a:avLst/>
+          </a:prstGeom>
+          <a:noFill/>
+        </p:spPr>
+        <p:txBody>
+          <a:bodyPr wrap="square" lIns="0" tIns="0" rIns="0" bIns="0" anchor="t">
+            <a:noAutofit/>
+          </a:bodyPr>
+          <a:lstStyle/>
+          <a:p>
+            <a:pPr algn="l"/>
+            <a:r>
+              <a:rPr sz="1000" b="0" dirty="0">
+                <a:solidFill>
+                  <a:srgbClr val="1F2A30"/>
+                </a:solidFill>
+                <a:latin typeface="BIZ UDPGothic"/>
+                <a:ea typeface="BIZ UDPGothic"/>
+                <a:cs typeface="BIZ UDPGothic"/>
+              </a:rPr>
+              <a:t>③ 袋の上部に熱圧着したスパウトとキャップ。</a:t>
+            </a:r>
+            <a:endParaRPr lang="en-US" sz="1000" b="0" dirty="0">
+              <a:solidFill>
+                <a:srgbClr val="1F2A30"/>
+              </a:solidFill>
+              <a:latin typeface="BIZ UDPGothic"/>
+              <a:ea typeface="BIZ UDPGothic"/>
+              <a:cs typeface="BIZ UDPGothic"/>
+            </a:endParaRPr>
+          </a:p>
+          <a:p>
+            <a:pPr algn="l"/>
+            <a:r>
+              <a:rPr sz="1000" b="0" dirty="0">
+                <a:solidFill>
+                  <a:srgbClr val="1F2A30"/>
+                </a:solidFill>
+                <a:latin typeface="BIZ UDPGothic"/>
+                <a:ea typeface="BIZ UDPGothic"/>
+                <a:cs typeface="BIZ UDPGothic"/>
+              </a:rPr>
+              <a:t>この圧着を製袋機で行う</a:t>
+            </a:r>
+          </a:p>
+        </p:txBody>
+      </p:sp>
+      <p:sp>
+        <p:nvSpPr>
+          <p:cNvPr id="20" name="Rectangle 19"/>
+          <p:cNvSpPr/>
+          <p:nvPr/>
+        </p:nvSpPr>
+        <p:spPr>
+          <a:xfrm>
+            <a:off x="2455164" y="2975121"/>
+            <a:ext cx="1933955" cy="969264"/>
+          </a:xfrm>
+          <a:prstGeom prst="rect">
+            <a:avLst/>
+          </a:prstGeom>
+          <a:solidFill>
+            <a:srgbClr val="FFFFFF"/>
+          </a:solidFill>
+          <a:ln w="9525">
+            <a:solidFill>
+              <a:srgbClr val="C9D3D8"/>
+            </a:solidFill>
+          </a:ln>
+        </p:spPr>
+        <p:txBody>
+          <a:bodyPr rtlCol="0" anchor="ctr"/>
+          <a:lstStyle/>
+          <a:p>
+            <a:pPr algn="ctr"/>
+            <a:endParaRPr sz="2400" dirty="0"/>
+          </a:p>
+        </p:txBody>
+      </p:sp>
+      <p:pic>
+        <p:nvPicPr>
+          <p:cNvPr id="21" name="Picture 20" descr="fujiseal_spout_1_top_row_white.png"/>
+          <p:cNvPicPr>
+            <a:picLocks noChangeAspect="1"/>
+          </p:cNvPicPr>
+          <p:nvPr/>
+        </p:nvPicPr>
+        <p:blipFill>
+          <a:blip r:embed="rId5"/>
+          <a:stretch>
+            <a:fillRect/>
+          </a:stretch>
+        </p:blipFill>
+        <p:spPr>
+          <a:xfrm>
+            <a:off x="2974086" y="3011697"/>
+            <a:ext cx="896112" cy="896112"/>
+          </a:xfrm>
+          <a:prstGeom prst="rect">
+            <a:avLst/>
+          </a:prstGeom>
+        </p:spPr>
+      </p:pic>
+      <p:sp>
+        <p:nvSpPr>
+          <p:cNvPr id="22" name="TextBox 21"/>
+          <p:cNvSpPr txBox="1"/>
+          <p:nvPr/>
+        </p:nvSpPr>
+        <p:spPr>
+          <a:xfrm>
+            <a:off x="2455164" y="3962673"/>
+            <a:ext cx="1933955" cy="310896"/>
+          </a:xfrm>
+          <a:prstGeom prst="rect">
+            <a:avLst/>
+          </a:prstGeom>
+          <a:noFill/>
+        </p:spPr>
+        <p:txBody>
+          <a:bodyPr wrap="square" lIns="0" tIns="0" rIns="0" bIns="0" anchor="t">
+            <a:noAutofit/>
+          </a:bodyPr>
+          <a:lstStyle/>
+          <a:p>
+            <a:pPr algn="l"/>
+            <a:r>
+              <a:rPr sz="1000" b="0" dirty="0">
+                <a:solidFill>
+                  <a:srgbClr val="1F2A30"/>
+                </a:solidFill>
+                <a:latin typeface="BIZ UDPGothic"/>
+                <a:ea typeface="BIZ UDPGothic"/>
+                <a:cs typeface="BIZ UDPGothic"/>
+              </a:rPr>
+              <a:t>④ スパウト単体（ストロー状の注ぎ口）。</a:t>
+            </a:r>
+            <a:endParaRPr lang="en-US" sz="1000" b="0" dirty="0">
+              <a:solidFill>
+                <a:srgbClr val="1F2A30"/>
+              </a:solidFill>
+              <a:latin typeface="BIZ UDPGothic"/>
+              <a:ea typeface="BIZ UDPGothic"/>
+              <a:cs typeface="BIZ UDPGothic"/>
+            </a:endParaRPr>
+          </a:p>
+          <a:p>
+            <a:pPr algn="l"/>
+            <a:r>
+              <a:rPr sz="1000" b="0" dirty="0">
+                <a:solidFill>
+                  <a:srgbClr val="1F2A30"/>
+                </a:solidFill>
+                <a:latin typeface="BIZ UDPGothic"/>
+                <a:ea typeface="BIZ UDPGothic"/>
+                <a:cs typeface="BIZ UDPGothic"/>
+              </a:rPr>
+              <a:t>下側の舟形の部分を袋に溶着する</a:t>
+            </a:r>
+          </a:p>
+        </p:txBody>
+      </p:sp>
+      <p:sp>
+        <p:nvSpPr>
+          <p:cNvPr id="24" name="Rectangle 23"/>
+          <p:cNvSpPr/>
+          <p:nvPr/>
+        </p:nvSpPr>
+        <p:spPr>
+          <a:xfrm>
+            <a:off x="4663440" y="1097280"/>
             <a:ext cx="4160520" cy="3310128"/>
           </a:xfrm>
           <a:prstGeom prst="rect">
@@ -4215,30 +4725,30 @@
           <a:lstStyle/>
           <a:p>
             <a:pPr algn="ctr"/>
-            <a:endParaRPr/>
-          </a:p>
-        </p:txBody>
-      </p:sp>
-      <p:sp>
-        <p:nvSpPr>
-          <p:cNvPr id="9" name="Rectangle 8"/>
-          <p:cNvSpPr/>
-          <p:nvPr/>
-        </p:nvSpPr>
-        <p:spPr>
-          <a:xfrm>
-            <a:off x="320040" y="1097280"/>
-            <a:ext cx="1463040" cy="274320"/>
+            <a:endParaRPr dirty="0"/>
+          </a:p>
+        </p:txBody>
+      </p:sp>
+      <p:sp>
+        <p:nvSpPr>
+          <p:cNvPr id="25" name="Rectangle 24"/>
+          <p:cNvSpPr/>
+          <p:nvPr/>
+        </p:nvSpPr>
+        <p:spPr>
+          <a:xfrm>
+            <a:off x="4663440" y="1097280"/>
+            <a:ext cx="2103120" cy="274320"/>
           </a:xfrm>
           <a:prstGeom prst="rect">
             <a:avLst/>
           </a:prstGeom>
           <a:solidFill>
-            <a:srgbClr val="5B6770"/>
+            <a:srgbClr val="F26B1D"/>
           </a:solidFill>
           <a:ln w="12700">
             <a:solidFill>
-              <a:srgbClr val="5B6770"/>
+              <a:srgbClr val="F26B1D"/>
             </a:solidFill>
           </a:ln>
         </p:spPr>
@@ -4247,20 +4757,20 @@
           <a:lstStyle/>
           <a:p>
             <a:pPr algn="ctr"/>
-            <a:endParaRPr/>
-          </a:p>
-        </p:txBody>
-      </p:sp>
-      <p:sp>
-        <p:nvSpPr>
-          <p:cNvPr id="10" name="TextBox 9"/>
+            <a:endParaRPr dirty="0"/>
+          </a:p>
+        </p:txBody>
+      </p:sp>
+      <p:sp>
+        <p:nvSpPr>
+          <p:cNvPr id="26" name="TextBox 25"/>
           <p:cNvSpPr txBox="1"/>
           <p:nvPr/>
         </p:nvSpPr>
         <p:spPr>
           <a:xfrm>
-            <a:off x="320040" y="1097280"/>
-            <a:ext cx="1463040" cy="274320"/>
+            <a:off x="4663440" y="1097280"/>
+            <a:ext cx="2103120" cy="274320"/>
           </a:xfrm>
           <a:prstGeom prst="rect">
             <a:avLst/>
@@ -4275,7 +4785,7 @@
           <a:p>
             <a:pPr algn="ctr"/>
             <a:r>
-              <a:rPr sz="1100" b="1">
+              <a:rPr sz="1100" b="1" dirty="0">
                 <a:solidFill>
                   <a:srgbClr val="FFFFFF"/>
                 </a:solidFill>
@@ -4283,21 +4793,21 @@
                 <a:ea typeface="BIZ UDPGothic"/>
                 <a:cs typeface="BIZ UDPGothic"/>
               </a:rPr>
-              <a:t>製品と容器の写真</a:t>
-            </a:r>
-          </a:p>
-        </p:txBody>
-      </p:sp>
-      <p:sp>
-        <p:nvSpPr>
-          <p:cNvPr id="11" name="Rectangle 10"/>
-          <p:cNvSpPr/>
-          <p:nvPr/>
-        </p:nvSpPr>
-        <p:spPr>
-          <a:xfrm>
-            <a:off x="411480" y="1463040"/>
-            <a:ext cx="1933955" cy="969264"/>
+              <a:t>製袋機の工程（スパウトの圧着）</a:t>
+            </a:r>
+          </a:p>
+        </p:txBody>
+      </p:sp>
+      <p:sp>
+        <p:nvSpPr>
+          <p:cNvPr id="27" name="Rectangle 26"/>
+          <p:cNvSpPr/>
+          <p:nvPr/>
+        </p:nvSpPr>
+        <p:spPr>
+          <a:xfrm>
+            <a:off x="4773168" y="1463040"/>
+            <a:ext cx="3950208" cy="640080"/>
           </a:xfrm>
           <a:prstGeom prst="rect">
             <a:avLst/>
@@ -4316,44 +4826,89 @@
           <a:lstStyle/>
           <a:p>
             <a:pPr algn="ctr"/>
-            <a:endParaRPr/>
-          </a:p>
-        </p:txBody>
-      </p:sp>
-      <p:pic>
-        <p:nvPicPr>
-          <p:cNvPr id="12" name="Picture 11" descr="balance_pawamina_orange_product.jpg"/>
-          <p:cNvPicPr>
-            <a:picLocks noChangeAspect="1"/>
-          </p:cNvPicPr>
-          <p:nvPr/>
-        </p:nvPicPr>
-        <p:blipFill>
-          <a:blip r:embed="rId2"/>
-          <a:stretch>
-            <a:fillRect/>
-          </a:stretch>
-        </p:blipFill>
-        <p:spPr>
-          <a:xfrm>
-            <a:off x="951496" y="1499616"/>
-            <a:ext cx="853922" cy="896112"/>
-          </a:xfrm>
-          <a:prstGeom prst="rect">
-            <a:avLst/>
-          </a:prstGeom>
-        </p:spPr>
-      </p:pic>
-      <p:sp>
-        <p:nvSpPr>
-          <p:cNvPr id="13" name="TextBox 12"/>
+            <a:endParaRPr sz="2400" dirty="0"/>
+          </a:p>
+        </p:txBody>
+      </p:sp>
+      <p:sp>
+        <p:nvSpPr>
+          <p:cNvPr id="28" name="Rounded Rectangle 27"/>
+          <p:cNvSpPr/>
+          <p:nvPr/>
+        </p:nvSpPr>
+        <p:spPr>
+          <a:xfrm>
+            <a:off x="4937760" y="1508760"/>
+            <a:ext cx="420624" cy="548640"/>
+          </a:xfrm>
+          <a:prstGeom prst="roundRect">
+            <a:avLst/>
+          </a:prstGeom>
+          <a:solidFill>
+            <a:srgbClr val="D9DEE3"/>
+          </a:solidFill>
+          <a:ln w="9525">
+            <a:solidFill>
+              <a:srgbClr val="7F8C96"/>
+            </a:solidFill>
+          </a:ln>
+        </p:spPr>
+        <p:txBody>
+          <a:bodyPr rtlCol="0" anchor="ctr"/>
+          <a:lstStyle/>
+          <a:p>
+            <a:pPr algn="ctr"/>
+            <a:endParaRPr sz="2400" dirty="0"/>
+          </a:p>
+        </p:txBody>
+      </p:sp>
+      <p:sp>
+        <p:nvSpPr>
+          <p:cNvPr id="29" name="TextBox 28"/>
           <p:cNvSpPr txBox="1"/>
           <p:nvPr/>
         </p:nvSpPr>
         <p:spPr>
           <a:xfrm>
-            <a:off x="411480" y="2450592"/>
-            <a:ext cx="1933955" cy="310896"/>
+            <a:off x="5532120" y="1490472"/>
+            <a:ext cx="3127248" cy="219456"/>
+          </a:xfrm>
+          <a:prstGeom prst="rect">
+            <a:avLst/>
+          </a:prstGeom>
+          <a:noFill/>
+        </p:spPr>
+        <p:txBody>
+          <a:bodyPr wrap="square" lIns="0" tIns="0" rIns="0" bIns="0" anchor="ctr">
+            <a:noAutofit/>
+          </a:bodyPr>
+          <a:lstStyle/>
+          <a:p>
+            <a:pPr algn="l"/>
+            <a:r>
+              <a:rPr sz="1050" b="1" dirty="0">
+                <a:solidFill>
+                  <a:srgbClr val="0F4C5C"/>
+                </a:solidFill>
+                <a:latin typeface="BIZ UDPGothic"/>
+                <a:ea typeface="BIZ UDPGothic"/>
+                <a:cs typeface="BIZ UDPGothic"/>
+              </a:rPr>
+              <a:t>① 空パウチ（平らな袋）</a:t>
+            </a:r>
+          </a:p>
+        </p:txBody>
+      </p:sp>
+      <p:sp>
+        <p:nvSpPr>
+          <p:cNvPr id="30" name="TextBox 29"/>
+          <p:cNvSpPr txBox="1"/>
+          <p:nvPr/>
+        </p:nvSpPr>
+        <p:spPr>
+          <a:xfrm>
+            <a:off x="5532120" y="1709928"/>
+            <a:ext cx="3127248" cy="384048"/>
           </a:xfrm>
           <a:prstGeom prst="rect">
             <a:avLst/>
@@ -4368,7 +4923,7 @@
           <a:p>
             <a:pPr algn="l"/>
             <a:r>
-              <a:rPr sz="800" b="0">
+              <a:rPr sz="900" b="0" dirty="0">
                 <a:solidFill>
                   <a:srgbClr val="1F2A30"/>
                 </a:solidFill>
@@ -4376,21 +4931,53 @@
                 <a:ea typeface="BIZ UDPGothic"/>
                 <a:cs typeface="BIZ UDPGothic"/>
               </a:rPr>
-              <a:t>① 完成品の例：自社グループ製品「パワミナ200 Jelly」（バランス㈱販売）</a:t>
-            </a:r>
-          </a:p>
-        </p:txBody>
-      </p:sp>
-      <p:sp>
-        <p:nvSpPr>
-          <p:cNvPr id="14" name="Rectangle 13"/>
-          <p:cNvSpPr/>
-          <p:nvPr/>
-        </p:nvSpPr>
-        <p:spPr>
-          <a:xfrm>
-            <a:off x="2455164" y="1463040"/>
-            <a:ext cx="1933955" cy="969264"/>
+              <a:t>1束50袋・段ボールで納品。投入担当が手でマガジン（製袋機の投入口）へ入れる ← 本事業で自動化する作業</a:t>
+            </a:r>
+          </a:p>
+        </p:txBody>
+      </p:sp>
+      <p:sp>
+        <p:nvSpPr>
+          <p:cNvPr id="31" name="Down Arrow 30"/>
+          <p:cNvSpPr/>
+          <p:nvPr/>
+        </p:nvSpPr>
+        <p:spPr>
+          <a:xfrm>
+            <a:off x="5074920" y="2103120"/>
+            <a:ext cx="146304" cy="73152"/>
+          </a:xfrm>
+          <a:prstGeom prst="downArrow">
+            <a:avLst/>
+          </a:prstGeom>
+          <a:solidFill>
+            <a:srgbClr val="0F4C5C"/>
+          </a:solidFill>
+          <a:ln w="3175">
+            <a:solidFill>
+              <a:srgbClr val="0F4C5C"/>
+            </a:solidFill>
+          </a:ln>
+        </p:spPr>
+        <p:txBody>
+          <a:bodyPr rtlCol="0" anchor="ctr"/>
+          <a:lstStyle/>
+          <a:p>
+            <a:pPr algn="ctr"/>
+            <a:endParaRPr sz="2400" dirty="0"/>
+          </a:p>
+        </p:txBody>
+      </p:sp>
+      <p:sp>
+        <p:nvSpPr>
+          <p:cNvPr id="32" name="Rectangle 31"/>
+          <p:cNvSpPr/>
+          <p:nvPr/>
+        </p:nvSpPr>
+        <p:spPr>
+          <a:xfrm>
+            <a:off x="4773168" y="2176272"/>
+            <a:ext cx="3950208" cy="640080"/>
           </a:xfrm>
           <a:prstGeom prst="rect">
             <a:avLst/>
@@ -4409,44 +4996,153 @@
           <a:lstStyle/>
           <a:p>
             <a:pPr algn="ctr"/>
-            <a:endParaRPr/>
-          </a:p>
-        </p:txBody>
-      </p:sp>
-      <p:pic>
-        <p:nvPicPr>
-          <p:cNvPr id="15" name="Picture 14" descr="tombow_spout_pouch_1.jpg"/>
-          <p:cNvPicPr>
-            <a:picLocks noChangeAspect="1"/>
-          </p:cNvPicPr>
-          <p:nvPr/>
-        </p:nvPicPr>
-        <p:blipFill>
-          <a:blip r:embed="rId3"/>
-          <a:stretch>
-            <a:fillRect/>
-          </a:stretch>
-        </p:blipFill>
-        <p:spPr>
-          <a:xfrm>
-            <a:off x="2748897" y="1499616"/>
-            <a:ext cx="1346489" cy="896112"/>
-          </a:xfrm>
-          <a:prstGeom prst="rect">
-            <a:avLst/>
-          </a:prstGeom>
-        </p:spPr>
-      </p:pic>
-      <p:sp>
-        <p:nvSpPr>
-          <p:cNvPr id="16" name="TextBox 15"/>
+            <a:endParaRPr sz="2400" dirty="0"/>
+          </a:p>
+        </p:txBody>
+      </p:sp>
+      <p:sp>
+        <p:nvSpPr>
+          <p:cNvPr id="33" name="Rounded Rectangle 32"/>
+          <p:cNvSpPr/>
+          <p:nvPr/>
+        </p:nvSpPr>
+        <p:spPr>
+          <a:xfrm>
+            <a:off x="4937760" y="2368296"/>
+            <a:ext cx="420624" cy="402335"/>
+          </a:xfrm>
+          <a:prstGeom prst="roundRect">
+            <a:avLst/>
+          </a:prstGeom>
+          <a:solidFill>
+            <a:srgbClr val="D9DEE3"/>
+          </a:solidFill>
+          <a:ln w="9525">
+            <a:solidFill>
+              <a:srgbClr val="7F8C96"/>
+            </a:solidFill>
+          </a:ln>
+        </p:spPr>
+        <p:txBody>
+          <a:bodyPr rtlCol="0" anchor="ctr"/>
+          <a:lstStyle/>
+          <a:p>
+            <a:pPr algn="ctr"/>
+            <a:endParaRPr sz="2400" dirty="0"/>
+          </a:p>
+        </p:txBody>
+      </p:sp>
+      <p:sp>
+        <p:nvSpPr>
+          <p:cNvPr id="34" name="Rectangle 33"/>
+          <p:cNvSpPr/>
+          <p:nvPr/>
+        </p:nvSpPr>
+        <p:spPr>
+          <a:xfrm>
+            <a:off x="5088636" y="2258568"/>
+            <a:ext cx="118872" cy="146304"/>
+          </a:xfrm>
+          <a:prstGeom prst="rect">
+            <a:avLst/>
+          </a:prstGeom>
+          <a:solidFill>
+            <a:srgbClr val="FFFFFF"/>
+          </a:solidFill>
+          <a:ln w="12700">
+            <a:solidFill>
+              <a:srgbClr val="0F4C5C"/>
+            </a:solidFill>
+          </a:ln>
+        </p:spPr>
+        <p:txBody>
+          <a:bodyPr rtlCol="0" anchor="ctr"/>
+          <a:lstStyle/>
+          <a:p>
+            <a:pPr algn="ctr"/>
+            <a:endParaRPr sz="2400" dirty="0"/>
+          </a:p>
+        </p:txBody>
+      </p:sp>
+      <p:sp>
+        <p:nvSpPr>
+          <p:cNvPr id="35" name="Rectangle 34"/>
+          <p:cNvSpPr/>
+          <p:nvPr/>
+        </p:nvSpPr>
+        <p:spPr>
+          <a:xfrm>
+            <a:off x="5001768" y="2350008"/>
+            <a:ext cx="292608" cy="45720"/>
+          </a:xfrm>
+          <a:prstGeom prst="rect">
+            <a:avLst/>
+          </a:prstGeom>
+          <a:solidFill>
+            <a:srgbClr val="F26B1D"/>
+          </a:solidFill>
+          <a:ln w="3175">
+            <a:solidFill>
+              <a:srgbClr val="F26B1D"/>
+            </a:solidFill>
+          </a:ln>
+        </p:spPr>
+        <p:txBody>
+          <a:bodyPr rtlCol="0" anchor="ctr"/>
+          <a:lstStyle/>
+          <a:p>
+            <a:pPr algn="ctr"/>
+            <a:endParaRPr sz="2400" dirty="0"/>
+          </a:p>
+        </p:txBody>
+      </p:sp>
+      <p:sp>
+        <p:nvSpPr>
+          <p:cNvPr id="36" name="TextBox 35"/>
           <p:cNvSpPr txBox="1"/>
           <p:nvPr/>
         </p:nvSpPr>
         <p:spPr>
           <a:xfrm>
-            <a:off x="2455164" y="2450592"/>
-            <a:ext cx="1933955" cy="310896"/>
+            <a:off x="5532120" y="2203703"/>
+            <a:ext cx="3127248" cy="219456"/>
+          </a:xfrm>
+          <a:prstGeom prst="rect">
+            <a:avLst/>
+          </a:prstGeom>
+          <a:noFill/>
+        </p:spPr>
+        <p:txBody>
+          <a:bodyPr wrap="square" lIns="0" tIns="0" rIns="0" bIns="0" anchor="ctr">
+            <a:noAutofit/>
+          </a:bodyPr>
+          <a:lstStyle/>
+          <a:p>
+            <a:pPr algn="l"/>
+            <a:r>
+              <a:rPr sz="1050" b="1" dirty="0">
+                <a:solidFill>
+                  <a:srgbClr val="0F4C5C"/>
+                </a:solidFill>
+                <a:latin typeface="BIZ UDPGothic"/>
+                <a:ea typeface="BIZ UDPGothic"/>
+                <a:cs typeface="BIZ UDPGothic"/>
+              </a:rPr>
+              <a:t>② 製袋機（既設SPM機）でスパウトを熱圧着</a:t>
+            </a:r>
+          </a:p>
+        </p:txBody>
+      </p:sp>
+      <p:sp>
+        <p:nvSpPr>
+          <p:cNvPr id="37" name="TextBox 36"/>
+          <p:cNvSpPr txBox="1"/>
+          <p:nvPr/>
+        </p:nvSpPr>
+        <p:spPr>
+          <a:xfrm>
+            <a:off x="5532120" y="2423160"/>
+            <a:ext cx="3127248" cy="384048"/>
           </a:xfrm>
           <a:prstGeom prst="rect">
             <a:avLst/>
@@ -4461,7 +5157,7 @@
           <a:p>
             <a:pPr algn="l"/>
             <a:r>
-              <a:rPr sz="800" b="0">
+              <a:rPr sz="900" b="0" dirty="0">
                 <a:solidFill>
                   <a:srgbClr val="1F2A30"/>
                 </a:solidFill>
@@ -4469,21 +5165,53 @@
                 <a:ea typeface="BIZ UDPGothic"/>
                 <a:cs typeface="BIZ UDPGothic"/>
               </a:rPr>
-              <a:t>② 口栓（スパウト）付きパウチ。アルミ袋にスパウトを付けた状態</a:t>
-            </a:r>
-          </a:p>
-        </p:txBody>
-      </p:sp>
-      <p:sp>
-        <p:nvSpPr>
-          <p:cNvPr id="17" name="Rectangle 16"/>
-          <p:cNvSpPr/>
-          <p:nvPr/>
-        </p:nvSpPr>
-        <p:spPr>
-          <a:xfrm>
-            <a:off x="411480" y="2871216"/>
-            <a:ext cx="1933955" cy="969264"/>
+              <a:t>袋の口にストロー状の注ぎ口「スパウト」を熱で溶着する（自動、150袋／分）</a:t>
+            </a:r>
+          </a:p>
+        </p:txBody>
+      </p:sp>
+      <p:sp>
+        <p:nvSpPr>
+          <p:cNvPr id="38" name="Down Arrow 37"/>
+          <p:cNvSpPr/>
+          <p:nvPr/>
+        </p:nvSpPr>
+        <p:spPr>
+          <a:xfrm>
+            <a:off x="5074920" y="2816352"/>
+            <a:ext cx="146304" cy="73152"/>
+          </a:xfrm>
+          <a:prstGeom prst="downArrow">
+            <a:avLst/>
+          </a:prstGeom>
+          <a:solidFill>
+            <a:srgbClr val="0F4C5C"/>
+          </a:solidFill>
+          <a:ln w="3175">
+            <a:solidFill>
+              <a:srgbClr val="0F4C5C"/>
+            </a:solidFill>
+          </a:ln>
+        </p:spPr>
+        <p:txBody>
+          <a:bodyPr rtlCol="0" anchor="ctr"/>
+          <a:lstStyle/>
+          <a:p>
+            <a:pPr algn="ctr"/>
+            <a:endParaRPr sz="2400" dirty="0"/>
+          </a:p>
+        </p:txBody>
+      </p:sp>
+      <p:sp>
+        <p:nvSpPr>
+          <p:cNvPr id="39" name="Rectangle 38"/>
+          <p:cNvSpPr/>
+          <p:nvPr/>
+        </p:nvSpPr>
+        <p:spPr>
+          <a:xfrm>
+            <a:off x="4773168" y="2889504"/>
+            <a:ext cx="3950208" cy="640080"/>
           </a:xfrm>
           <a:prstGeom prst="rect">
             <a:avLst/>
@@ -4502,44 +5230,153 @@
           <a:lstStyle/>
           <a:p>
             <a:pPr algn="ctr"/>
-            <a:endParaRPr/>
-          </a:p>
-        </p:txBody>
-      </p:sp>
-      <p:pic>
-        <p:nvPicPr>
-          <p:cNvPr id="18" name="Picture 17" descr="tombow_spout_pouch_cap_2.jpg"/>
-          <p:cNvPicPr>
-            <a:picLocks noChangeAspect="1"/>
-          </p:cNvPicPr>
-          <p:nvPr/>
-        </p:nvPicPr>
-        <p:blipFill>
-          <a:blip r:embed="rId4"/>
-          <a:stretch>
-            <a:fillRect/>
-          </a:stretch>
-        </p:blipFill>
-        <p:spPr>
-          <a:xfrm>
-            <a:off x="693125" y="2907792"/>
-            <a:ext cx="1370665" cy="896112"/>
-          </a:xfrm>
-          <a:prstGeom prst="rect">
-            <a:avLst/>
-          </a:prstGeom>
-        </p:spPr>
-      </p:pic>
-      <p:sp>
-        <p:nvSpPr>
-          <p:cNvPr id="19" name="TextBox 18"/>
+            <a:endParaRPr sz="2400" dirty="0"/>
+          </a:p>
+        </p:txBody>
+      </p:sp>
+      <p:sp>
+        <p:nvSpPr>
+          <p:cNvPr id="40" name="Rounded Rectangle 39"/>
+          <p:cNvSpPr/>
+          <p:nvPr/>
+        </p:nvSpPr>
+        <p:spPr>
+          <a:xfrm>
+            <a:off x="4937760" y="3081528"/>
+            <a:ext cx="420624" cy="402335"/>
+          </a:xfrm>
+          <a:prstGeom prst="roundRect">
+            <a:avLst/>
+          </a:prstGeom>
+          <a:solidFill>
+            <a:srgbClr val="D9DEE3"/>
+          </a:solidFill>
+          <a:ln w="9525">
+            <a:solidFill>
+              <a:srgbClr val="7F8C96"/>
+            </a:solidFill>
+          </a:ln>
+        </p:spPr>
+        <p:txBody>
+          <a:bodyPr rtlCol="0" anchor="ctr"/>
+          <a:lstStyle/>
+          <a:p>
+            <a:pPr algn="ctr"/>
+            <a:endParaRPr sz="2400" dirty="0"/>
+          </a:p>
+        </p:txBody>
+      </p:sp>
+      <p:sp>
+        <p:nvSpPr>
+          <p:cNvPr id="41" name="Rectangle 40"/>
+          <p:cNvSpPr/>
+          <p:nvPr/>
+        </p:nvSpPr>
+        <p:spPr>
+          <a:xfrm>
+            <a:off x="5088636" y="2971800"/>
+            <a:ext cx="118872" cy="146304"/>
+          </a:xfrm>
+          <a:prstGeom prst="rect">
+            <a:avLst/>
+          </a:prstGeom>
+          <a:solidFill>
+            <a:srgbClr val="FFFFFF"/>
+          </a:solidFill>
+          <a:ln w="12700">
+            <a:solidFill>
+              <a:srgbClr val="0F4C5C"/>
+            </a:solidFill>
+          </a:ln>
+        </p:spPr>
+        <p:txBody>
+          <a:bodyPr rtlCol="0" anchor="ctr"/>
+          <a:lstStyle/>
+          <a:p>
+            <a:pPr algn="ctr"/>
+            <a:endParaRPr sz="2400" dirty="0"/>
+          </a:p>
+        </p:txBody>
+      </p:sp>
+      <p:sp>
+        <p:nvSpPr>
+          <p:cNvPr id="42" name="Rectangle 41"/>
+          <p:cNvSpPr/>
+          <p:nvPr/>
+        </p:nvSpPr>
+        <p:spPr>
+          <a:xfrm>
+            <a:off x="5001768" y="3063240"/>
+            <a:ext cx="292608" cy="45720"/>
+          </a:xfrm>
+          <a:prstGeom prst="rect">
+            <a:avLst/>
+          </a:prstGeom>
+          <a:solidFill>
+            <a:srgbClr val="F26B1D"/>
+          </a:solidFill>
+          <a:ln w="3175">
+            <a:solidFill>
+              <a:srgbClr val="F26B1D"/>
+            </a:solidFill>
+          </a:ln>
+        </p:spPr>
+        <p:txBody>
+          <a:bodyPr rtlCol="0" anchor="ctr"/>
+          <a:lstStyle/>
+          <a:p>
+            <a:pPr algn="ctr"/>
+            <a:endParaRPr sz="2400" dirty="0"/>
+          </a:p>
+        </p:txBody>
+      </p:sp>
+      <p:sp>
+        <p:nvSpPr>
+          <p:cNvPr id="43" name="TextBox 42"/>
           <p:cNvSpPr txBox="1"/>
           <p:nvPr/>
         </p:nvSpPr>
         <p:spPr>
           <a:xfrm>
-            <a:off x="411480" y="3858768"/>
-            <a:ext cx="1933955" cy="310896"/>
+            <a:off x="5532120" y="2916936"/>
+            <a:ext cx="3127248" cy="219456"/>
+          </a:xfrm>
+          <a:prstGeom prst="rect">
+            <a:avLst/>
+          </a:prstGeom>
+          <a:noFill/>
+        </p:spPr>
+        <p:txBody>
+          <a:bodyPr wrap="square" lIns="0" tIns="0" rIns="0" bIns="0" anchor="ctr">
+            <a:noAutofit/>
+          </a:bodyPr>
+          <a:lstStyle/>
+          <a:p>
+            <a:pPr algn="l"/>
+            <a:r>
+              <a:rPr sz="1050" b="1" dirty="0">
+                <a:solidFill>
+                  <a:srgbClr val="0F4C5C"/>
+                </a:solidFill>
+                <a:latin typeface="BIZ UDPGothic"/>
+                <a:ea typeface="BIZ UDPGothic"/>
+                <a:cs typeface="BIZ UDPGothic"/>
+              </a:rPr>
+              <a:t>③ リークチェッカで検査</a:t>
+            </a:r>
+          </a:p>
+        </p:txBody>
+      </p:sp>
+      <p:sp>
+        <p:nvSpPr>
+          <p:cNvPr id="44" name="TextBox 43"/>
+          <p:cNvSpPr txBox="1"/>
+          <p:nvPr/>
+        </p:nvSpPr>
+        <p:spPr>
+          <a:xfrm>
+            <a:off x="5532120" y="3136392"/>
+            <a:ext cx="3127248" cy="384048"/>
           </a:xfrm>
           <a:prstGeom prst="rect">
             <a:avLst/>
@@ -4554,7 +5391,7 @@
           <a:p>
             <a:pPr algn="l"/>
             <a:r>
-              <a:rPr sz="800" b="0">
+              <a:rPr sz="900" b="0" dirty="0">
                 <a:solidFill>
                   <a:srgbClr val="1F2A30"/>
                 </a:solidFill>
@@ -4562,21 +5399,53 @@
                 <a:ea typeface="BIZ UDPGothic"/>
                 <a:cs typeface="BIZ UDPGothic"/>
               </a:rPr>
-              <a:t>③ 袋の上部に熱圧着したスパウトとキャップ。この圧着を製袋機で行う</a:t>
-            </a:r>
-          </a:p>
-        </p:txBody>
-      </p:sp>
-      <p:sp>
-        <p:nvSpPr>
-          <p:cNvPr id="20" name="Rectangle 19"/>
-          <p:cNvSpPr/>
-          <p:nvPr/>
-        </p:nvSpPr>
-        <p:spPr>
-          <a:xfrm>
-            <a:off x="2455164" y="2871216"/>
-            <a:ext cx="1933955" cy="969264"/>
+              <a:t>圧着部からの漏れがないか検査（自動）→ コンベアで充填室へ</a:t>
+            </a:r>
+          </a:p>
+        </p:txBody>
+      </p:sp>
+      <p:sp>
+        <p:nvSpPr>
+          <p:cNvPr id="45" name="Down Arrow 44"/>
+          <p:cNvSpPr/>
+          <p:nvPr/>
+        </p:nvSpPr>
+        <p:spPr>
+          <a:xfrm>
+            <a:off x="5074920" y="3529584"/>
+            <a:ext cx="146304" cy="73152"/>
+          </a:xfrm>
+          <a:prstGeom prst="downArrow">
+            <a:avLst/>
+          </a:prstGeom>
+          <a:solidFill>
+            <a:srgbClr val="0F4C5C"/>
+          </a:solidFill>
+          <a:ln w="3175">
+            <a:solidFill>
+              <a:srgbClr val="0F4C5C"/>
+            </a:solidFill>
+          </a:ln>
+        </p:spPr>
+        <p:txBody>
+          <a:bodyPr rtlCol="0" anchor="ctr"/>
+          <a:lstStyle/>
+          <a:p>
+            <a:pPr algn="ctr"/>
+            <a:endParaRPr sz="2400" dirty="0"/>
+          </a:p>
+        </p:txBody>
+      </p:sp>
+      <p:sp>
+        <p:nvSpPr>
+          <p:cNvPr id="46" name="Rectangle 45"/>
+          <p:cNvSpPr/>
+          <p:nvPr/>
+        </p:nvSpPr>
+        <p:spPr>
+          <a:xfrm>
+            <a:off x="4773168" y="3602736"/>
+            <a:ext cx="3950208" cy="640080"/>
           </a:xfrm>
           <a:prstGeom prst="rect">
             <a:avLst/>
@@ -4595,268 +5464,26 @@
           <a:lstStyle/>
           <a:p>
             <a:pPr algn="ctr"/>
-            <a:endParaRPr/>
-          </a:p>
-        </p:txBody>
-      </p:sp>
-      <p:pic>
-        <p:nvPicPr>
-          <p:cNvPr id="21" name="Picture 20" descr="fujiseal_spout_1_top_row_white.png"/>
-          <p:cNvPicPr>
-            <a:picLocks noChangeAspect="1"/>
-          </p:cNvPicPr>
-          <p:nvPr/>
-        </p:nvPicPr>
-        <p:blipFill>
-          <a:blip r:embed="rId5"/>
-          <a:stretch>
-            <a:fillRect/>
-          </a:stretch>
-        </p:blipFill>
-        <p:spPr>
-          <a:xfrm>
-            <a:off x="2974086" y="2907792"/>
-            <a:ext cx="896112" cy="896112"/>
-          </a:xfrm>
-          <a:prstGeom prst="rect">
-            <a:avLst/>
-          </a:prstGeom>
-        </p:spPr>
-      </p:pic>
-      <p:sp>
-        <p:nvSpPr>
-          <p:cNvPr id="22" name="TextBox 21"/>
-          <p:cNvSpPr txBox="1"/>
-          <p:nvPr/>
-        </p:nvSpPr>
-        <p:spPr>
-          <a:xfrm>
-            <a:off x="2455164" y="3858768"/>
-            <a:ext cx="1933955" cy="310896"/>
-          </a:xfrm>
-          <a:prstGeom prst="rect">
-            <a:avLst/>
-          </a:prstGeom>
-          <a:noFill/>
-        </p:spPr>
-        <p:txBody>
-          <a:bodyPr wrap="square" lIns="0" tIns="0" rIns="0" bIns="0" anchor="t">
-            <a:noAutofit/>
-          </a:bodyPr>
-          <a:lstStyle/>
-          <a:p>
-            <a:pPr algn="l"/>
-            <a:r>
-              <a:rPr sz="800" b="0">
-                <a:solidFill>
-                  <a:srgbClr val="1F2A30"/>
-                </a:solidFill>
-                <a:latin typeface="BIZ UDPGothic"/>
-                <a:ea typeface="BIZ UDPGothic"/>
-                <a:cs typeface="BIZ UDPGothic"/>
-              </a:rPr>
-              <a:t>④ スパウト単体（ストロー状の注ぎ口）。下側の舟形の部分を袋に溶着する</a:t>
-            </a:r>
-          </a:p>
-        </p:txBody>
-      </p:sp>
-      <p:sp>
-        <p:nvSpPr>
-          <p:cNvPr id="23" name="TextBox 22"/>
-          <p:cNvSpPr txBox="1"/>
-          <p:nvPr/>
-        </p:nvSpPr>
-        <p:spPr>
-          <a:xfrm>
-            <a:off x="411480" y="4206240"/>
-            <a:ext cx="3977639" cy="164592"/>
-          </a:xfrm>
-          <a:prstGeom prst="rect">
-            <a:avLst/>
-          </a:prstGeom>
-          <a:noFill/>
-        </p:spPr>
-        <p:txBody>
-          <a:bodyPr wrap="square" lIns="0" tIns="0" rIns="0" bIns="0" anchor="ctr">
-            <a:noAutofit/>
-          </a:bodyPr>
-          <a:lstStyle/>
-          <a:p>
-            <a:pPr algn="l"/>
-            <a:r>
-              <a:rPr sz="700" b="0">
-                <a:solidFill>
-                  <a:srgbClr val="8A9BA8"/>
-                </a:solidFill>
-                <a:latin typeface="BIZ UDPGothic"/>
-                <a:ea typeface="BIZ UDPGothic"/>
-                <a:cs typeface="BIZ UDPGothic"/>
-              </a:rPr>
-              <a:t>出所：バランス㈱、トンボ飲料、㈱フジシール の各Webサイト（製品・容器の紹介ページ）</a:t>
-            </a:r>
-          </a:p>
-        </p:txBody>
-      </p:sp>
-      <p:sp>
-        <p:nvSpPr>
-          <p:cNvPr id="24" name="Rectangle 23"/>
-          <p:cNvSpPr/>
-          <p:nvPr/>
-        </p:nvSpPr>
-        <p:spPr>
-          <a:xfrm>
-            <a:off x="4663440" y="1097280"/>
-            <a:ext cx="4160520" cy="3310128"/>
-          </a:xfrm>
-          <a:prstGeom prst="rect">
+            <a:endParaRPr sz="2400" dirty="0"/>
+          </a:p>
+        </p:txBody>
+      </p:sp>
+      <p:sp>
+        <p:nvSpPr>
+          <p:cNvPr id="47" name="Rounded Rectangle 46"/>
+          <p:cNvSpPr/>
+          <p:nvPr/>
+        </p:nvSpPr>
+        <p:spPr>
+          <a:xfrm>
+            <a:off x="4937760" y="3794759"/>
+            <a:ext cx="420624" cy="402335"/>
+          </a:xfrm>
+          <a:prstGeom prst="roundRect">
             <a:avLst/>
           </a:prstGeom>
           <a:solidFill>
-            <a:srgbClr val="F7F9FA"/>
-          </a:solidFill>
-          <a:ln w="15875">
-            <a:solidFill>
-              <a:srgbClr val="0F4C5C"/>
-            </a:solidFill>
-          </a:ln>
-        </p:spPr>
-        <p:txBody>
-          <a:bodyPr rtlCol="0" anchor="ctr"/>
-          <a:lstStyle/>
-          <a:p>
-            <a:pPr algn="ctr"/>
-            <a:endParaRPr/>
-          </a:p>
-        </p:txBody>
-      </p:sp>
-      <p:sp>
-        <p:nvSpPr>
-          <p:cNvPr id="25" name="Rectangle 24"/>
-          <p:cNvSpPr/>
-          <p:nvPr/>
-        </p:nvSpPr>
-        <p:spPr>
-          <a:xfrm>
-            <a:off x="4663440" y="1097280"/>
-            <a:ext cx="2103120" cy="274320"/>
-          </a:xfrm>
-          <a:prstGeom prst="rect">
-            <a:avLst/>
-          </a:prstGeom>
-          <a:solidFill>
-            <a:srgbClr val="F26B1D"/>
-          </a:solidFill>
-          <a:ln w="12700">
-            <a:solidFill>
-              <a:srgbClr val="F26B1D"/>
-            </a:solidFill>
-          </a:ln>
-        </p:spPr>
-        <p:txBody>
-          <a:bodyPr rtlCol="0" anchor="ctr"/>
-          <a:lstStyle/>
-          <a:p>
-            <a:pPr algn="ctr"/>
-            <a:endParaRPr/>
-          </a:p>
-        </p:txBody>
-      </p:sp>
-      <p:sp>
-        <p:nvSpPr>
-          <p:cNvPr id="26" name="TextBox 25"/>
-          <p:cNvSpPr txBox="1"/>
-          <p:nvPr/>
-        </p:nvSpPr>
-        <p:spPr>
-          <a:xfrm>
-            <a:off x="4663440" y="1097280"/>
-            <a:ext cx="2103120" cy="274320"/>
-          </a:xfrm>
-          <a:prstGeom prst="rect">
-            <a:avLst/>
-          </a:prstGeom>
-          <a:noFill/>
-        </p:spPr>
-        <p:txBody>
-          <a:bodyPr wrap="square" lIns="0" tIns="0" rIns="0" bIns="0" anchor="ctr">
-            <a:noAutofit/>
-          </a:bodyPr>
-          <a:lstStyle/>
-          <a:p>
-            <a:pPr algn="ctr"/>
-            <a:r>
-              <a:rPr sz="1100" b="1" dirty="0" err="1">
-                <a:solidFill>
-                  <a:srgbClr val="FFFFFF"/>
-                </a:solidFill>
-                <a:latin typeface="BIZ UDPGothic"/>
-                <a:ea typeface="BIZ UDPGothic"/>
-                <a:cs typeface="BIZ UDPGothic"/>
-              </a:rPr>
-              <a:t>製袋機の工程（スパウトの圧着</a:t>
-            </a:r>
-            <a:r>
-              <a:rPr sz="1100" b="1" dirty="0">
-                <a:solidFill>
-                  <a:srgbClr val="FFFFFF"/>
-                </a:solidFill>
-                <a:latin typeface="BIZ UDPGothic"/>
-                <a:ea typeface="BIZ UDPGothic"/>
-                <a:cs typeface="BIZ UDPGothic"/>
-              </a:rPr>
-              <a:t>）</a:t>
-            </a:r>
-          </a:p>
-        </p:txBody>
-      </p:sp>
-      <p:sp>
-        <p:nvSpPr>
-          <p:cNvPr id="27" name="Rectangle 26"/>
-          <p:cNvSpPr/>
-          <p:nvPr/>
-        </p:nvSpPr>
-        <p:spPr>
-          <a:xfrm>
-            <a:off x="4773168" y="1463040"/>
-            <a:ext cx="3950208" cy="640080"/>
-          </a:xfrm>
-          <a:prstGeom prst="rect">
-            <a:avLst/>
-          </a:prstGeom>
-          <a:solidFill>
-            <a:srgbClr val="FFFFFF"/>
-          </a:solidFill>
-          <a:ln w="9525">
-            <a:solidFill>
-              <a:srgbClr val="C9D3D8"/>
-            </a:solidFill>
-          </a:ln>
-        </p:spPr>
-        <p:txBody>
-          <a:bodyPr rtlCol="0" anchor="ctr"/>
-          <a:lstStyle/>
-          <a:p>
-            <a:pPr algn="ctr"/>
-            <a:endParaRPr/>
-          </a:p>
-        </p:txBody>
-      </p:sp>
-      <p:sp>
-        <p:nvSpPr>
-          <p:cNvPr id="28" name="Rounded Rectangle 27"/>
-          <p:cNvSpPr/>
-          <p:nvPr/>
-        </p:nvSpPr>
-        <p:spPr>
-          <a:xfrm>
-            <a:off x="4937760" y="1508760"/>
-            <a:ext cx="420624" cy="548640"/>
-          </a:xfrm>
-          <a:prstGeom prst="roundRect">
-            <a:avLst/>
-          </a:prstGeom>
-          <a:solidFill>
-            <a:srgbClr val="D9DEE3"/>
+            <a:srgbClr val="F6E3C8"/>
           </a:solidFill>
           <a:ln w="9525">
             <a:solidFill>
@@ -4869,189 +5496,19 @@
           <a:lstStyle/>
           <a:p>
             <a:pPr algn="ctr"/>
-            <a:endParaRPr/>
-          </a:p>
-        </p:txBody>
-      </p:sp>
-      <p:sp>
-        <p:nvSpPr>
-          <p:cNvPr id="29" name="TextBox 28"/>
-          <p:cNvSpPr txBox="1"/>
-          <p:nvPr/>
-        </p:nvSpPr>
-        <p:spPr>
-          <a:xfrm>
-            <a:off x="5532120" y="1490472"/>
-            <a:ext cx="3127248" cy="219456"/>
-          </a:xfrm>
-          <a:prstGeom prst="rect">
-            <a:avLst/>
-          </a:prstGeom>
-          <a:noFill/>
-        </p:spPr>
-        <p:txBody>
-          <a:bodyPr wrap="square" lIns="0" tIns="0" rIns="0" bIns="0" anchor="ctr">
-            <a:noAutofit/>
-          </a:bodyPr>
-          <a:lstStyle/>
-          <a:p>
-            <a:pPr algn="l"/>
-            <a:r>
-              <a:rPr sz="900" b="1">
-                <a:solidFill>
-                  <a:srgbClr val="0F4C5C"/>
-                </a:solidFill>
-                <a:latin typeface="BIZ UDPGothic"/>
-                <a:ea typeface="BIZ UDPGothic"/>
-                <a:cs typeface="BIZ UDPGothic"/>
-              </a:rPr>
-              <a:t>① 空パウチ（平らな袋）</a:t>
-            </a:r>
-          </a:p>
-        </p:txBody>
-      </p:sp>
-      <p:sp>
-        <p:nvSpPr>
-          <p:cNvPr id="30" name="TextBox 29"/>
-          <p:cNvSpPr txBox="1"/>
-          <p:nvPr/>
-        </p:nvSpPr>
-        <p:spPr>
-          <a:xfrm>
-            <a:off x="5532120" y="1709928"/>
-            <a:ext cx="3127248" cy="384048"/>
-          </a:xfrm>
-          <a:prstGeom prst="rect">
-            <a:avLst/>
-          </a:prstGeom>
-          <a:noFill/>
-        </p:spPr>
-        <p:txBody>
-          <a:bodyPr wrap="square" lIns="0" tIns="0" rIns="0" bIns="0" anchor="t">
-            <a:noAutofit/>
-          </a:bodyPr>
-          <a:lstStyle/>
-          <a:p>
-            <a:pPr algn="l"/>
-            <a:r>
-              <a:rPr sz="750" b="0">
-                <a:solidFill>
-                  <a:srgbClr val="1F2A30"/>
-                </a:solidFill>
-                <a:latin typeface="BIZ UDPGothic"/>
-                <a:ea typeface="BIZ UDPGothic"/>
-                <a:cs typeface="BIZ UDPGothic"/>
-              </a:rPr>
-              <a:t>1束50袋・段ボールで納品。投入担当が手でマガジン（製袋機の投入口）へ入れる ← 本事業で自動化する作業</a:t>
-            </a:r>
-          </a:p>
-        </p:txBody>
-      </p:sp>
-      <p:sp>
-        <p:nvSpPr>
-          <p:cNvPr id="31" name="Down Arrow 30"/>
-          <p:cNvSpPr/>
-          <p:nvPr/>
-        </p:nvSpPr>
-        <p:spPr>
-          <a:xfrm>
-            <a:off x="5074920" y="2103120"/>
-            <a:ext cx="146304" cy="73152"/>
-          </a:xfrm>
-          <a:prstGeom prst="downArrow">
-            <a:avLst/>
-          </a:prstGeom>
-          <a:solidFill>
-            <a:srgbClr val="0F4C5C"/>
-          </a:solidFill>
-          <a:ln w="3175">
-            <a:solidFill>
-              <a:srgbClr val="0F4C5C"/>
-            </a:solidFill>
-          </a:ln>
-        </p:spPr>
-        <p:txBody>
-          <a:bodyPr rtlCol="0" anchor="ctr"/>
-          <a:lstStyle/>
-          <a:p>
-            <a:pPr algn="ctr"/>
-            <a:endParaRPr/>
-          </a:p>
-        </p:txBody>
-      </p:sp>
-      <p:sp>
-        <p:nvSpPr>
-          <p:cNvPr id="32" name="Rectangle 31"/>
-          <p:cNvSpPr/>
-          <p:nvPr/>
-        </p:nvSpPr>
-        <p:spPr>
-          <a:xfrm>
-            <a:off x="4773168" y="2176272"/>
-            <a:ext cx="3950208" cy="640080"/>
-          </a:xfrm>
-          <a:prstGeom prst="rect">
-            <a:avLst/>
-          </a:prstGeom>
-          <a:solidFill>
-            <a:srgbClr val="FFFFFF"/>
-          </a:solidFill>
-          <a:ln w="9525">
-            <a:solidFill>
-              <a:srgbClr val="C9D3D8"/>
-            </a:solidFill>
-          </a:ln>
-        </p:spPr>
-        <p:txBody>
-          <a:bodyPr rtlCol="0" anchor="ctr"/>
-          <a:lstStyle/>
-          <a:p>
-            <a:pPr algn="ctr"/>
-            <a:endParaRPr/>
-          </a:p>
-        </p:txBody>
-      </p:sp>
-      <p:sp>
-        <p:nvSpPr>
-          <p:cNvPr id="33" name="Rounded Rectangle 32"/>
-          <p:cNvSpPr/>
-          <p:nvPr/>
-        </p:nvSpPr>
-        <p:spPr>
-          <a:xfrm>
-            <a:off x="4937760" y="2368296"/>
-            <a:ext cx="420624" cy="402335"/>
-          </a:xfrm>
-          <a:prstGeom prst="roundRect">
-            <a:avLst/>
-          </a:prstGeom>
-          <a:solidFill>
-            <a:srgbClr val="D9DEE3"/>
-          </a:solidFill>
-          <a:ln w="9525">
-            <a:solidFill>
-              <a:srgbClr val="7F8C96"/>
-            </a:solidFill>
-          </a:ln>
-        </p:spPr>
-        <p:txBody>
-          <a:bodyPr rtlCol="0" anchor="ctr"/>
-          <a:lstStyle/>
-          <a:p>
-            <a:pPr algn="ctr"/>
-            <a:endParaRPr/>
-          </a:p>
-        </p:txBody>
-      </p:sp>
-      <p:sp>
-        <p:nvSpPr>
-          <p:cNvPr id="34" name="Rectangle 33"/>
-          <p:cNvSpPr/>
-          <p:nvPr/>
-        </p:nvSpPr>
-        <p:spPr>
-          <a:xfrm>
-            <a:off x="5088636" y="2258568"/>
+            <a:endParaRPr sz="2400" dirty="0"/>
+          </a:p>
+        </p:txBody>
+      </p:sp>
+      <p:sp>
+        <p:nvSpPr>
+          <p:cNvPr id="48" name="Rectangle 47"/>
+          <p:cNvSpPr/>
+          <p:nvPr/>
+        </p:nvSpPr>
+        <p:spPr>
+          <a:xfrm>
+            <a:off x="5088636" y="3685031"/>
             <a:ext cx="118872" cy="146304"/>
           </a:xfrm>
           <a:prstGeom prst="rect">
@@ -5071,19 +5528,19 @@
           <a:lstStyle/>
           <a:p>
             <a:pPr algn="ctr"/>
-            <a:endParaRPr/>
-          </a:p>
-        </p:txBody>
-      </p:sp>
-      <p:sp>
-        <p:nvSpPr>
-          <p:cNvPr id="35" name="Rectangle 34"/>
-          <p:cNvSpPr/>
-          <p:nvPr/>
-        </p:nvSpPr>
-        <p:spPr>
-          <a:xfrm>
-            <a:off x="5001768" y="2350008"/>
+            <a:endParaRPr sz="2400" dirty="0"/>
+          </a:p>
+        </p:txBody>
+      </p:sp>
+      <p:sp>
+        <p:nvSpPr>
+          <p:cNvPr id="49" name="Rectangle 48"/>
+          <p:cNvSpPr/>
+          <p:nvPr/>
+        </p:nvSpPr>
+        <p:spPr>
+          <a:xfrm>
+            <a:off x="5001768" y="3776472"/>
             <a:ext cx="292608" cy="45720"/>
           </a:xfrm>
           <a:prstGeom prst="rect">
@@ -5103,222 +5560,20 @@
           <a:lstStyle/>
           <a:p>
             <a:pPr algn="ctr"/>
-            <a:endParaRPr/>
-          </a:p>
-        </p:txBody>
-      </p:sp>
-      <p:sp>
-        <p:nvSpPr>
-          <p:cNvPr id="36" name="TextBox 35"/>
-          <p:cNvSpPr txBox="1"/>
-          <p:nvPr/>
-        </p:nvSpPr>
-        <p:spPr>
-          <a:xfrm>
-            <a:off x="5532120" y="2203703"/>
-            <a:ext cx="3127248" cy="219456"/>
-          </a:xfrm>
-          <a:prstGeom prst="rect">
-            <a:avLst/>
-          </a:prstGeom>
-          <a:noFill/>
-        </p:spPr>
-        <p:txBody>
-          <a:bodyPr wrap="square" lIns="0" tIns="0" rIns="0" bIns="0" anchor="ctr">
-            <a:noAutofit/>
-          </a:bodyPr>
-          <a:lstStyle/>
-          <a:p>
-            <a:pPr algn="l"/>
-            <a:r>
-              <a:rPr sz="900" b="1">
-                <a:solidFill>
-                  <a:srgbClr val="0F4C5C"/>
-                </a:solidFill>
-                <a:latin typeface="BIZ UDPGothic"/>
-                <a:ea typeface="BIZ UDPGothic"/>
-                <a:cs typeface="BIZ UDPGothic"/>
-              </a:rPr>
-              <a:t>② 製袋機（既設SPM機）でスパウトを熱圧着</a:t>
-            </a:r>
-          </a:p>
-        </p:txBody>
-      </p:sp>
-      <p:sp>
-        <p:nvSpPr>
-          <p:cNvPr id="37" name="TextBox 36"/>
-          <p:cNvSpPr txBox="1"/>
-          <p:nvPr/>
-        </p:nvSpPr>
-        <p:spPr>
-          <a:xfrm>
-            <a:off x="5532120" y="2423160"/>
-            <a:ext cx="3127248" cy="384048"/>
-          </a:xfrm>
-          <a:prstGeom prst="rect">
-            <a:avLst/>
-          </a:prstGeom>
-          <a:noFill/>
-        </p:spPr>
-        <p:txBody>
-          <a:bodyPr wrap="square" lIns="0" tIns="0" rIns="0" bIns="0" anchor="t">
-            <a:noAutofit/>
-          </a:bodyPr>
-          <a:lstStyle/>
-          <a:p>
-            <a:pPr algn="l"/>
-            <a:r>
-              <a:rPr sz="750" b="0">
-                <a:solidFill>
-                  <a:srgbClr val="1F2A30"/>
-                </a:solidFill>
-                <a:latin typeface="BIZ UDPGothic"/>
-                <a:ea typeface="BIZ UDPGothic"/>
-                <a:cs typeface="BIZ UDPGothic"/>
-              </a:rPr>
-              <a:t>袋の口にストロー状の注ぎ口「スパウト」を熱で溶着する（自動、150袋／分）</a:t>
-            </a:r>
-          </a:p>
-        </p:txBody>
-      </p:sp>
-      <p:sp>
-        <p:nvSpPr>
-          <p:cNvPr id="38" name="Down Arrow 37"/>
-          <p:cNvSpPr/>
-          <p:nvPr/>
-        </p:nvSpPr>
-        <p:spPr>
-          <a:xfrm>
-            <a:off x="5074920" y="2816352"/>
-            <a:ext cx="146304" cy="73152"/>
-          </a:xfrm>
-          <a:prstGeom prst="downArrow">
-            <a:avLst/>
-          </a:prstGeom>
-          <a:solidFill>
-            <a:srgbClr val="0F4C5C"/>
-          </a:solidFill>
-          <a:ln w="3175">
-            <a:solidFill>
-              <a:srgbClr val="0F4C5C"/>
-            </a:solidFill>
-          </a:ln>
-        </p:spPr>
-        <p:txBody>
-          <a:bodyPr rtlCol="0" anchor="ctr"/>
-          <a:lstStyle/>
-          <a:p>
-            <a:pPr algn="ctr"/>
-            <a:endParaRPr/>
-          </a:p>
-        </p:txBody>
-      </p:sp>
-      <p:sp>
-        <p:nvSpPr>
-          <p:cNvPr id="39" name="Rectangle 38"/>
-          <p:cNvSpPr/>
-          <p:nvPr/>
-        </p:nvSpPr>
-        <p:spPr>
-          <a:xfrm>
-            <a:off x="4773168" y="2889504"/>
-            <a:ext cx="3950208" cy="640080"/>
-          </a:xfrm>
-          <a:prstGeom prst="rect">
-            <a:avLst/>
-          </a:prstGeom>
-          <a:solidFill>
-            <a:srgbClr val="FFFFFF"/>
-          </a:solidFill>
-          <a:ln w="9525">
-            <a:solidFill>
-              <a:srgbClr val="C9D3D8"/>
-            </a:solidFill>
-          </a:ln>
-        </p:spPr>
-        <p:txBody>
-          <a:bodyPr rtlCol="0" anchor="ctr"/>
-          <a:lstStyle/>
-          <a:p>
-            <a:pPr algn="ctr"/>
-            <a:endParaRPr/>
-          </a:p>
-        </p:txBody>
-      </p:sp>
-      <p:sp>
-        <p:nvSpPr>
-          <p:cNvPr id="40" name="Rounded Rectangle 39"/>
-          <p:cNvSpPr/>
-          <p:nvPr/>
-        </p:nvSpPr>
-        <p:spPr>
-          <a:xfrm>
-            <a:off x="4937760" y="3081528"/>
-            <a:ext cx="420624" cy="402335"/>
-          </a:xfrm>
-          <a:prstGeom prst="roundRect">
-            <a:avLst/>
-          </a:prstGeom>
-          <a:solidFill>
-            <a:srgbClr val="D9DEE3"/>
-          </a:solidFill>
-          <a:ln w="9525">
-            <a:solidFill>
-              <a:srgbClr val="7F8C96"/>
-            </a:solidFill>
-          </a:ln>
-        </p:spPr>
-        <p:txBody>
-          <a:bodyPr rtlCol="0" anchor="ctr"/>
-          <a:lstStyle/>
-          <a:p>
-            <a:pPr algn="ctr"/>
-            <a:endParaRPr/>
-          </a:p>
-        </p:txBody>
-      </p:sp>
-      <p:sp>
-        <p:nvSpPr>
-          <p:cNvPr id="41" name="Rectangle 40"/>
-          <p:cNvSpPr/>
-          <p:nvPr/>
-        </p:nvSpPr>
-        <p:spPr>
-          <a:xfrm>
-            <a:off x="5088636" y="2971800"/>
-            <a:ext cx="118872" cy="146304"/>
-          </a:xfrm>
-          <a:prstGeom prst="rect">
-            <a:avLst/>
-          </a:prstGeom>
-          <a:solidFill>
-            <a:srgbClr val="FFFFFF"/>
-          </a:solidFill>
-          <a:ln w="12700">
-            <a:solidFill>
-              <a:srgbClr val="0F4C5C"/>
-            </a:solidFill>
-          </a:ln>
-        </p:spPr>
-        <p:txBody>
-          <a:bodyPr rtlCol="0" anchor="ctr"/>
-          <a:lstStyle/>
-          <a:p>
-            <a:pPr algn="ctr"/>
-            <a:endParaRPr/>
-          </a:p>
-        </p:txBody>
-      </p:sp>
-      <p:sp>
-        <p:nvSpPr>
-          <p:cNvPr id="42" name="Rectangle 41"/>
-          <p:cNvSpPr/>
-          <p:nvPr/>
-        </p:nvSpPr>
-        <p:spPr>
-          <a:xfrm>
-            <a:off x="5001768" y="3063240"/>
-            <a:ext cx="292608" cy="45720"/>
+            <a:endParaRPr sz="2400" dirty="0"/>
+          </a:p>
+        </p:txBody>
+      </p:sp>
+      <p:sp>
+        <p:nvSpPr>
+          <p:cNvPr id="50" name="Rectangle 49"/>
+          <p:cNvSpPr/>
+          <p:nvPr/>
+        </p:nvSpPr>
+        <p:spPr>
+          <a:xfrm>
+            <a:off x="5047488" y="3630168"/>
+            <a:ext cx="201168" cy="73152"/>
           </a:xfrm>
           <a:prstGeom prst="rect">
             <a:avLst/>
@@ -5337,19 +5592,19 @@
           <a:lstStyle/>
           <a:p>
             <a:pPr algn="ctr"/>
-            <a:endParaRPr/>
-          </a:p>
-        </p:txBody>
-      </p:sp>
-      <p:sp>
-        <p:nvSpPr>
-          <p:cNvPr id="43" name="TextBox 42"/>
+            <a:endParaRPr sz="2400" dirty="0"/>
+          </a:p>
+        </p:txBody>
+      </p:sp>
+      <p:sp>
+        <p:nvSpPr>
+          <p:cNvPr id="51" name="TextBox 50"/>
           <p:cNvSpPr txBox="1"/>
           <p:nvPr/>
         </p:nvSpPr>
         <p:spPr>
           <a:xfrm>
-            <a:off x="5532120" y="2916936"/>
+            <a:off x="5532120" y="3630168"/>
             <a:ext cx="3127248" cy="219456"/>
           </a:xfrm>
           <a:prstGeom prst="rect">
@@ -5365,7 +5620,7 @@
           <a:p>
             <a:pPr algn="l"/>
             <a:r>
-              <a:rPr sz="900" b="1">
+              <a:rPr sz="1050" b="1" dirty="0">
                 <a:solidFill>
                   <a:srgbClr val="0F4C5C"/>
                 </a:solidFill>
@@ -5373,20 +5628,20 @@
                 <a:ea typeface="BIZ UDPGothic"/>
                 <a:cs typeface="BIZ UDPGothic"/>
               </a:rPr>
-              <a:t>③ リークチェッカで検査</a:t>
-            </a:r>
-          </a:p>
-        </p:txBody>
-      </p:sp>
-      <p:sp>
-        <p:nvSpPr>
-          <p:cNvPr id="44" name="TextBox 43"/>
+              <a:t>④ 充填室で充填・キャップ</a:t>
+            </a:r>
+          </a:p>
+        </p:txBody>
+      </p:sp>
+      <p:sp>
+        <p:nvSpPr>
+          <p:cNvPr id="52" name="TextBox 51"/>
           <p:cNvSpPr txBox="1"/>
           <p:nvPr/>
         </p:nvSpPr>
         <p:spPr>
           <a:xfrm>
-            <a:off x="5532120" y="3136392"/>
+            <a:off x="5532120" y="3849624"/>
             <a:ext cx="3127248" cy="384048"/>
           </a:xfrm>
           <a:prstGeom prst="rect">
@@ -5402,7 +5657,7 @@
           <a:p>
             <a:pPr algn="l"/>
             <a:r>
-              <a:rPr sz="750" b="0">
+              <a:rPr sz="900" b="0" dirty="0">
                 <a:solidFill>
                   <a:srgbClr val="1F2A30"/>
                 </a:solidFill>
@@ -5410,213 +5665,21 @@
                 <a:ea typeface="BIZ UDPGothic"/>
                 <a:cs typeface="BIZ UDPGothic"/>
               </a:rPr>
-              <a:t>圧着部からの漏れがないか検査（自動）→ コンベアで充填室へ</a:t>
-            </a:r>
-          </a:p>
-        </p:txBody>
-      </p:sp>
-      <p:sp>
-        <p:nvSpPr>
-          <p:cNvPr id="45" name="Down Arrow 44"/>
-          <p:cNvSpPr/>
-          <p:nvPr/>
-        </p:nvSpPr>
-        <p:spPr>
-          <a:xfrm>
-            <a:off x="5074920" y="3529584"/>
-            <a:ext cx="146304" cy="73152"/>
-          </a:xfrm>
-          <a:prstGeom prst="downArrow">
-            <a:avLst/>
-          </a:prstGeom>
-          <a:solidFill>
-            <a:srgbClr val="0F4C5C"/>
-          </a:solidFill>
-          <a:ln w="3175">
-            <a:solidFill>
-              <a:srgbClr val="0F4C5C"/>
-            </a:solidFill>
-          </a:ln>
-        </p:spPr>
-        <p:txBody>
-          <a:bodyPr rtlCol="0" anchor="ctr"/>
-          <a:lstStyle/>
-          <a:p>
-            <a:pPr algn="ctr"/>
-            <a:endParaRPr/>
-          </a:p>
-        </p:txBody>
-      </p:sp>
-      <p:sp>
-        <p:nvSpPr>
-          <p:cNvPr id="46" name="Rectangle 45"/>
-          <p:cNvSpPr/>
-          <p:nvPr/>
-        </p:nvSpPr>
-        <p:spPr>
-          <a:xfrm>
-            <a:off x="4773168" y="3602736"/>
-            <a:ext cx="3950208" cy="640080"/>
-          </a:xfrm>
-          <a:prstGeom prst="rect">
-            <a:avLst/>
-          </a:prstGeom>
-          <a:solidFill>
-            <a:srgbClr val="FFFFFF"/>
-          </a:solidFill>
-          <a:ln w="9525">
-            <a:solidFill>
-              <a:srgbClr val="C9D3D8"/>
-            </a:solidFill>
-          </a:ln>
-        </p:spPr>
-        <p:txBody>
-          <a:bodyPr rtlCol="0" anchor="ctr"/>
-          <a:lstStyle/>
-          <a:p>
-            <a:pPr algn="ctr"/>
-            <a:endParaRPr/>
-          </a:p>
-        </p:txBody>
-      </p:sp>
-      <p:sp>
-        <p:nvSpPr>
-          <p:cNvPr id="47" name="Rounded Rectangle 46"/>
-          <p:cNvSpPr/>
-          <p:nvPr/>
-        </p:nvSpPr>
-        <p:spPr>
-          <a:xfrm>
-            <a:off x="4937760" y="3794759"/>
-            <a:ext cx="420624" cy="402335"/>
-          </a:xfrm>
-          <a:prstGeom prst="roundRect">
-            <a:avLst/>
-          </a:prstGeom>
-          <a:solidFill>
-            <a:srgbClr val="F6E3C8"/>
-          </a:solidFill>
-          <a:ln w="9525">
-            <a:solidFill>
-              <a:srgbClr val="7F8C96"/>
-            </a:solidFill>
-          </a:ln>
-        </p:spPr>
-        <p:txBody>
-          <a:bodyPr rtlCol="0" anchor="ctr"/>
-          <a:lstStyle/>
-          <a:p>
-            <a:pPr algn="ctr"/>
-            <a:endParaRPr/>
-          </a:p>
-        </p:txBody>
-      </p:sp>
-      <p:sp>
-        <p:nvSpPr>
-          <p:cNvPr id="48" name="Rectangle 47"/>
-          <p:cNvSpPr/>
-          <p:nvPr/>
-        </p:nvSpPr>
-        <p:spPr>
-          <a:xfrm>
-            <a:off x="5088636" y="3685031"/>
-            <a:ext cx="118872" cy="146304"/>
-          </a:xfrm>
-          <a:prstGeom prst="rect">
-            <a:avLst/>
-          </a:prstGeom>
-          <a:solidFill>
-            <a:srgbClr val="FFFFFF"/>
-          </a:solidFill>
-          <a:ln w="12700">
-            <a:solidFill>
-              <a:srgbClr val="0F4C5C"/>
-            </a:solidFill>
-          </a:ln>
-        </p:spPr>
-        <p:txBody>
-          <a:bodyPr rtlCol="0" anchor="ctr"/>
-          <a:lstStyle/>
-          <a:p>
-            <a:pPr algn="ctr"/>
-            <a:endParaRPr/>
-          </a:p>
-        </p:txBody>
-      </p:sp>
-      <p:sp>
-        <p:nvSpPr>
-          <p:cNvPr id="49" name="Rectangle 48"/>
-          <p:cNvSpPr/>
-          <p:nvPr/>
-        </p:nvSpPr>
-        <p:spPr>
-          <a:xfrm>
-            <a:off x="5001768" y="3776472"/>
-            <a:ext cx="292608" cy="45720"/>
-          </a:xfrm>
-          <a:prstGeom prst="rect">
-            <a:avLst/>
-          </a:prstGeom>
-          <a:solidFill>
-            <a:srgbClr val="F26B1D"/>
-          </a:solidFill>
-          <a:ln w="3175">
-            <a:solidFill>
-              <a:srgbClr val="F26B1D"/>
-            </a:solidFill>
-          </a:ln>
-        </p:spPr>
-        <p:txBody>
-          <a:bodyPr rtlCol="0" anchor="ctr"/>
-          <a:lstStyle/>
-          <a:p>
-            <a:pPr algn="ctr"/>
-            <a:endParaRPr/>
-          </a:p>
-        </p:txBody>
-      </p:sp>
-      <p:sp>
-        <p:nvSpPr>
-          <p:cNvPr id="50" name="Rectangle 49"/>
-          <p:cNvSpPr/>
-          <p:nvPr/>
-        </p:nvSpPr>
-        <p:spPr>
-          <a:xfrm>
-            <a:off x="5047488" y="3630168"/>
-            <a:ext cx="201168" cy="73152"/>
-          </a:xfrm>
-          <a:prstGeom prst="rect">
-            <a:avLst/>
-          </a:prstGeom>
-          <a:solidFill>
-            <a:srgbClr val="F26B1D"/>
-          </a:solidFill>
-          <a:ln w="3175">
-            <a:solidFill>
-              <a:srgbClr val="F26B1D"/>
-            </a:solidFill>
-          </a:ln>
-        </p:spPr>
-        <p:txBody>
-          <a:bodyPr rtlCol="0" anchor="ctr"/>
-          <a:lstStyle/>
-          <a:p>
-            <a:pPr algn="ctr"/>
-            <a:endParaRPr/>
-          </a:p>
-        </p:txBody>
-      </p:sp>
-      <p:sp>
-        <p:nvSpPr>
-          <p:cNvPr id="51" name="TextBox 50"/>
+              <a:t>ゼリーを充填してキャップを付け、殺菌室で容器ごと殺菌 → 2階で包装・箱詰め</a:t>
+            </a:r>
+          </a:p>
+        </p:txBody>
+      </p:sp>
+      <p:sp>
+        <p:nvSpPr>
+          <p:cNvPr id="53" name="TextBox 52"/>
           <p:cNvSpPr txBox="1"/>
           <p:nvPr/>
         </p:nvSpPr>
         <p:spPr>
           <a:xfrm>
-            <a:off x="5532120" y="3630168"/>
-            <a:ext cx="3127248" cy="219456"/>
+            <a:off x="4773168" y="4261104"/>
+            <a:ext cx="3950208" cy="128016"/>
           </a:xfrm>
           <a:prstGeom prst="rect">
             <a:avLst/>
@@ -5631,81 +5694,7 @@
           <a:p>
             <a:pPr algn="l"/>
             <a:r>
-              <a:rPr sz="900" b="1">
-                <a:solidFill>
-                  <a:srgbClr val="0F4C5C"/>
-                </a:solidFill>
-                <a:latin typeface="BIZ UDPGothic"/>
-                <a:ea typeface="BIZ UDPGothic"/>
-                <a:cs typeface="BIZ UDPGothic"/>
-              </a:rPr>
-              <a:t>④ 充填室で充填・キャップ</a:t>
-            </a:r>
-          </a:p>
-        </p:txBody>
-      </p:sp>
-      <p:sp>
-        <p:nvSpPr>
-          <p:cNvPr id="52" name="TextBox 51"/>
-          <p:cNvSpPr txBox="1"/>
-          <p:nvPr/>
-        </p:nvSpPr>
-        <p:spPr>
-          <a:xfrm>
-            <a:off x="5532120" y="3849624"/>
-            <a:ext cx="3127248" cy="384048"/>
-          </a:xfrm>
-          <a:prstGeom prst="rect">
-            <a:avLst/>
-          </a:prstGeom>
-          <a:noFill/>
-        </p:spPr>
-        <p:txBody>
-          <a:bodyPr wrap="square" lIns="0" tIns="0" rIns="0" bIns="0" anchor="t">
-            <a:noAutofit/>
-          </a:bodyPr>
-          <a:lstStyle/>
-          <a:p>
-            <a:pPr algn="l"/>
-            <a:r>
-              <a:rPr sz="750" b="0">
-                <a:solidFill>
-                  <a:srgbClr val="1F2A30"/>
-                </a:solidFill>
-                <a:latin typeface="BIZ UDPGothic"/>
-                <a:ea typeface="BIZ UDPGothic"/>
-                <a:cs typeface="BIZ UDPGothic"/>
-              </a:rPr>
-              <a:t>ゼリーを充填してキャップを付け、殺菌室で容器ごと殺菌 → 2階で包装・箱詰め</a:t>
-            </a:r>
-          </a:p>
-        </p:txBody>
-      </p:sp>
-      <p:sp>
-        <p:nvSpPr>
-          <p:cNvPr id="53" name="TextBox 52"/>
-          <p:cNvSpPr txBox="1"/>
-          <p:nvPr/>
-        </p:nvSpPr>
-        <p:spPr>
-          <a:xfrm>
-            <a:off x="4773168" y="4261104"/>
-            <a:ext cx="3950208" cy="128016"/>
-          </a:xfrm>
-          <a:prstGeom prst="rect">
-            <a:avLst/>
-          </a:prstGeom>
-          <a:noFill/>
-        </p:spPr>
-        <p:txBody>
-          <a:bodyPr wrap="square" lIns="0" tIns="0" rIns="0" bIns="0" anchor="ctr">
-            <a:noAutofit/>
-          </a:bodyPr>
-          <a:lstStyle/>
-          <a:p>
-            <a:pPr algn="l"/>
-            <a:r>
-              <a:rPr sz="700" b="0">
+              <a:rPr sz="900" b="0" dirty="0">
                 <a:solidFill>
                   <a:srgbClr val="8A9BA8"/>
                 </a:solidFill>
@@ -5746,7 +5735,7 @@
           <a:lstStyle/>
           <a:p>
             <a:pPr algn="ctr"/>
-            <a:endParaRPr/>
+            <a:endParaRPr dirty="0"/>
           </a:p>
         </p:txBody>
       </p:sp>
@@ -5774,7 +5763,7 @@
           <a:p>
             <a:pPr algn="l"/>
             <a:r>
-              <a:rPr sz="850" b="1" dirty="0" err="1">
+              <a:rPr sz="850" b="1" dirty="0">
                 <a:solidFill>
                   <a:srgbClr val="0F4C5C"/>
                 </a:solidFill>
@@ -5785,7 +5774,7 @@
               <a:t>用語：</a:t>
             </a:r>
             <a:r>
-              <a:rPr sz="850" b="0" dirty="0" err="1">
+              <a:rPr sz="850" b="0" dirty="0">
                 <a:solidFill>
                   <a:srgbClr val="1F2A30"/>
                 </a:solidFill>
@@ -5793,40 +5782,7 @@
                 <a:ea typeface="BIZ UDPGothic"/>
                 <a:cs typeface="BIZ UDPGothic"/>
               </a:rPr>
-              <a:t>パウチ＝アルミ等を貼り合わせた柔らかい袋。スパウト＝飲み口になるストロー状の注ぎ口（キャップ付き</a:t>
-            </a:r>
-            <a:r>
-              <a:rPr sz="850" b="0" dirty="0">
-                <a:solidFill>
-                  <a:srgbClr val="1F2A30"/>
-                </a:solidFill>
-                <a:latin typeface="BIZ UDPGothic"/>
-                <a:ea typeface="BIZ UDPGothic"/>
-                <a:cs typeface="BIZ UDPGothic"/>
-              </a:rPr>
-              <a:t>）。</a:t>
-            </a:r>
-            <a:r>
-              <a:rPr sz="850" b="0" dirty="0" err="1">
-                <a:solidFill>
-                  <a:srgbClr val="1F2A30"/>
-                </a:solidFill>
-                <a:latin typeface="BIZ UDPGothic"/>
-                <a:ea typeface="BIZ UDPGothic"/>
-                <a:cs typeface="BIZ UDPGothic"/>
-              </a:rPr>
-              <a:t>製袋機＝空パウチにスパウトを圧着する機械（既設SPM機</a:t>
-            </a:r>
-            <a:r>
-              <a:rPr sz="850" b="0" dirty="0">
-                <a:solidFill>
-                  <a:srgbClr val="1F2A30"/>
-                </a:solidFill>
-                <a:latin typeface="BIZ UDPGothic"/>
-                <a:ea typeface="BIZ UDPGothic"/>
-                <a:cs typeface="BIZ UDPGothic"/>
-              </a:rPr>
-              <a:t>）。</a:t>
+              <a:t>パウチ＝アルミ等を貼り合わせた柔らかい袋。スパウト＝飲み口になるストロー状の注ぎ口（キャップ付き）。製袋機＝空パウチにスパウトを圧着する機械（既設SPM機）。</a:t>
             </a:r>
             <a:endParaRPr lang="en-US" sz="850" b="0" dirty="0">
               <a:solidFill>
@@ -5840,7 +5796,7 @@
           <a:p>
             <a:pPr algn="l"/>
             <a:r>
-              <a:rPr sz="850" b="0" dirty="0" err="1">
+              <a:rPr sz="850" b="0" dirty="0">
                 <a:solidFill>
                   <a:srgbClr val="1F2A30"/>
                 </a:solidFill>
@@ -5873,7 +5829,7 @@
               <a:t>ための</a:t>
             </a:r>
             <a:r>
-              <a:rPr sz="850" b="0" dirty="0" err="1">
+              <a:rPr sz="850" b="0" dirty="0">
                 <a:solidFill>
                   <a:srgbClr val="1F2A30"/>
                 </a:solidFill>
@@ -5883,14 +5839,6 @@
               </a:rPr>
               <a:t>投入口</a:t>
             </a:r>
-            <a:endParaRPr sz="850" b="0" dirty="0">
-              <a:solidFill>
-                <a:srgbClr val="1F2A30"/>
-              </a:solidFill>
-              <a:latin typeface="BIZ UDPGothic"/>
-              <a:ea typeface="BIZ UDPGothic"/>
-              <a:cs typeface="BIZ UDPGothic"/>
-            </a:endParaRPr>
           </a:p>
         </p:txBody>
       </p:sp>
@@ -5955,7 +5903,7 @@
           <a:bodyPr/>
           <a:lstStyle/>
           <a:p>
-            <a:endParaRPr/>
+            <a:endParaRPr dirty="0"/>
           </a:p>
         </p:txBody>
       </p:sp>
@@ -5987,7 +5935,7 @@
           <a:bodyPr/>
           <a:lstStyle/>
           <a:p>
-            <a:endParaRPr/>
+            <a:endParaRPr dirty="0"/>
           </a:p>
         </p:txBody>
       </p:sp>
@@ -6016,7 +5964,7 @@
               <a:buNone/>
             </a:pPr>
             <a:r>
-              <a:rPr sz="2200" b="1">
+              <a:rPr sz="2200" b="1" dirty="0">
                 <a:solidFill>
                   <a:srgbClr val="FFFFFF"/>
                 </a:solidFill>
@@ -6024,7 +5972,7 @@
                 <a:ea typeface="BIZ UDPGothic"/>
                 <a:cs typeface="BIZ UDPGothic"/>
               </a:rPr>
-              <a:t>3. 製袋室のレイアウト ビフォー・アフター（デフォルメ図）</a:t>
+              <a:t>3. 製袋室のレイアウト ビフォー・アフター</a:t>
             </a:r>
             <a:endParaRPr lang="en-US" sz="2200" dirty="0"/>
           </a:p>
@@ -6063,7 +6011,29 @@
                 <a:ea typeface="BIZ UDPGothic" pitchFamily="34" charset="-122"/>
                 <a:cs typeface="BIZ UDPGothic" pitchFamily="34" charset="-120"/>
               </a:rPr>
-              <a:t>a〜iは機械の記号で、次ページ「各機械の役割」と対応（①〜は別紙1の工程番号）。寸法・角度・位置は簡略化しています。</a:t>
+              <a:t>a〜iは機械の記号で、次ページ「各機械の役割」と対応（①〜は別紙1の工程番号）。寸法・角度・位置は簡略化</a:t>
+            </a:r>
+            <a:r>
+              <a:rPr lang="ja-JP" altLang="en-US" sz="1100" dirty="0">
+                <a:solidFill>
+                  <a:srgbClr val="5B6770"/>
+                </a:solidFill>
+                <a:latin typeface="BIZ UDPGothic" pitchFamily="34" charset="0"/>
+                <a:ea typeface="BIZ UDPGothic" pitchFamily="34" charset="-122"/>
+                <a:cs typeface="BIZ UDPGothic" pitchFamily="34" charset="-120"/>
+              </a:rPr>
+              <a:t>済</a:t>
+            </a:r>
+            <a:r>
+              <a:rPr lang="en-US" sz="1100" dirty="0">
+                <a:solidFill>
+                  <a:srgbClr val="5B6770"/>
+                </a:solidFill>
+                <a:latin typeface="BIZ UDPGothic" pitchFamily="34" charset="0"/>
+                <a:ea typeface="BIZ UDPGothic" pitchFamily="34" charset="-122"/>
+                <a:cs typeface="BIZ UDPGothic" pitchFamily="34" charset="-120"/>
+              </a:rPr>
+              <a:t>。</a:t>
             </a:r>
             <a:endParaRPr lang="en-US" sz="1100" dirty="0"/>
           </a:p>
@@ -6133,7 +6103,7 @@
               <a:buNone/>
             </a:pPr>
             <a:r>
-              <a:rPr sz="900" b="0">
+              <a:rPr sz="900" b="0" dirty="0">
                 <a:solidFill>
                   <a:srgbClr val="8A9BA8"/>
                 </a:solidFill>
@@ -6155,7 +6125,7 @@
         </p:nvSpPr>
         <p:spPr>
           <a:xfrm>
-            <a:off x="320040" y="1097280"/>
+            <a:off x="320040" y="1083580"/>
             <a:ext cx="4114800" cy="2971800"/>
           </a:xfrm>
           <a:prstGeom prst="rect">
@@ -6175,7 +6145,7 @@
           <a:bodyPr/>
           <a:lstStyle/>
           <a:p>
-            <a:endParaRPr/>
+            <a:endParaRPr sz="2000" dirty="0"/>
           </a:p>
         </p:txBody>
       </p:sp>
@@ -6207,7 +6177,7 @@
           <a:bodyPr/>
           <a:lstStyle/>
           <a:p>
-            <a:endParaRPr/>
+            <a:endParaRPr sz="2000" dirty="0"/>
           </a:p>
         </p:txBody>
       </p:sp>
@@ -6236,7 +6206,7 @@
               <a:buNone/>
             </a:pPr>
             <a:r>
-              <a:rPr lang="en-US" sz="1200" b="1" dirty="0">
+              <a:rPr lang="en-US" sz="1400" b="1" dirty="0">
                 <a:solidFill>
                   <a:srgbClr val="FFFFFF"/>
                 </a:solidFill>
@@ -6246,7 +6216,7 @@
               </a:rPr>
               <a:t>現状</a:t>
             </a:r>
-            <a:endParaRPr lang="en-US" sz="1200" dirty="0"/>
+            <a:endParaRPr lang="en-US" sz="1400" dirty="0"/>
           </a:p>
         </p:txBody>
       </p:sp>
@@ -6275,7 +6245,7 @@
               <a:buNone/>
             </a:pPr>
             <a:r>
-              <a:rPr lang="en-US" sz="1100" b="1" dirty="0">
+              <a:rPr lang="en-US" sz="1200" b="1" dirty="0">
                 <a:solidFill>
                   <a:srgbClr val="0F4C5C"/>
                 </a:solidFill>
@@ -6285,7 +6255,7 @@
               </a:rPr>
               <a:t>製袋室</a:t>
             </a:r>
-            <a:endParaRPr lang="en-US" sz="1100" dirty="0"/>
+            <a:endParaRPr lang="en-US" sz="1200" dirty="0"/>
           </a:p>
         </p:txBody>
       </p:sp>
@@ -6314,7 +6284,7 @@
               <a:buNone/>
             </a:pPr>
             <a:r>
-              <a:rPr lang="en-US" sz="800" dirty="0">
+              <a:rPr lang="en-US" sz="900" dirty="0">
                 <a:solidFill>
                   <a:srgbClr val="5B6770"/>
                 </a:solidFill>
@@ -6322,20 +6292,9 @@
                 <a:ea typeface="BIZ UDPGothic" pitchFamily="34" charset="-122"/>
                 <a:cs typeface="BIZ UDPGothic" pitchFamily="34" charset="-120"/>
               </a:rPr>
-              <a:t>◀ </a:t>
-            </a:r>
-            <a:r>
-              <a:rPr lang="en-US" sz="800" dirty="0" err="1">
-                <a:solidFill>
-                  <a:srgbClr val="5B6770"/>
-                </a:solidFill>
-                <a:latin typeface="BIZ UDPGothic" pitchFamily="34" charset="0"/>
-                <a:ea typeface="BIZ UDPGothic" pitchFamily="34" charset="-122"/>
-                <a:cs typeface="BIZ UDPGothic" pitchFamily="34" charset="-120"/>
-              </a:rPr>
-              <a:t>資材保管室から搬入</a:t>
-            </a:r>
-            <a:endParaRPr lang="en-US" sz="800" dirty="0"/>
+              <a:t>◀ 資材保管室から搬入</a:t>
+            </a:r>
+            <a:endParaRPr lang="en-US" sz="900" dirty="0"/>
           </a:p>
         </p:txBody>
       </p:sp>
@@ -6367,7 +6326,7 @@
           <a:bodyPr/>
           <a:lstStyle/>
           <a:p>
-            <a:endParaRPr/>
+            <a:endParaRPr sz="2000" dirty="0"/>
           </a:p>
         </p:txBody>
       </p:sp>
@@ -6396,7 +6355,7 @@
               <a:buNone/>
             </a:pPr>
             <a:r>
-              <a:rPr lang="en-US" sz="950" b="1" u="sng" dirty="0">
+              <a:rPr lang="en-US" sz="1000" b="1" u="sng" dirty="0">
                 <a:solidFill>
                   <a:srgbClr val="1F2A30"/>
                 </a:solidFill>
@@ -6406,14 +6365,14 @@
               </a:rPr>
               <a:t>a. 製袋機</a:t>
             </a:r>
-            <a:endParaRPr lang="en-US" sz="950" u="sng" dirty="0"/>
+            <a:endParaRPr lang="en-US" sz="1000" u="sng" dirty="0"/>
           </a:p>
           <a:p>
             <a:pPr marL="0" indent="0" algn="ctr">
               <a:buNone/>
             </a:pPr>
             <a:r>
-              <a:rPr lang="en-US" sz="950" b="1" dirty="0">
+              <a:rPr lang="en-US" sz="1000" b="1" dirty="0">
                 <a:solidFill>
                   <a:srgbClr val="1F2A30"/>
                 </a:solidFill>
@@ -6423,14 +6382,14 @@
               </a:rPr>
               <a:t>（既設SPM機）</a:t>
             </a:r>
-            <a:endParaRPr lang="en-US" sz="950" dirty="0"/>
+            <a:endParaRPr lang="en-US" sz="1000" dirty="0"/>
           </a:p>
           <a:p>
             <a:pPr marL="0" indent="0" algn="ctr">
               <a:buNone/>
             </a:pPr>
             <a:r>
-              <a:rPr lang="en-US" sz="950" b="1" dirty="0">
+              <a:rPr lang="en-US" sz="1000" b="1" dirty="0">
                 <a:solidFill>
                   <a:srgbClr val="1F2A30"/>
                 </a:solidFill>
@@ -6440,7 +6399,7 @@
               </a:rPr>
               <a:t>スパウト熱圧着</a:t>
             </a:r>
-            <a:endParaRPr lang="en-US" sz="950" dirty="0"/>
+            <a:endParaRPr lang="en-US" sz="1000" dirty="0"/>
           </a:p>
         </p:txBody>
       </p:sp>
@@ -6472,7 +6431,7 @@
           <a:bodyPr/>
           <a:lstStyle/>
           <a:p>
-            <a:endParaRPr/>
+            <a:endParaRPr sz="2000" dirty="0"/>
           </a:p>
         </p:txBody>
       </p:sp>
@@ -6501,7 +6460,7 @@
               <a:buNone/>
             </a:pPr>
             <a:r>
-              <a:rPr lang="en-US" sz="850" b="1" u="sng" dirty="0">
+              <a:rPr lang="en-US" sz="900" b="1" u="sng" dirty="0">
                 <a:solidFill>
                   <a:srgbClr val="0B5394"/>
                 </a:solidFill>
@@ -6511,7 +6470,7 @@
               </a:rPr>
               <a:t>b. マガジン</a:t>
             </a:r>
-            <a:endParaRPr lang="en-US" sz="850" u="sng" dirty="0"/>
+            <a:endParaRPr lang="en-US" sz="900" u="sng" dirty="0"/>
           </a:p>
         </p:txBody>
       </p:sp>
@@ -6543,7 +6502,7 @@
           <a:bodyPr/>
           <a:lstStyle/>
           <a:p>
-            <a:endParaRPr/>
+            <a:endParaRPr sz="2000" dirty="0"/>
           </a:p>
         </p:txBody>
       </p:sp>
@@ -6572,7 +6531,7 @@
               <a:buNone/>
             </a:pPr>
             <a:r>
-              <a:rPr lang="en-US" sz="850" b="1" u="sng" dirty="0">
+              <a:rPr lang="en-US" sz="900" b="1" u="sng" dirty="0">
                 <a:solidFill>
                   <a:srgbClr val="B5176B"/>
                 </a:solidFill>
@@ -6582,7 +6541,7 @@
               </a:rPr>
               <a:t>d. コンベア（搬送）</a:t>
             </a:r>
-            <a:endParaRPr lang="en-US" sz="850" u="sng" dirty="0"/>
+            <a:endParaRPr lang="en-US" sz="900" u="sng" dirty="0"/>
           </a:p>
         </p:txBody>
       </p:sp>
@@ -6614,7 +6573,7 @@
           <a:bodyPr/>
           <a:lstStyle/>
           <a:p>
-            <a:endParaRPr/>
+            <a:endParaRPr sz="2000" dirty="0"/>
           </a:p>
         </p:txBody>
       </p:sp>
@@ -6643,7 +6602,7 @@
               <a:buNone/>
             </a:pPr>
             <a:r>
-              <a:rPr lang="en-US" sz="850" b="1" u="sng" dirty="0">
+              <a:rPr lang="en-US" sz="900" b="1" u="sng" dirty="0">
                 <a:solidFill>
                   <a:srgbClr val="5E2A8C"/>
                 </a:solidFill>
@@ -6653,14 +6612,14 @@
               </a:rPr>
               <a:t>e. リーク</a:t>
             </a:r>
-            <a:endParaRPr lang="en-US" sz="850" u="sng" dirty="0"/>
+            <a:endParaRPr lang="en-US" sz="900" u="sng" dirty="0"/>
           </a:p>
           <a:p>
             <a:pPr marL="0" indent="0" algn="ctr">
               <a:buNone/>
             </a:pPr>
             <a:r>
-              <a:rPr lang="en-US" sz="850" b="1" u="sng" dirty="0">
+              <a:rPr lang="en-US" sz="900" b="1" u="sng" dirty="0">
                 <a:solidFill>
                   <a:srgbClr val="5E2A8C"/>
                 </a:solidFill>
@@ -6670,7 +6629,7 @@
               </a:rPr>
               <a:t>チェッカ</a:t>
             </a:r>
-            <a:endParaRPr lang="en-US" sz="850" u="sng" dirty="0"/>
+            <a:endParaRPr lang="en-US" sz="900" u="sng" dirty="0"/>
           </a:p>
         </p:txBody>
       </p:sp>
@@ -6702,7 +6661,7 @@
           <a:bodyPr/>
           <a:lstStyle/>
           <a:p>
-            <a:endParaRPr/>
+            <a:endParaRPr sz="2000" dirty="0"/>
           </a:p>
         </p:txBody>
       </p:sp>
@@ -6731,7 +6690,7 @@
               <a:buNone/>
             </a:pPr>
             <a:r>
-              <a:rPr lang="en-US" sz="850" b="1" dirty="0">
+              <a:rPr lang="en-US" sz="900" b="1" dirty="0">
                 <a:solidFill>
                   <a:srgbClr val="0F4C5C"/>
                 </a:solidFill>
@@ -6741,7 +6700,7 @@
               </a:rPr>
               <a:t>充填室へ</a:t>
             </a:r>
-            <a:endParaRPr lang="en-US" sz="850" dirty="0"/>
+            <a:endParaRPr lang="en-US" sz="900" dirty="0"/>
           </a:p>
         </p:txBody>
       </p:sp>
@@ -6773,7 +6732,7 @@
           <a:bodyPr/>
           <a:lstStyle/>
           <a:p>
-            <a:endParaRPr/>
+            <a:endParaRPr sz="2000" dirty="0"/>
           </a:p>
         </p:txBody>
       </p:sp>
@@ -6802,7 +6761,7 @@
               <a:buNone/>
             </a:pPr>
             <a:r>
-              <a:rPr lang="en-US" sz="850" b="1" u="sng" dirty="0">
+              <a:rPr lang="en-US" sz="900" b="1" u="sng" dirty="0">
                 <a:solidFill>
                   <a:srgbClr val="595959"/>
                 </a:solidFill>
@@ -6812,14 +6771,14 @@
               </a:rPr>
               <a:t>f. ホッパ</a:t>
             </a:r>
-            <a:endParaRPr lang="en-US" sz="850" u="sng" dirty="0"/>
+            <a:endParaRPr lang="en-US" sz="900" u="sng" dirty="0"/>
           </a:p>
           <a:p>
             <a:pPr marL="0" indent="0" algn="ctr">
               <a:buNone/>
             </a:pPr>
             <a:r>
-              <a:rPr lang="en-US" sz="850" b="1" u="sng" dirty="0">
+              <a:rPr lang="en-US" sz="900" b="1" u="sng" dirty="0">
                 <a:solidFill>
                   <a:srgbClr val="595959"/>
                 </a:solidFill>
@@ -6829,7 +6788,7 @@
               </a:rPr>
               <a:t>ローダ</a:t>
             </a:r>
-            <a:endParaRPr lang="en-US" sz="850" u="sng" dirty="0"/>
+            <a:endParaRPr lang="en-US" sz="900" u="sng" dirty="0"/>
           </a:p>
         </p:txBody>
       </p:sp>
@@ -6861,7 +6820,7 @@
           <a:bodyPr/>
           <a:lstStyle/>
           <a:p>
-            <a:endParaRPr/>
+            <a:endParaRPr sz="2000" dirty="0"/>
           </a:p>
         </p:txBody>
       </p:sp>
@@ -6890,7 +6849,7 @@
               <a:buNone/>
             </a:pPr>
             <a:r>
-              <a:rPr lang="en-US" sz="850" b="1" u="sng" dirty="0">
+              <a:rPr lang="en-US" sz="900" b="1" u="sng" dirty="0">
                 <a:solidFill>
                   <a:srgbClr val="146B2A"/>
                 </a:solidFill>
@@ -6900,7 +6859,7 @@
               </a:rPr>
               <a:t>c. 踏み台</a:t>
             </a:r>
-            <a:endParaRPr lang="en-US" sz="850" u="sng" dirty="0"/>
+            <a:endParaRPr lang="en-US" sz="900" u="sng" dirty="0"/>
           </a:p>
         </p:txBody>
       </p:sp>
@@ -6932,7 +6891,7 @@
           <a:bodyPr/>
           <a:lstStyle/>
           <a:p>
-            <a:endParaRPr/>
+            <a:endParaRPr sz="2000" dirty="0"/>
           </a:p>
         </p:txBody>
       </p:sp>
@@ -6966,7 +6925,7 @@
           <a:bodyPr/>
           <a:lstStyle/>
           <a:p>
-            <a:endParaRPr/>
+            <a:endParaRPr sz="2000" dirty="0"/>
           </a:p>
         </p:txBody>
       </p:sp>
@@ -6978,7 +6937,7 @@
         </p:nvSpPr>
         <p:spPr>
           <a:xfrm>
-            <a:off x="2834640" y="1993392"/>
+            <a:off x="2834640" y="1904347"/>
             <a:ext cx="1572768" cy="868680"/>
           </a:xfrm>
           <a:prstGeom prst="rect">
@@ -6995,7 +6954,7 @@
               <a:buNone/>
             </a:pPr>
             <a:r>
-              <a:rPr sz="800" b="0">
+              <a:rPr sz="900" b="0" dirty="0">
                 <a:solidFill>
                   <a:srgbClr val="1F2A30"/>
                 </a:solidFill>
@@ -7005,14 +6964,14 @@
               </a:rPr>
               <a:t>投入担当（パート）1名 ②〜⑦</a:t>
             </a:r>
-            <a:endParaRPr lang="en-US" sz="800" dirty="0"/>
+            <a:endParaRPr lang="en-US" sz="900" dirty="0"/>
           </a:p>
           <a:p>
             <a:pPr marL="0" indent="0">
               <a:buNone/>
             </a:pPr>
             <a:r>
-              <a:rPr sz="800" b="0">
+              <a:rPr sz="900" b="0" dirty="0">
                 <a:solidFill>
                   <a:srgbClr val="1F2A30"/>
                 </a:solidFill>
@@ -7028,7 +6987,7 @@
               <a:buNone/>
             </a:pPr>
             <a:r>
-              <a:rPr sz="800" b="0">
+              <a:rPr sz="900" b="0" dirty="0">
                 <a:solidFill>
                   <a:srgbClr val="1F2A30"/>
                 </a:solidFill>
@@ -7036,23 +6995,7 @@
                 <a:ea typeface="BIZ UDPGothic"/>
                 <a:cs typeface="BIZ UDPGothic"/>
               </a:rPr>
-              <a:t>3分詰めて5分で空、の繰り返し</a:t>
-            </a:r>
-          </a:p>
-          <a:p>
-            <a:pPr marL="0" indent="0">
-              <a:buNone/>
-            </a:pPr>
-            <a:r>
-              <a:rPr sz="800" b="0">
-                <a:solidFill>
-                  <a:srgbClr val="1F2A30"/>
-                </a:solidFill>
-                <a:latin typeface="BIZ UDPGothic"/>
-                <a:ea typeface="BIZ UDPGothic"/>
-                <a:cs typeface="BIZ UDPGothic"/>
-              </a:rPr>
-              <a:t>1日約131回、離れられない</a:t>
+              <a:t>3分詰めて5分で空、の繰り返し1日約131回、離れられない</a:t>
             </a:r>
           </a:p>
         </p:txBody>
@@ -7084,7 +7027,7 @@
           <a:bodyPr/>
           <a:lstStyle/>
           <a:p>
-            <a:endParaRPr/>
+            <a:endParaRPr sz="2000" dirty="0"/>
           </a:p>
         </p:txBody>
       </p:sp>
@@ -7116,7 +7059,7 @@
           <a:bodyPr/>
           <a:lstStyle/>
           <a:p>
-            <a:endParaRPr/>
+            <a:endParaRPr sz="2000" dirty="0"/>
           </a:p>
         </p:txBody>
       </p:sp>
@@ -7145,7 +7088,7 @@
               <a:buNone/>
             </a:pPr>
             <a:r>
-              <a:rPr lang="en-US" sz="750" b="1" dirty="0">
+              <a:rPr lang="en-US" sz="800" b="1" dirty="0">
                 <a:solidFill>
                   <a:srgbClr val="7A5A3A"/>
                 </a:solidFill>
@@ -7155,14 +7098,14 @@
               </a:rPr>
               <a:t>パウチ</a:t>
             </a:r>
-            <a:endParaRPr lang="en-US" sz="750" dirty="0"/>
+            <a:endParaRPr lang="en-US" sz="800" dirty="0"/>
           </a:p>
           <a:p>
             <a:pPr marL="0" indent="0" algn="ctr">
               <a:buNone/>
             </a:pPr>
             <a:r>
-              <a:rPr lang="en-US" sz="750" b="1" dirty="0">
+              <a:rPr lang="en-US" sz="800" b="1" dirty="0">
                 <a:solidFill>
                   <a:srgbClr val="7A5A3A"/>
                 </a:solidFill>
@@ -7172,7 +7115,7 @@
               </a:rPr>
               <a:t>段ボール</a:t>
             </a:r>
-            <a:endParaRPr lang="en-US" sz="750" dirty="0"/>
+            <a:endParaRPr lang="en-US" sz="800" dirty="0"/>
           </a:p>
         </p:txBody>
       </p:sp>
@@ -7204,7 +7147,7 @@
           <a:bodyPr/>
           <a:lstStyle/>
           <a:p>
-            <a:endParaRPr/>
+            <a:endParaRPr sz="2000" dirty="0"/>
           </a:p>
         </p:txBody>
       </p:sp>
@@ -7233,7 +7176,7 @@
               <a:buNone/>
             </a:pPr>
             <a:r>
-              <a:rPr lang="en-US" sz="750" b="1" dirty="0">
+              <a:rPr lang="en-US" sz="800" b="1" dirty="0">
                 <a:solidFill>
                   <a:srgbClr val="7A5A3A"/>
                 </a:solidFill>
@@ -7243,14 +7186,14 @@
               </a:rPr>
               <a:t>パウチ</a:t>
             </a:r>
-            <a:endParaRPr lang="en-US" sz="750" dirty="0"/>
+            <a:endParaRPr lang="en-US" sz="800" dirty="0"/>
           </a:p>
           <a:p>
             <a:pPr marL="0" indent="0" algn="ctr">
               <a:buNone/>
             </a:pPr>
             <a:r>
-              <a:rPr lang="en-US" sz="750" b="1" dirty="0">
+              <a:rPr lang="en-US" sz="800" b="1" dirty="0">
                 <a:solidFill>
                   <a:srgbClr val="7A5A3A"/>
                 </a:solidFill>
@@ -7260,7 +7203,7 @@
               </a:rPr>
               <a:t>段ボール</a:t>
             </a:r>
-            <a:endParaRPr lang="en-US" sz="750" dirty="0"/>
+            <a:endParaRPr lang="en-US" sz="800" dirty="0"/>
           </a:p>
         </p:txBody>
       </p:sp>
@@ -7292,7 +7235,7 @@
           <a:bodyPr/>
           <a:lstStyle/>
           <a:p>
-            <a:endParaRPr/>
+            <a:endParaRPr sz="2000" dirty="0"/>
           </a:p>
         </p:txBody>
       </p:sp>
@@ -7326,7 +7269,7 @@
           <a:bodyPr/>
           <a:lstStyle/>
           <a:p>
-            <a:endParaRPr/>
+            <a:endParaRPr sz="2000" dirty="0"/>
           </a:p>
         </p:txBody>
       </p:sp>
@@ -7355,7 +7298,7 @@
               <a:buNone/>
             </a:pPr>
             <a:r>
-              <a:rPr sz="850" b="1">
+              <a:rPr sz="900" b="1" dirty="0">
                 <a:solidFill>
                   <a:srgbClr val="1F2A30"/>
                 </a:solidFill>
@@ -7365,7 +7308,7 @@
               </a:rPr>
               <a:t>オペレーター1名 ⑧</a:t>
             </a:r>
-            <a:endParaRPr lang="en-US" sz="850" dirty="0"/>
+            <a:endParaRPr lang="en-US" sz="900" dirty="0"/>
           </a:p>
         </p:txBody>
       </p:sp>
@@ -7397,7 +7340,7 @@
           <a:bodyPr/>
           <a:lstStyle/>
           <a:p>
-            <a:endParaRPr/>
+            <a:endParaRPr sz="2000" dirty="0"/>
           </a:p>
         </p:txBody>
       </p:sp>
@@ -7429,7 +7372,7 @@
           <a:bodyPr/>
           <a:lstStyle/>
           <a:p>
-            <a:endParaRPr/>
+            <a:endParaRPr sz="2000" dirty="0"/>
           </a:p>
         </p:txBody>
       </p:sp>
@@ -7461,7 +7404,7 @@
           <a:bodyPr/>
           <a:lstStyle/>
           <a:p>
-            <a:endParaRPr/>
+            <a:endParaRPr sz="2000" dirty="0"/>
           </a:p>
         </p:txBody>
       </p:sp>
@@ -7490,7 +7433,7 @@
               <a:buNone/>
             </a:pPr>
             <a:r>
-              <a:rPr lang="en-US" sz="1200" b="1" dirty="0">
+              <a:rPr lang="en-US" sz="1400" b="1" dirty="0">
                 <a:solidFill>
                   <a:srgbClr val="FFFFFF"/>
                 </a:solidFill>
@@ -7500,7 +7443,7 @@
               </a:rPr>
               <a:t>導入後</a:t>
             </a:r>
-            <a:endParaRPr lang="en-US" sz="1200" dirty="0"/>
+            <a:endParaRPr lang="en-US" sz="1400" dirty="0"/>
           </a:p>
         </p:txBody>
       </p:sp>
@@ -7529,7 +7472,7 @@
               <a:buNone/>
             </a:pPr>
             <a:r>
-              <a:rPr lang="en-US" sz="1100" b="1" dirty="0">
+              <a:rPr lang="en-US" sz="1200" b="1" dirty="0">
                 <a:solidFill>
                   <a:srgbClr val="0F4C5C"/>
                 </a:solidFill>
@@ -7539,7 +7482,7 @@
               </a:rPr>
               <a:t>製袋室</a:t>
             </a:r>
-            <a:endParaRPr lang="en-US" sz="1100" dirty="0"/>
+            <a:endParaRPr lang="en-US" sz="1200" dirty="0"/>
           </a:p>
         </p:txBody>
       </p:sp>
@@ -7568,7 +7511,7 @@
               <a:buNone/>
             </a:pPr>
             <a:r>
-              <a:rPr lang="en-US" sz="800" dirty="0">
+              <a:rPr lang="en-US" sz="900" dirty="0">
                 <a:solidFill>
                   <a:srgbClr val="5B6770"/>
                 </a:solidFill>
@@ -7576,20 +7519,9 @@
                 <a:ea typeface="BIZ UDPGothic" pitchFamily="34" charset="-122"/>
                 <a:cs typeface="BIZ UDPGothic" pitchFamily="34" charset="-120"/>
               </a:rPr>
-              <a:t>◀ </a:t>
-            </a:r>
-            <a:r>
-              <a:rPr lang="en-US" sz="800" dirty="0" err="1">
-                <a:solidFill>
-                  <a:srgbClr val="5B6770"/>
-                </a:solidFill>
-                <a:latin typeface="BIZ UDPGothic" pitchFamily="34" charset="0"/>
-                <a:ea typeface="BIZ UDPGothic" pitchFamily="34" charset="-122"/>
-                <a:cs typeface="BIZ UDPGothic" pitchFamily="34" charset="-120"/>
-              </a:rPr>
-              <a:t>資材保管室から搬入</a:t>
-            </a:r>
-            <a:endParaRPr lang="en-US" sz="800" dirty="0"/>
+              <a:t>◀ 資材保管室から搬入</a:t>
+            </a:r>
+            <a:endParaRPr lang="en-US" sz="900" dirty="0"/>
           </a:p>
         </p:txBody>
       </p:sp>
@@ -7621,7 +7553,7 @@
           <a:bodyPr/>
           <a:lstStyle/>
           <a:p>
-            <a:endParaRPr/>
+            <a:endParaRPr sz="2000" dirty="0"/>
           </a:p>
         </p:txBody>
       </p:sp>
@@ -7650,7 +7582,7 @@
               <a:buNone/>
             </a:pPr>
             <a:r>
-              <a:rPr lang="en-US" sz="950" b="1" u="sng" dirty="0">
+              <a:rPr lang="en-US" sz="1000" b="1" u="sng" dirty="0">
                 <a:solidFill>
                   <a:srgbClr val="1F2A30"/>
                 </a:solidFill>
@@ -7660,14 +7592,14 @@
               </a:rPr>
               <a:t>a. 製袋機</a:t>
             </a:r>
-            <a:endParaRPr lang="en-US" sz="950" u="sng" dirty="0"/>
+            <a:endParaRPr lang="en-US" sz="1000" u="sng" dirty="0"/>
           </a:p>
           <a:p>
             <a:pPr marL="0" indent="0" algn="ctr">
               <a:buNone/>
             </a:pPr>
             <a:r>
-              <a:rPr lang="en-US" sz="950" b="1" dirty="0">
+              <a:rPr lang="en-US" sz="1000" b="1" dirty="0">
                 <a:solidFill>
                   <a:srgbClr val="1F2A30"/>
                 </a:solidFill>
@@ -7677,14 +7609,14 @@
               </a:rPr>
               <a:t>（既設SPM機）</a:t>
             </a:r>
-            <a:endParaRPr lang="en-US" sz="950" dirty="0"/>
+            <a:endParaRPr lang="en-US" sz="1000" dirty="0"/>
           </a:p>
           <a:p>
             <a:pPr marL="0" indent="0" algn="ctr">
               <a:buNone/>
             </a:pPr>
             <a:r>
-              <a:rPr lang="en-US" sz="950" b="1" dirty="0">
+              <a:rPr lang="en-US" sz="1000" b="1" dirty="0">
                 <a:solidFill>
                   <a:srgbClr val="1F2A30"/>
                 </a:solidFill>
@@ -7694,7 +7626,7 @@
               </a:rPr>
               <a:t>スパウト熱圧着</a:t>
             </a:r>
-            <a:endParaRPr lang="en-US" sz="950" dirty="0"/>
+            <a:endParaRPr lang="en-US" sz="1000" dirty="0"/>
           </a:p>
         </p:txBody>
       </p:sp>
@@ -7726,7 +7658,7 @@
           <a:bodyPr/>
           <a:lstStyle/>
           <a:p>
-            <a:endParaRPr/>
+            <a:endParaRPr sz="2000" dirty="0"/>
           </a:p>
         </p:txBody>
       </p:sp>
@@ -7755,7 +7687,7 @@
               <a:buNone/>
             </a:pPr>
             <a:r>
-              <a:rPr lang="en-US" sz="850" b="1" u="sng" dirty="0">
+              <a:rPr lang="en-US" sz="900" b="1" u="sng" dirty="0">
                 <a:solidFill>
                   <a:srgbClr val="0B5394"/>
                 </a:solidFill>
@@ -7765,7 +7697,7 @@
               </a:rPr>
               <a:t>b. マガジン</a:t>
             </a:r>
-            <a:endParaRPr lang="en-US" sz="850" u="sng" dirty="0"/>
+            <a:endParaRPr lang="en-US" sz="900" u="sng" dirty="0"/>
           </a:p>
         </p:txBody>
       </p:sp>
@@ -7797,7 +7729,7 @@
           <a:bodyPr/>
           <a:lstStyle/>
           <a:p>
-            <a:endParaRPr/>
+            <a:endParaRPr sz="2000" dirty="0"/>
           </a:p>
         </p:txBody>
       </p:sp>
@@ -7826,7 +7758,7 @@
               <a:buNone/>
             </a:pPr>
             <a:r>
-              <a:rPr lang="en-US" sz="850" b="1" u="sng" dirty="0">
+              <a:rPr lang="en-US" sz="900" b="1" u="sng" dirty="0">
                 <a:solidFill>
                   <a:srgbClr val="B5176B"/>
                 </a:solidFill>
@@ -7836,7 +7768,7 @@
               </a:rPr>
               <a:t>d. コンベア（搬送）</a:t>
             </a:r>
-            <a:endParaRPr lang="en-US" sz="850" u="sng" dirty="0"/>
+            <a:endParaRPr lang="en-US" sz="900" u="sng" dirty="0"/>
           </a:p>
         </p:txBody>
       </p:sp>
@@ -7868,7 +7800,7 @@
           <a:bodyPr/>
           <a:lstStyle/>
           <a:p>
-            <a:endParaRPr/>
+            <a:endParaRPr sz="2000" dirty="0"/>
           </a:p>
         </p:txBody>
       </p:sp>
@@ -7897,7 +7829,7 @@
               <a:buNone/>
             </a:pPr>
             <a:r>
-              <a:rPr lang="en-US" sz="850" b="1" u="sng" dirty="0">
+              <a:rPr lang="en-US" sz="900" b="1" u="sng" dirty="0">
                 <a:solidFill>
                   <a:srgbClr val="5E2A8C"/>
                 </a:solidFill>
@@ -7907,14 +7839,14 @@
               </a:rPr>
               <a:t>e. リーク</a:t>
             </a:r>
-            <a:endParaRPr lang="en-US" sz="850" u="sng" dirty="0"/>
+            <a:endParaRPr lang="en-US" sz="900" u="sng" dirty="0"/>
           </a:p>
           <a:p>
             <a:pPr marL="0" indent="0" algn="ctr">
               <a:buNone/>
             </a:pPr>
             <a:r>
-              <a:rPr lang="en-US" sz="850" b="1" u="sng" dirty="0">
+              <a:rPr lang="en-US" sz="900" b="1" u="sng" dirty="0">
                 <a:solidFill>
                   <a:srgbClr val="5E2A8C"/>
                 </a:solidFill>
@@ -7924,7 +7856,7 @@
               </a:rPr>
               <a:t>チェッカ</a:t>
             </a:r>
-            <a:endParaRPr lang="en-US" sz="850" u="sng" dirty="0"/>
+            <a:endParaRPr lang="en-US" sz="900" u="sng" dirty="0"/>
           </a:p>
         </p:txBody>
       </p:sp>
@@ -7956,7 +7888,7 @@
           <a:bodyPr/>
           <a:lstStyle/>
           <a:p>
-            <a:endParaRPr/>
+            <a:endParaRPr sz="2000" dirty="0"/>
           </a:p>
         </p:txBody>
       </p:sp>
@@ -7985,7 +7917,7 @@
               <a:buNone/>
             </a:pPr>
             <a:r>
-              <a:rPr lang="en-US" sz="850" b="1" dirty="0">
+              <a:rPr lang="en-US" sz="900" b="1" dirty="0">
                 <a:solidFill>
                   <a:srgbClr val="0F4C5C"/>
                 </a:solidFill>
@@ -7995,7 +7927,7 @@
               </a:rPr>
               <a:t>充填室へ</a:t>
             </a:r>
-            <a:endParaRPr lang="en-US" sz="850" dirty="0"/>
+            <a:endParaRPr lang="en-US" sz="900" dirty="0"/>
           </a:p>
         </p:txBody>
       </p:sp>
@@ -8027,7 +7959,7 @@
           <a:bodyPr/>
           <a:lstStyle/>
           <a:p>
-            <a:endParaRPr/>
+            <a:endParaRPr sz="2000" dirty="0"/>
           </a:p>
         </p:txBody>
       </p:sp>
@@ -8056,7 +7988,7 @@
               <a:buNone/>
             </a:pPr>
             <a:r>
-              <a:rPr lang="en-US" sz="850" b="1" u="sng" dirty="0">
+              <a:rPr lang="en-US" sz="900" b="1" u="sng" dirty="0">
                 <a:solidFill>
                   <a:srgbClr val="595959"/>
                 </a:solidFill>
@@ -8066,14 +7998,14 @@
               </a:rPr>
               <a:t>f. ホッパ</a:t>
             </a:r>
-            <a:endParaRPr lang="en-US" sz="850" u="sng" dirty="0"/>
+            <a:endParaRPr lang="en-US" sz="900" u="sng" dirty="0"/>
           </a:p>
           <a:p>
             <a:pPr marL="0" indent="0" algn="ctr">
               <a:buNone/>
             </a:pPr>
             <a:r>
-              <a:rPr lang="en-US" sz="850" b="1" u="sng" dirty="0">
+              <a:rPr lang="en-US" sz="900" b="1" u="sng" dirty="0">
                 <a:solidFill>
                   <a:srgbClr val="595959"/>
                 </a:solidFill>
@@ -8083,7 +8015,7 @@
               </a:rPr>
               <a:t>ローダ</a:t>
             </a:r>
-            <a:endParaRPr lang="en-US" sz="850" u="sng" dirty="0"/>
+            <a:endParaRPr lang="en-US" sz="900" u="sng" dirty="0"/>
           </a:p>
         </p:txBody>
       </p:sp>
@@ -8115,7 +8047,7 @@
           <a:bodyPr/>
           <a:lstStyle/>
           <a:p>
-            <a:endParaRPr/>
+            <a:endParaRPr sz="2000" dirty="0"/>
           </a:p>
         </p:txBody>
       </p:sp>
@@ -8144,7 +8076,7 @@
               <a:buNone/>
             </a:pPr>
             <a:r>
-              <a:rPr lang="en-US" sz="850" b="1" u="sng" dirty="0">
+              <a:rPr lang="en-US" sz="900" b="1" u="sng" dirty="0">
                 <a:solidFill>
                   <a:srgbClr val="B80000"/>
                 </a:solidFill>
@@ -8154,7 +8086,7 @@
               </a:rPr>
               <a:t>g. 自動供給装置（新設）</a:t>
             </a:r>
-            <a:endParaRPr lang="en-US" sz="850" u="sng" dirty="0"/>
+            <a:endParaRPr lang="en-US" sz="900" u="sng" dirty="0"/>
           </a:p>
         </p:txBody>
       </p:sp>
@@ -8186,7 +8118,7 @@
           <a:bodyPr/>
           <a:lstStyle/>
           <a:p>
-            <a:endParaRPr/>
+            <a:endParaRPr sz="2000" dirty="0"/>
           </a:p>
         </p:txBody>
       </p:sp>
@@ -8218,7 +8150,7 @@
           <a:bodyPr/>
           <a:lstStyle/>
           <a:p>
-            <a:endParaRPr/>
+            <a:endParaRPr sz="2000" dirty="0"/>
           </a:p>
         </p:txBody>
       </p:sp>
@@ -8250,7 +8182,7 @@
           <a:bodyPr/>
           <a:lstStyle/>
           <a:p>
-            <a:endParaRPr/>
+            <a:endParaRPr sz="2000" dirty="0"/>
           </a:p>
         </p:txBody>
       </p:sp>
@@ -8282,7 +8214,7 @@
           <a:bodyPr/>
           <a:lstStyle/>
           <a:p>
-            <a:endParaRPr/>
+            <a:endParaRPr sz="2000" dirty="0"/>
           </a:p>
         </p:txBody>
       </p:sp>
@@ -8314,7 +8246,7 @@
           <a:bodyPr/>
           <a:lstStyle/>
           <a:p>
-            <a:endParaRPr/>
+            <a:endParaRPr sz="2000" dirty="0"/>
           </a:p>
         </p:txBody>
       </p:sp>
@@ -8346,7 +8278,7 @@
           <a:bodyPr/>
           <a:lstStyle/>
           <a:p>
-            <a:endParaRPr/>
+            <a:endParaRPr sz="2000" dirty="0"/>
           </a:p>
         </p:txBody>
       </p:sp>
@@ -8378,7 +8310,7 @@
           <a:bodyPr/>
           <a:lstStyle/>
           <a:p>
-            <a:endParaRPr/>
+            <a:endParaRPr sz="2000" dirty="0"/>
           </a:p>
         </p:txBody>
       </p:sp>
@@ -8410,7 +8342,7 @@
           <a:bodyPr/>
           <a:lstStyle/>
           <a:p>
-            <a:endParaRPr/>
+            <a:endParaRPr sz="2000" dirty="0"/>
           </a:p>
         </p:txBody>
       </p:sp>
@@ -8442,7 +8374,7 @@
           <a:bodyPr/>
           <a:lstStyle/>
           <a:p>
-            <a:endParaRPr/>
+            <a:endParaRPr sz="2000" dirty="0"/>
           </a:p>
         </p:txBody>
       </p:sp>
@@ -8474,7 +8406,7 @@
           <a:bodyPr/>
           <a:lstStyle/>
           <a:p>
-            <a:endParaRPr/>
+            <a:endParaRPr sz="2000" dirty="0"/>
           </a:p>
         </p:txBody>
       </p:sp>
@@ -8506,7 +8438,7 @@
           <a:bodyPr/>
           <a:lstStyle/>
           <a:p>
-            <a:endParaRPr/>
+            <a:endParaRPr sz="2000" dirty="0"/>
           </a:p>
         </p:txBody>
       </p:sp>
@@ -8538,7 +8470,7 @@
           <a:bodyPr/>
           <a:lstStyle/>
           <a:p>
-            <a:endParaRPr/>
+            <a:endParaRPr sz="2000" dirty="0"/>
           </a:p>
         </p:txBody>
       </p:sp>
@@ -8570,7 +8502,7 @@
           <a:bodyPr/>
           <a:lstStyle/>
           <a:p>
-            <a:endParaRPr/>
+            <a:endParaRPr sz="2000" dirty="0"/>
           </a:p>
         </p:txBody>
       </p:sp>
@@ -8602,7 +8534,7 @@
           <a:bodyPr/>
           <a:lstStyle/>
           <a:p>
-            <a:endParaRPr/>
+            <a:endParaRPr sz="2000" dirty="0"/>
           </a:p>
         </p:txBody>
       </p:sp>
@@ -8634,7 +8566,7 @@
           <a:bodyPr/>
           <a:lstStyle/>
           <a:p>
-            <a:endParaRPr/>
+            <a:endParaRPr sz="2000" dirty="0"/>
           </a:p>
         </p:txBody>
       </p:sp>
@@ -8666,7 +8598,7 @@
           <a:bodyPr/>
           <a:lstStyle/>
           <a:p>
-            <a:endParaRPr/>
+            <a:endParaRPr sz="2000" dirty="0"/>
           </a:p>
         </p:txBody>
       </p:sp>
@@ -8698,7 +8630,7 @@
           <a:bodyPr/>
           <a:lstStyle/>
           <a:p>
-            <a:endParaRPr/>
+            <a:endParaRPr sz="2000" dirty="0"/>
           </a:p>
         </p:txBody>
       </p:sp>
@@ -8730,7 +8662,7 @@
           <a:bodyPr/>
           <a:lstStyle/>
           <a:p>
-            <a:endParaRPr/>
+            <a:endParaRPr sz="2000" dirty="0"/>
           </a:p>
         </p:txBody>
       </p:sp>
@@ -8762,7 +8694,7 @@
           <a:bodyPr/>
           <a:lstStyle/>
           <a:p>
-            <a:endParaRPr/>
+            <a:endParaRPr sz="2000" dirty="0"/>
           </a:p>
         </p:txBody>
       </p:sp>
@@ -8794,7 +8726,7 @@
           <a:bodyPr/>
           <a:lstStyle/>
           <a:p>
-            <a:endParaRPr/>
+            <a:endParaRPr sz="2000" dirty="0"/>
           </a:p>
         </p:txBody>
       </p:sp>
@@ -8806,8 +8738,8 @@
         </p:nvSpPr>
         <p:spPr>
           <a:xfrm>
-            <a:off x="6629400" y="2212848"/>
-            <a:ext cx="1207008" cy="292608"/>
+            <a:off x="6622550" y="2212848"/>
+            <a:ext cx="1225296" cy="292608"/>
           </a:xfrm>
           <a:prstGeom prst="rect">
             <a:avLst/>
@@ -8823,7 +8755,7 @@
               <a:buNone/>
             </a:pPr>
             <a:r>
-              <a:rPr lang="en-US" sz="750" dirty="0">
+              <a:rPr lang="en-US" sz="800" dirty="0">
                 <a:solidFill>
                   <a:srgbClr val="B80000"/>
                 </a:solidFill>
@@ -8833,14 +8765,14 @@
               </a:rPr>
               <a:t>h. 専用パレット 5段×4列</a:t>
             </a:r>
-            <a:endParaRPr lang="en-US" sz="750" dirty="0"/>
+            <a:endParaRPr lang="en-US" sz="800" dirty="0"/>
           </a:p>
           <a:p>
             <a:pPr marL="0" indent="0" algn="ctr">
               <a:buNone/>
             </a:pPr>
             <a:r>
-              <a:rPr lang="en-US" sz="750" dirty="0">
+              <a:rPr lang="en-US" sz="800" dirty="0">
                 <a:solidFill>
                   <a:srgbClr val="B80000"/>
                 </a:solidFill>
@@ -8850,7 +8782,7 @@
               </a:rPr>
               <a:t>（24,000袋≒約2時間分）</a:t>
             </a:r>
-            <a:endParaRPr lang="en-US" sz="750" dirty="0"/>
+            <a:endParaRPr lang="en-US" sz="800" dirty="0"/>
           </a:p>
         </p:txBody>
       </p:sp>
@@ -8882,7 +8814,7 @@
           <a:bodyPr/>
           <a:lstStyle/>
           <a:p>
-            <a:endParaRPr/>
+            <a:endParaRPr sz="2000" dirty="0"/>
           </a:p>
         </p:txBody>
       </p:sp>
@@ -8911,7 +8843,7 @@
               <a:buNone/>
             </a:pPr>
             <a:r>
-              <a:rPr sz="750" b="0">
+              <a:rPr sz="800" b="0" dirty="0">
                 <a:solidFill>
                   <a:srgbClr val="1F2A30"/>
                 </a:solidFill>
@@ -8921,14 +8853,14 @@
               </a:rPr>
               <a:t>ロボットアームが</a:t>
             </a:r>
-            <a:endParaRPr lang="en-US" sz="750" dirty="0"/>
+            <a:endParaRPr lang="en-US" sz="800" dirty="0"/>
           </a:p>
           <a:p>
             <a:pPr marL="0" indent="0">
               <a:buNone/>
             </a:pPr>
             <a:r>
-              <a:rPr sz="750" b="0">
+              <a:rPr sz="800" b="0" dirty="0">
                 <a:solidFill>
                   <a:srgbClr val="1F2A30"/>
                 </a:solidFill>
@@ -8968,7 +8900,7 @@
           <a:bodyPr/>
           <a:lstStyle/>
           <a:p>
-            <a:endParaRPr/>
+            <a:endParaRPr sz="2000" dirty="0"/>
           </a:p>
         </p:txBody>
       </p:sp>
@@ -8981,7 +8913,7 @@
         <p:spPr>
           <a:xfrm>
             <a:off x="8074152" y="2011680"/>
-            <a:ext cx="713232" cy="960120"/>
+            <a:ext cx="713232" cy="996696"/>
           </a:xfrm>
           <a:prstGeom prst="rect">
             <a:avLst/>
@@ -9000,7 +8932,7 @@
           <a:bodyPr/>
           <a:lstStyle/>
           <a:p>
-            <a:endParaRPr/>
+            <a:endParaRPr sz="2000" dirty="0"/>
           </a:p>
         </p:txBody>
       </p:sp>
@@ -9029,7 +8961,7 @@
               <a:buNone/>
             </a:pPr>
             <a:r>
-              <a:rPr lang="en-US" sz="750" b="1" u="sng" dirty="0">
+              <a:rPr lang="en-US" sz="800" b="1" u="sng" dirty="0">
                 <a:solidFill>
                   <a:srgbClr val="B84A0A"/>
                 </a:solidFill>
@@ -9039,7 +8971,7 @@
               </a:rPr>
               <a:t>i. 仮置き台車</a:t>
             </a:r>
-            <a:endParaRPr lang="en-US" sz="750" u="sng" dirty="0"/>
+            <a:endParaRPr lang="en-US" sz="800" u="sng" dirty="0"/>
           </a:p>
         </p:txBody>
       </p:sp>
@@ -9071,7 +9003,7 @@
           <a:bodyPr/>
           <a:lstStyle/>
           <a:p>
-            <a:endParaRPr/>
+            <a:endParaRPr sz="2000" dirty="0"/>
           </a:p>
         </p:txBody>
       </p:sp>
@@ -9105,7 +9037,7 @@
           <a:bodyPr/>
           <a:lstStyle/>
           <a:p>
-            <a:endParaRPr/>
+            <a:endParaRPr sz="2000" dirty="0"/>
           </a:p>
         </p:txBody>
       </p:sp>
@@ -9134,7 +9066,7 @@
               <a:buNone/>
             </a:pPr>
             <a:r>
-              <a:rPr sz="750" b="1">
+              <a:rPr sz="800" b="1" dirty="0">
                 <a:solidFill>
                   <a:srgbClr val="B84A0A"/>
                 </a:solidFill>
@@ -9144,14 +9076,14 @@
               </a:rPr>
               <a:t>② パレット詰め</a:t>
             </a:r>
-            <a:endParaRPr lang="en-US" sz="650" dirty="0"/>
+            <a:endParaRPr lang="en-US" sz="800" dirty="0"/>
           </a:p>
           <a:p>
             <a:pPr marL="0" indent="0" algn="ctr">
               <a:buNone/>
             </a:pPr>
             <a:r>
-              <a:rPr sz="750" b="0">
+              <a:rPr sz="800" b="0" dirty="0">
                 <a:solidFill>
                   <a:srgbClr val="1F2A30"/>
                 </a:solidFill>
@@ -9167,7 +9099,7 @@
               <a:buNone/>
             </a:pPr>
             <a:r>
-              <a:rPr sz="750" b="0">
+              <a:rPr sz="800" b="0" dirty="0">
                 <a:solidFill>
                   <a:srgbClr val="1F2A30"/>
                 </a:solidFill>
@@ -9207,7 +9139,7 @@
           <a:bodyPr/>
           <a:lstStyle/>
           <a:p>
-            <a:endParaRPr/>
+            <a:endParaRPr sz="2000" dirty="0"/>
           </a:p>
         </p:txBody>
       </p:sp>
@@ -9219,7 +9151,7 @@
         </p:nvSpPr>
         <p:spPr>
           <a:xfrm>
-            <a:off x="7872984" y="2286000"/>
+            <a:off x="7872984" y="2251750"/>
             <a:ext cx="201168" cy="164592"/>
           </a:xfrm>
           <a:prstGeom prst="rect">
@@ -9236,7 +9168,7 @@
               <a:buNone/>
             </a:pPr>
             <a:r>
-              <a:rPr lang="en-US" sz="750" b="1" dirty="0">
+              <a:rPr lang="en-US" sz="800" b="1" dirty="0">
                 <a:solidFill>
                   <a:srgbClr val="B84A0A"/>
                 </a:solidFill>
@@ -9246,7 +9178,7 @@
               </a:rPr>
               <a:t>装填</a:t>
             </a:r>
-            <a:endParaRPr lang="en-US" sz="650" dirty="0"/>
+            <a:endParaRPr lang="en-US" sz="800" dirty="0"/>
           </a:p>
         </p:txBody>
       </p:sp>
@@ -9278,7 +9210,7 @@
           <a:bodyPr/>
           <a:lstStyle/>
           <a:p>
-            <a:endParaRPr/>
+            <a:endParaRPr sz="2000" dirty="0"/>
           </a:p>
         </p:txBody>
       </p:sp>
@@ -9312,7 +9244,7 @@
           <a:bodyPr/>
           <a:lstStyle/>
           <a:p>
-            <a:endParaRPr/>
+            <a:endParaRPr sz="2000" dirty="0"/>
           </a:p>
         </p:txBody>
       </p:sp>
@@ -9341,7 +9273,7 @@
               <a:buNone/>
             </a:pPr>
             <a:r>
-              <a:rPr sz="850" b="1">
+              <a:rPr sz="900" b="1" dirty="0">
                 <a:solidFill>
                   <a:srgbClr val="1F2A30"/>
                 </a:solidFill>
@@ -9351,14 +9283,14 @@
               </a:rPr>
               <a:t>オペレーター1名 ⑤</a:t>
             </a:r>
-            <a:endParaRPr lang="en-US" sz="850" dirty="0"/>
+            <a:endParaRPr lang="en-US" sz="900" dirty="0"/>
           </a:p>
           <a:p>
             <a:pPr marL="0" indent="0">
               <a:buNone/>
             </a:pPr>
             <a:r>
-              <a:rPr sz="850" b="1">
+              <a:rPr sz="900" b="1" dirty="0">
                 <a:solidFill>
                   <a:srgbClr val="1F2A30"/>
                 </a:solidFill>
@@ -9399,7 +9331,7 @@
           <a:bodyPr/>
           <a:lstStyle/>
           <a:p>
-            <a:endParaRPr/>
+            <a:endParaRPr sz="2000" dirty="0"/>
           </a:p>
         </p:txBody>
       </p:sp>
@@ -9428,7 +9360,7 @@
               <a:buNone/>
             </a:pPr>
             <a:r>
-              <a:rPr lang="en-US" sz="850" dirty="0">
+              <a:rPr lang="en-US" sz="900" dirty="0">
                 <a:solidFill>
                   <a:srgbClr val="1F2A30"/>
                 </a:solidFill>
@@ -9438,7 +9370,7 @@
               </a:rPr>
               <a:t>新設（g・h）</a:t>
             </a:r>
-            <a:endParaRPr lang="en-US" sz="850" dirty="0"/>
+            <a:endParaRPr lang="en-US" sz="900" dirty="0"/>
           </a:p>
         </p:txBody>
       </p:sp>
@@ -9470,7 +9402,7 @@
           <a:bodyPr/>
           <a:lstStyle/>
           <a:p>
-            <a:endParaRPr/>
+            <a:endParaRPr sz="2000" dirty="0"/>
           </a:p>
         </p:txBody>
       </p:sp>
@@ -9499,7 +9431,7 @@
               <a:buNone/>
             </a:pPr>
             <a:r>
-              <a:rPr lang="en-US" sz="850" dirty="0">
+              <a:rPr lang="en-US" sz="900" dirty="0">
                 <a:solidFill>
                   <a:srgbClr val="1F2A30"/>
                 </a:solidFill>
@@ -9509,7 +9441,7 @@
               </a:rPr>
               <a:t>新設（i）</a:t>
             </a:r>
-            <a:endParaRPr lang="en-US" sz="850" dirty="0"/>
+            <a:endParaRPr lang="en-US" sz="900" dirty="0"/>
           </a:p>
         </p:txBody>
       </p:sp>
@@ -9541,7 +9473,7 @@
           <a:bodyPr/>
           <a:lstStyle/>
           <a:p>
-            <a:endParaRPr/>
+            <a:endParaRPr sz="2000" dirty="0"/>
           </a:p>
         </p:txBody>
       </p:sp>
@@ -9570,7 +9502,7 @@
               <a:buNone/>
             </a:pPr>
             <a:r>
-              <a:rPr lang="en-US" sz="850" dirty="0" err="1">
+              <a:rPr lang="en-US" sz="900" dirty="0">
                 <a:solidFill>
                   <a:srgbClr val="1F2A30"/>
                 </a:solidFill>
@@ -9578,20 +9510,9 @@
                 <a:ea typeface="BIZ UDPGothic" pitchFamily="34" charset="-122"/>
                 <a:cs typeface="BIZ UDPGothic" pitchFamily="34" charset="-120"/>
               </a:rPr>
-              <a:t>既存の設備（a〜f</a:t>
-            </a:r>
-            <a:r>
-              <a:rPr lang="en-US" sz="850" dirty="0">
-                <a:solidFill>
-                  <a:srgbClr val="1F2A30"/>
-                </a:solidFill>
-                <a:latin typeface="BIZ UDPGothic" pitchFamily="34" charset="0"/>
-                <a:ea typeface="BIZ UDPGothic" pitchFamily="34" charset="-122"/>
-                <a:cs typeface="BIZ UDPGothic" pitchFamily="34" charset="-120"/>
-              </a:rPr>
-              <a:t>）</a:t>
-            </a:r>
-            <a:endParaRPr lang="en-US" sz="850" dirty="0"/>
+              <a:t>既存の設備（a〜f）</a:t>
+            </a:r>
+            <a:endParaRPr lang="en-US" sz="900" dirty="0"/>
           </a:p>
         </p:txBody>
       </p:sp>
@@ -9623,7 +9544,7 @@
           <a:bodyPr/>
           <a:lstStyle/>
           <a:p>
-            <a:endParaRPr/>
+            <a:endParaRPr sz="2000" dirty="0"/>
           </a:p>
         </p:txBody>
       </p:sp>
@@ -9657,7 +9578,7 @@
           <a:bodyPr/>
           <a:lstStyle/>
           <a:p>
-            <a:endParaRPr/>
+            <a:endParaRPr sz="2000" dirty="0"/>
           </a:p>
         </p:txBody>
       </p:sp>
@@ -9686,7 +9607,7 @@
               <a:buNone/>
             </a:pPr>
             <a:r>
-              <a:rPr lang="en-US" sz="850" dirty="0">
+              <a:rPr lang="en-US" sz="900" dirty="0">
                 <a:solidFill>
                   <a:srgbClr val="1F2A30"/>
                 </a:solidFill>
@@ -9696,7 +9617,7 @@
               </a:rPr>
               <a:t>オペレーター・投入担当</a:t>
             </a:r>
-            <a:endParaRPr lang="en-US" sz="850" dirty="0"/>
+            <a:endParaRPr lang="en-US" sz="900" dirty="0"/>
           </a:p>
         </p:txBody>
       </p:sp>
@@ -9728,7 +9649,7 @@
           <a:bodyPr/>
           <a:lstStyle/>
           <a:p>
-            <a:endParaRPr/>
+            <a:endParaRPr sz="2000" dirty="0"/>
           </a:p>
         </p:txBody>
       </p:sp>
@@ -9762,7 +9683,7 @@
           <a:bodyPr/>
           <a:lstStyle/>
           <a:p>
-            <a:endParaRPr/>
+            <a:endParaRPr sz="2000" dirty="0"/>
           </a:p>
         </p:txBody>
       </p:sp>
@@ -9791,7 +9712,7 @@
               <a:buNone/>
             </a:pPr>
             <a:r>
-              <a:rPr lang="en-US" sz="850" dirty="0">
+              <a:rPr lang="en-US" sz="900" dirty="0">
                 <a:solidFill>
                   <a:srgbClr val="1F2A30"/>
                 </a:solidFill>
@@ -9801,7 +9722,7 @@
               </a:rPr>
               <a:t>詰め担当（導入後）</a:t>
             </a:r>
-            <a:endParaRPr lang="en-US" sz="850" dirty="0"/>
+            <a:endParaRPr lang="en-US" sz="900" dirty="0"/>
           </a:p>
         </p:txBody>
       </p:sp>
@@ -9813,7 +9734,7 @@
         </p:nvSpPr>
         <p:spPr>
           <a:xfrm>
-            <a:off x="320040" y="4425696"/>
+            <a:off x="320040" y="4384598"/>
             <a:ext cx="8503920" cy="365760"/>
           </a:xfrm>
           <a:prstGeom prst="rect">
@@ -9830,7 +9751,7 @@
               <a:buNone/>
             </a:pPr>
             <a:r>
-              <a:rPr sz="950" b="1">
+              <a:rPr sz="1000" b="1" dirty="0">
                 <a:solidFill>
                   <a:srgbClr val="B84A0A"/>
                 </a:solidFill>
@@ -9841,7 +9762,7 @@
               <a:t>変わる点：</a:t>
             </a:r>
             <a:r>
-              <a:rPr sz="950" b="0">
+              <a:rPr sz="1000" b="0" dirty="0">
                 <a:solidFill>
                   <a:srgbClr val="1F2A30"/>
                 </a:solidFill>
@@ -9851,7 +9772,7 @@
               </a:rPr>
               <a:t>踏み台での手投入（3分詰めて5分で空、の繰り返し）がなくなり、マガジン脇に自動供給装置を設置。人は専用パレットへ詰めるだけになり、投入担当を常時置く必要がなくなる。製袋機より後ろの工程は変更なし。</a:t>
             </a:r>
-            <a:endParaRPr lang="en-US" sz="950" dirty="0"/>
+            <a:endParaRPr lang="en-US" sz="1000" dirty="0"/>
           </a:p>
         </p:txBody>
       </p:sp>
@@ -9914,7 +9835,10 @@
         </p:spPr>
         <p:txBody>
           <a:bodyPr/>
-          <a:p/>
+          <a:lstStyle/>
+          <a:p>
+            <a:endParaRPr dirty="0"/>
+          </a:p>
         </p:txBody>
       </p:sp>
       <p:sp>
@@ -9943,7 +9867,10 @@
         </p:spPr>
         <p:txBody>
           <a:bodyPr/>
-          <a:p/>
+          <a:lstStyle/>
+          <a:p>
+            <a:endParaRPr dirty="0"/>
+          </a:p>
         </p:txBody>
       </p:sp>
       <p:sp>
@@ -9971,7 +9898,7 @@
               <a:buNone/>
             </a:pPr>
             <a:r>
-              <a:rPr sz="2200" b="1">
+              <a:rPr sz="2200" b="1" dirty="0">
                 <a:solidFill>
                   <a:srgbClr val="FFFFFF"/>
                 </a:solidFill>
@@ -10010,7 +9937,7 @@
               <a:buNone/>
             </a:pPr>
             <a:r>
-              <a:rPr sz="1100" b="0">
+              <a:rPr sz="1100" b="0" dirty="0">
                 <a:solidFill>
                   <a:srgbClr val="5B6770"/>
                 </a:solidFill>
@@ -10088,7 +10015,7 @@
               <a:buNone/>
             </a:pPr>
             <a:r>
-              <a:rPr sz="900" b="0">
+              <a:rPr sz="900" b="0" dirty="0">
                 <a:solidFill>
                   <a:srgbClr val="8A9BA8"/>
                 </a:solidFill>
@@ -10778,7 +10705,7 @@
                         <a:buNone/>
                       </a:pPr>
                       <a:r>
-                        <a:rPr sz="950" b="1">
+                        <a:rPr sz="950" b="1" dirty="0" err="1">
                           <a:solidFill>
                             <a:srgbClr val="B84A0A"/>
                           </a:solidFill>
@@ -10796,7 +10723,7 @@
                     </a:p>
                     <a:p>
                       <a:r>
-                        <a:rPr sz="950" b="1">
+                        <a:rPr sz="950" b="1" dirty="0" err="1">
                           <a:solidFill>
                             <a:srgbClr val="B84A0A"/>
                           </a:solidFill>
@@ -10806,6 +10733,14 @@
                         </a:rPr>
                         <a:t>部品改造・設計変更</a:t>
                       </a:r>
+                      <a:endParaRPr sz="950" b="1" dirty="0">
+                        <a:solidFill>
+                          <a:srgbClr val="B84A0A"/>
+                        </a:solidFill>
+                        <a:latin typeface="BIZ UDPGothic"/>
+                        <a:ea typeface="BIZ UDPGothic"/>
+                        <a:cs typeface="BIZ UDPGothic"/>
+                      </a:endParaRPr>
                     </a:p>
                   </a:txBody>
                   <a:tcPr marL="36576" marR="36576" marT="36576" marB="36576" anchor="ctr">
@@ -14319,7 +14254,7 @@
           <a:lstStyle/>
           <a:p>
             <a:pPr algn="ctr"/>
-            <a:endParaRPr/>
+            <a:endParaRPr dirty="0"/>
           </a:p>
         </p:txBody>
       </p:sp>
@@ -14351,7 +14286,7 @@
           <a:lstStyle/>
           <a:p>
             <a:pPr algn="ctr"/>
-            <a:endParaRPr/>
+            <a:endParaRPr dirty="0"/>
           </a:p>
         </p:txBody>
       </p:sp>
@@ -14379,7 +14314,7 @@
           <a:p>
             <a:pPr algn="l"/>
             <a:r>
-              <a:rPr sz="2200" b="1">
+              <a:rPr sz="2200" b="1" dirty="0">
                 <a:solidFill>
                   <a:srgbClr val="FFFFFF"/>
                 </a:solidFill>
@@ -14416,7 +14351,7 @@
           <a:p>
             <a:pPr algn="l"/>
             <a:r>
-              <a:rPr sz="1000" b="0">
+              <a:rPr sz="1000" b="0" dirty="0">
                 <a:solidFill>
                   <a:srgbClr val="5B6770"/>
                 </a:solidFill>
@@ -14453,7 +14388,7 @@
           <a:p>
             <a:pPr algn="l"/>
             <a:r>
-              <a:rPr sz="900" b="0">
+              <a:rPr sz="900" b="0" dirty="0">
                 <a:solidFill>
                   <a:srgbClr val="8A9BA8"/>
                 </a:solidFill>
@@ -14490,7 +14425,7 @@
           <a:p>
             <a:pPr algn="r"/>
             <a:r>
-              <a:rPr sz="900" b="0">
+              <a:rPr sz="900" b="0" dirty="0">
                 <a:solidFill>
                   <a:srgbClr val="8A9BA8"/>
                 </a:solidFill>
@@ -14527,7 +14462,7 @@
           <a:p>
             <a:pPr algn="l"/>
             <a:r>
-              <a:rPr sz="750" b="0">
+              <a:rPr sz="900" b="0" dirty="0">
                 <a:solidFill>
                   <a:srgbClr val="8A9BA8"/>
                 </a:solidFill>
@@ -14568,7 +14503,7 @@
           <a:lstStyle/>
           <a:p>
             <a:pPr algn="ctr"/>
-            <a:endParaRPr/>
+            <a:endParaRPr sz="2400" dirty="0"/>
           </a:p>
         </p:txBody>
       </p:sp>
@@ -14596,7 +14531,7 @@
           <a:p>
             <a:pPr algn="l"/>
             <a:r>
-              <a:rPr sz="750" b="0">
+              <a:rPr sz="900" b="0" dirty="0">
                 <a:solidFill>
                   <a:srgbClr val="8A9BA8"/>
                 </a:solidFill>
@@ -14637,7 +14572,7 @@
           <a:lstStyle/>
           <a:p>
             <a:pPr algn="ctr"/>
-            <a:endParaRPr/>
+            <a:endParaRPr sz="2400" dirty="0"/>
           </a:p>
         </p:txBody>
       </p:sp>
@@ -14665,7 +14600,7 @@
           <a:p>
             <a:pPr algn="l"/>
             <a:r>
-              <a:rPr sz="750" b="0">
+              <a:rPr sz="900" b="0" dirty="0">
                 <a:solidFill>
                   <a:srgbClr val="8A9BA8"/>
                 </a:solidFill>
@@ -14706,7 +14641,7 @@
           <a:lstStyle/>
           <a:p>
             <a:pPr algn="ctr"/>
-            <a:endParaRPr/>
+            <a:endParaRPr sz="2400" dirty="0"/>
           </a:p>
         </p:txBody>
       </p:sp>
@@ -14734,7 +14669,7 @@
           <a:p>
             <a:pPr algn="l"/>
             <a:r>
-              <a:rPr sz="750" b="0">
+              <a:rPr sz="900" b="0" dirty="0">
                 <a:solidFill>
                   <a:srgbClr val="8A9BA8"/>
                 </a:solidFill>
@@ -14775,7 +14710,7 @@
           <a:lstStyle/>
           <a:p>
             <a:pPr algn="ctr"/>
-            <a:endParaRPr/>
+            <a:endParaRPr sz="2400" dirty="0"/>
           </a:p>
         </p:txBody>
       </p:sp>
@@ -14803,7 +14738,7 @@
           <a:p>
             <a:pPr algn="r"/>
             <a:r>
-              <a:rPr sz="750" b="0">
+              <a:rPr sz="900" b="0" dirty="0">
                 <a:solidFill>
                   <a:srgbClr val="8A9BA8"/>
                 </a:solidFill>
@@ -14844,7 +14779,7 @@
           <a:lstStyle/>
           <a:p>
             <a:pPr algn="ctr"/>
-            <a:endParaRPr/>
+            <a:endParaRPr sz="2400" dirty="0"/>
           </a:p>
         </p:txBody>
       </p:sp>
@@ -14872,7 +14807,7 @@
           <a:p>
             <a:pPr algn="l"/>
             <a:r>
-              <a:rPr sz="950" b="1">
+              <a:rPr sz="1050" b="1" dirty="0">
                 <a:solidFill>
                   <a:srgbClr val="5B6770"/>
                 </a:solidFill>
@@ -14909,7 +14844,7 @@
           <a:p>
             <a:pPr algn="r"/>
             <a:r>
-              <a:rPr sz="800" b="0">
+              <a:rPr sz="1000" b="0" dirty="0">
                 <a:solidFill>
                   <a:srgbClr val="5B6770"/>
                 </a:solidFill>
@@ -14950,7 +14885,7 @@
           <a:lstStyle/>
           <a:p>
             <a:pPr algn="ctr"/>
-            <a:endParaRPr/>
+            <a:endParaRPr sz="2400" dirty="0"/>
           </a:p>
         </p:txBody>
       </p:sp>
@@ -14980,7 +14915,7 @@
           <a:lstStyle/>
           <a:p>
             <a:pPr algn="ctr"/>
-            <a:endParaRPr/>
+            <a:endParaRPr sz="2400" dirty="0"/>
           </a:p>
         </p:txBody>
       </p:sp>
@@ -15010,7 +14945,7 @@
           <a:lstStyle/>
           <a:p>
             <a:pPr algn="ctr"/>
-            <a:endParaRPr/>
+            <a:endParaRPr sz="2400" dirty="0"/>
           </a:p>
         </p:txBody>
       </p:sp>
@@ -15040,7 +14975,7 @@
           <a:lstStyle/>
           <a:p>
             <a:pPr algn="ctr"/>
-            <a:endParaRPr/>
+            <a:endParaRPr sz="2400" dirty="0"/>
           </a:p>
         </p:txBody>
       </p:sp>
@@ -15070,7 +15005,7 @@
           <a:lstStyle/>
           <a:p>
             <a:pPr algn="ctr"/>
-            <a:endParaRPr/>
+            <a:endParaRPr sz="2400" dirty="0"/>
           </a:p>
         </p:txBody>
       </p:sp>
@@ -15100,7 +15035,7 @@
           <a:lstStyle/>
           <a:p>
             <a:pPr algn="ctr"/>
-            <a:endParaRPr/>
+            <a:endParaRPr sz="2400" dirty="0"/>
           </a:p>
         </p:txBody>
       </p:sp>
@@ -15130,7 +15065,7 @@
           <a:lstStyle/>
           <a:p>
             <a:pPr algn="ctr"/>
-            <a:endParaRPr/>
+            <a:endParaRPr sz="2400" dirty="0"/>
           </a:p>
         </p:txBody>
       </p:sp>
@@ -15160,7 +15095,7 @@
           <a:lstStyle/>
           <a:p>
             <a:pPr algn="ctr"/>
-            <a:endParaRPr/>
+            <a:endParaRPr sz="2400" dirty="0"/>
           </a:p>
         </p:txBody>
       </p:sp>
@@ -15190,7 +15125,7 @@
           <a:lstStyle/>
           <a:p>
             <a:pPr algn="ctr"/>
-            <a:endParaRPr/>
+            <a:endParaRPr sz="2400" dirty="0"/>
           </a:p>
         </p:txBody>
       </p:sp>
@@ -15220,7 +15155,7 @@
           <a:lstStyle/>
           <a:p>
             <a:pPr algn="ctr"/>
-            <a:endParaRPr/>
+            <a:endParaRPr sz="2400" dirty="0"/>
           </a:p>
         </p:txBody>
       </p:sp>
@@ -15250,7 +15185,7 @@
           <a:lstStyle/>
           <a:p>
             <a:pPr algn="ctr"/>
-            <a:endParaRPr/>
+            <a:endParaRPr sz="2400" dirty="0"/>
           </a:p>
         </p:txBody>
       </p:sp>
@@ -15280,7 +15215,7 @@
           <a:lstStyle/>
           <a:p>
             <a:pPr algn="ctr"/>
-            <a:endParaRPr/>
+            <a:endParaRPr sz="2400" dirty="0"/>
           </a:p>
         </p:txBody>
       </p:sp>
@@ -15310,7 +15245,7 @@
           <a:lstStyle/>
           <a:p>
             <a:pPr algn="ctr"/>
-            <a:endParaRPr/>
+            <a:endParaRPr sz="2400" dirty="0"/>
           </a:p>
         </p:txBody>
       </p:sp>
@@ -15340,7 +15275,7 @@
           <a:lstStyle/>
           <a:p>
             <a:pPr algn="ctr"/>
-            <a:endParaRPr/>
+            <a:endParaRPr sz="2400" dirty="0"/>
           </a:p>
         </p:txBody>
       </p:sp>
@@ -15370,7 +15305,7 @@
           <a:lstStyle/>
           <a:p>
             <a:pPr algn="ctr"/>
-            <a:endParaRPr/>
+            <a:endParaRPr sz="2400" dirty="0"/>
           </a:p>
         </p:txBody>
       </p:sp>
@@ -15400,7 +15335,7 @@
           <a:lstStyle/>
           <a:p>
             <a:pPr algn="ctr"/>
-            <a:endParaRPr/>
+            <a:endParaRPr sz="2400" dirty="0"/>
           </a:p>
         </p:txBody>
       </p:sp>
@@ -15430,7 +15365,7 @@
           <a:lstStyle/>
           <a:p>
             <a:pPr algn="ctr"/>
-            <a:endParaRPr/>
+            <a:endParaRPr sz="2400" dirty="0"/>
           </a:p>
         </p:txBody>
       </p:sp>
@@ -15460,7 +15395,7 @@
           <a:lstStyle/>
           <a:p>
             <a:pPr algn="ctr"/>
-            <a:endParaRPr/>
+            <a:endParaRPr sz="2400" dirty="0"/>
           </a:p>
         </p:txBody>
       </p:sp>
@@ -15490,7 +15425,7 @@
           <a:lstStyle/>
           <a:p>
             <a:pPr algn="ctr"/>
-            <a:endParaRPr/>
+            <a:endParaRPr sz="2400" dirty="0"/>
           </a:p>
         </p:txBody>
       </p:sp>
@@ -15520,7 +15455,7 @@
           <a:lstStyle/>
           <a:p>
             <a:pPr algn="ctr"/>
-            <a:endParaRPr/>
+            <a:endParaRPr sz="2400" dirty="0"/>
           </a:p>
         </p:txBody>
       </p:sp>
@@ -15550,7 +15485,7 @@
           <a:lstStyle/>
           <a:p>
             <a:pPr algn="ctr"/>
-            <a:endParaRPr/>
+            <a:endParaRPr sz="2400" dirty="0"/>
           </a:p>
         </p:txBody>
       </p:sp>
@@ -15580,7 +15515,7 @@
           <a:lstStyle/>
           <a:p>
             <a:pPr algn="ctr"/>
-            <a:endParaRPr/>
+            <a:endParaRPr sz="2400" dirty="0"/>
           </a:p>
         </p:txBody>
       </p:sp>
@@ -15610,7 +15545,7 @@
           <a:lstStyle/>
           <a:p>
             <a:pPr algn="ctr"/>
-            <a:endParaRPr/>
+            <a:endParaRPr sz="2400" dirty="0"/>
           </a:p>
         </p:txBody>
       </p:sp>
@@ -15640,7 +15575,7 @@
           <a:lstStyle/>
           <a:p>
             <a:pPr algn="ctr"/>
-            <a:endParaRPr/>
+            <a:endParaRPr sz="2400" dirty="0"/>
           </a:p>
         </p:txBody>
       </p:sp>
@@ -15670,7 +15605,7 @@
           <a:lstStyle/>
           <a:p>
             <a:pPr algn="ctr"/>
-            <a:endParaRPr/>
+            <a:endParaRPr sz="2400" dirty="0"/>
           </a:p>
         </p:txBody>
       </p:sp>
@@ -15700,7 +15635,7 @@
           <a:lstStyle/>
           <a:p>
             <a:pPr algn="ctr"/>
-            <a:endParaRPr/>
+            <a:endParaRPr sz="2400" dirty="0"/>
           </a:p>
         </p:txBody>
       </p:sp>
@@ -15730,7 +15665,7 @@
           <a:lstStyle/>
           <a:p>
             <a:pPr algn="ctr"/>
-            <a:endParaRPr/>
+            <a:endParaRPr sz="2400" dirty="0"/>
           </a:p>
         </p:txBody>
       </p:sp>
@@ -15760,7 +15695,7 @@
           <a:lstStyle/>
           <a:p>
             <a:pPr algn="ctr"/>
-            <a:endParaRPr/>
+            <a:endParaRPr sz="2400" dirty="0"/>
           </a:p>
         </p:txBody>
       </p:sp>
@@ -15790,7 +15725,7 @@
           <a:lstStyle/>
           <a:p>
             <a:pPr algn="ctr"/>
-            <a:endParaRPr/>
+            <a:endParaRPr sz="2400" dirty="0"/>
           </a:p>
         </p:txBody>
       </p:sp>
@@ -15820,7 +15755,7 @@
           <a:lstStyle/>
           <a:p>
             <a:pPr algn="ctr"/>
-            <a:endParaRPr/>
+            <a:endParaRPr sz="2400" dirty="0"/>
           </a:p>
         </p:txBody>
       </p:sp>
@@ -15850,7 +15785,7 @@
           <a:lstStyle/>
           <a:p>
             <a:pPr algn="ctr"/>
-            <a:endParaRPr/>
+            <a:endParaRPr sz="2400" dirty="0"/>
           </a:p>
         </p:txBody>
       </p:sp>
@@ -15878,7 +15813,7 @@
           <a:p>
             <a:pPr algn="l"/>
             <a:r>
-              <a:rPr sz="800" b="0">
+              <a:rPr sz="1000" b="0" dirty="0">
                 <a:solidFill>
                   <a:srgbClr val="5B6770"/>
                 </a:solidFill>
@@ -15915,7 +15850,7 @@
           <a:p>
             <a:pPr algn="l"/>
             <a:r>
-              <a:rPr sz="850" b="1">
+              <a:rPr sz="1000" b="1" u="sng" dirty="0">
                 <a:solidFill>
                   <a:srgbClr val="0F4C5C"/>
                 </a:solidFill>
@@ -15936,8 +15871,8 @@
         </p:nvSpPr>
         <p:spPr>
           <a:xfrm>
-            <a:off x="320040" y="2359152"/>
-            <a:ext cx="1508760" cy="420624"/>
+            <a:off x="320040" y="2359151"/>
+            <a:ext cx="1508760" cy="493773"/>
           </a:xfrm>
           <a:prstGeom prst="rect">
             <a:avLst/>
@@ -15954,7 +15889,7 @@
           <a:lstStyle/>
           <a:p>
             <a:pPr algn="ctr"/>
-            <a:endParaRPr/>
+            <a:endParaRPr sz="2400" dirty="0"/>
           </a:p>
         </p:txBody>
       </p:sp>
@@ -15966,8 +15901,8 @@
         </p:nvSpPr>
         <p:spPr>
           <a:xfrm>
-            <a:off x="1828800" y="2359152"/>
-            <a:ext cx="2514600" cy="420624"/>
+            <a:off x="1828800" y="2359151"/>
+            <a:ext cx="2514600" cy="493773"/>
           </a:xfrm>
           <a:prstGeom prst="rect">
             <a:avLst/>
@@ -15986,7 +15921,7 @@
           <a:lstStyle/>
           <a:p>
             <a:pPr algn="ctr"/>
-            <a:endParaRPr/>
+            <a:endParaRPr sz="2400" dirty="0"/>
           </a:p>
         </p:txBody>
       </p:sp>
@@ -15998,8 +15933,8 @@
         </p:nvSpPr>
         <p:spPr>
           <a:xfrm>
-            <a:off x="365759" y="2359152"/>
-            <a:ext cx="1417320" cy="420624"/>
+            <a:off x="365759" y="2359151"/>
+            <a:ext cx="1417320" cy="475487"/>
           </a:xfrm>
           <a:prstGeom prst="rect">
             <a:avLst/>
@@ -16014,7 +15949,7 @@
           <a:p>
             <a:pPr algn="ctr"/>
             <a:r>
-              <a:rPr sz="850" b="1">
+              <a:rPr sz="1000" b="1" dirty="0">
                 <a:solidFill>
                   <a:srgbClr val="FFFFFF"/>
                 </a:solidFill>
@@ -16028,7 +15963,7 @@
           <a:p>
             <a:pPr algn="ctr"/>
             <a:r>
-              <a:rPr sz="800" b="0">
+              <a:rPr sz="1000" b="0" dirty="0">
                 <a:solidFill>
                   <a:srgbClr val="FFFFFF"/>
                 </a:solidFill>
@@ -16036,7 +15971,29 @@
                 <a:ea typeface="BIZ UDPGothic"/>
                 <a:cs typeface="BIZ UDPGothic"/>
               </a:rPr>
-              <a:t>踏み台に上がり束を詰める</a:t>
+              <a:t>踏み台に上がり束を</a:t>
+            </a:r>
+            <a:endParaRPr lang="en-US" sz="1000" b="0" dirty="0">
+              <a:solidFill>
+                <a:srgbClr val="FFFFFF"/>
+              </a:solidFill>
+              <a:latin typeface="BIZ UDPGothic"/>
+              <a:ea typeface="BIZ UDPGothic"/>
+              <a:cs typeface="BIZ UDPGothic"/>
+            </a:endParaRPr>
+          </a:p>
+          <a:p>
+            <a:pPr algn="ctr"/>
+            <a:r>
+              <a:rPr sz="1000" b="0" dirty="0">
+                <a:solidFill>
+                  <a:srgbClr val="FFFFFF"/>
+                </a:solidFill>
+                <a:latin typeface="BIZ UDPGothic"/>
+                <a:ea typeface="BIZ UDPGothic"/>
+                <a:cs typeface="BIZ UDPGothic"/>
+              </a:rPr>
+              <a:t>詰める</a:t>
             </a:r>
           </a:p>
         </p:txBody>
@@ -16049,8 +16006,8 @@
         </p:nvSpPr>
         <p:spPr>
           <a:xfrm>
-            <a:off x="1874519" y="2359152"/>
-            <a:ext cx="2423160" cy="420624"/>
+            <a:off x="1874519" y="2359151"/>
+            <a:ext cx="2423160" cy="475487"/>
           </a:xfrm>
           <a:prstGeom prst="rect">
             <a:avLst/>
@@ -16065,7 +16022,7 @@
           <a:p>
             <a:pPr algn="ctr"/>
             <a:r>
-              <a:rPr sz="850" b="1">
+              <a:rPr sz="1000" b="1" dirty="0">
                 <a:solidFill>
                   <a:srgbClr val="1F2A30"/>
                 </a:solidFill>
@@ -16079,7 +16036,7 @@
           <a:p>
             <a:pPr algn="ctr"/>
             <a:r>
-              <a:rPr sz="800" b="0">
+              <a:rPr sz="1000" b="0" dirty="0">
                 <a:solidFill>
                   <a:srgbClr val="1F2A30"/>
                 </a:solidFill>
@@ -16087,7 +16044,29 @@
                 <a:ea typeface="BIZ UDPGothic"/>
                 <a:cs typeface="BIZ UDPGothic"/>
               </a:rPr>
-              <a:t>合間も次の束のほぐし・開梱で手が空かない</a:t>
+              <a:t>合間も次の束のほぐし・開梱で手が</a:t>
+            </a:r>
+            <a:endParaRPr lang="en-US" sz="1000" b="0" dirty="0">
+              <a:solidFill>
+                <a:srgbClr val="1F2A30"/>
+              </a:solidFill>
+              <a:latin typeface="BIZ UDPGothic"/>
+              <a:ea typeface="BIZ UDPGothic"/>
+              <a:cs typeface="BIZ UDPGothic"/>
+            </a:endParaRPr>
+          </a:p>
+          <a:p>
+            <a:pPr algn="ctr"/>
+            <a:r>
+              <a:rPr sz="1000" b="0" dirty="0">
+                <a:solidFill>
+                  <a:srgbClr val="1F2A30"/>
+                </a:solidFill>
+                <a:latin typeface="BIZ UDPGothic"/>
+                <a:ea typeface="BIZ UDPGothic"/>
+                <a:cs typeface="BIZ UDPGothic"/>
+              </a:rPr>
+              <a:t>空かない</a:t>
             </a:r>
           </a:p>
         </p:txBody>
@@ -16116,7 +16095,7 @@
           <a:p>
             <a:pPr algn="l"/>
             <a:r>
-              <a:rPr sz="850" b="1">
+              <a:rPr sz="1000" b="1" dirty="0">
                 <a:solidFill>
                   <a:srgbClr val="1F2A30"/>
                 </a:solidFill>
@@ -16130,7 +16109,7 @@
           <a:p>
             <a:pPr algn="l"/>
             <a:r>
-              <a:rPr sz="850" b="0">
+              <a:rPr sz="1000" b="0" dirty="0">
                 <a:solidFill>
                   <a:srgbClr val="1F2A30"/>
                 </a:solidFill>
@@ -16167,7 +16146,7 @@
           <a:p>
             <a:pPr algn="l"/>
             <a:r>
-              <a:rPr sz="950" b="1">
+              <a:rPr sz="1050" b="1" dirty="0">
                 <a:solidFill>
                   <a:srgbClr val="B84A0A"/>
                 </a:solidFill>
@@ -16204,7 +16183,7 @@
           <a:p>
             <a:pPr algn="r"/>
             <a:r>
-              <a:rPr sz="800" b="0">
+              <a:rPr sz="1000" b="0" dirty="0">
                 <a:solidFill>
                   <a:srgbClr val="5B6770"/>
                 </a:solidFill>
@@ -16245,7 +16224,7 @@
           <a:lstStyle/>
           <a:p>
             <a:pPr algn="ctr"/>
-            <a:endParaRPr/>
+            <a:endParaRPr sz="2400" dirty="0"/>
           </a:p>
         </p:txBody>
       </p:sp>
@@ -16275,7 +16254,7 @@
           <a:lstStyle/>
           <a:p>
             <a:pPr algn="ctr"/>
-            <a:endParaRPr/>
+            <a:endParaRPr sz="2400" dirty="0"/>
           </a:p>
         </p:txBody>
       </p:sp>
@@ -16305,7 +16284,7 @@
           <a:lstStyle/>
           <a:p>
             <a:pPr algn="ctr"/>
-            <a:endParaRPr/>
+            <a:endParaRPr sz="2400" dirty="0"/>
           </a:p>
         </p:txBody>
       </p:sp>
@@ -16333,7 +16312,7 @@
           <a:p>
             <a:pPr algn="ctr"/>
             <a:r>
-              <a:rPr sz="900" b="1">
+              <a:rPr sz="1050" b="1" dirty="0">
                 <a:solidFill>
                   <a:srgbClr val="0F4C5C"/>
                 </a:solidFill>
@@ -16347,7 +16326,7 @@
           <a:p>
             <a:pPr algn="ctr"/>
             <a:r>
-              <a:rPr sz="800" b="0">
+              <a:rPr sz="1000" b="0" dirty="0">
                 <a:solidFill>
                   <a:srgbClr val="5B6770"/>
                 </a:solidFill>
@@ -16384,7 +16363,7 @@
           <a:p>
             <a:pPr algn="ctr"/>
             <a:r>
-              <a:rPr sz="900" b="1">
+              <a:rPr sz="1050" b="1" dirty="0">
                 <a:solidFill>
                   <a:srgbClr val="0F4C5C"/>
                 </a:solidFill>
@@ -16398,7 +16377,7 @@
           <a:p>
             <a:pPr algn="ctr"/>
             <a:r>
-              <a:rPr sz="800" b="0">
+              <a:rPr sz="1000" b="0" dirty="0">
                 <a:solidFill>
                   <a:srgbClr val="5B6770"/>
                 </a:solidFill>
@@ -16435,7 +16414,7 @@
           <a:p>
             <a:pPr algn="l"/>
             <a:r>
-              <a:rPr sz="800" b="0">
+              <a:rPr sz="1000" b="0" dirty="0">
                 <a:solidFill>
                   <a:srgbClr val="5B6770"/>
                 </a:solidFill>
@@ -16463,6 +16442,11 @@
             <a:avLst/>
           </a:prstGeom>
           <a:noFill/>
+          <a:ln>
+            <a:solidFill>
+              <a:schemeClr val="tx1"/>
+            </a:solidFill>
+          </a:ln>
         </p:spPr>
         <p:txBody>
           <a:bodyPr wrap="square" lIns="0" tIns="0" rIns="0" bIns="0" anchor="t">
@@ -16472,7 +16456,7 @@
           <a:p>
             <a:pPr algn="l"/>
             <a:r>
-              <a:rPr sz="850" b="1">
+              <a:rPr sz="1000" b="1" dirty="0">
                 <a:solidFill>
                   <a:srgbClr val="0F4C5C"/>
                 </a:solidFill>
@@ -16483,7 +16467,7 @@
               <a:t>パレット詰め（約2分／枚）</a:t>
             </a:r>
             <a:r>
-              <a:rPr sz="850" b="0">
+              <a:rPr sz="1000" b="0" dirty="0">
                 <a:solidFill>
                   <a:srgbClr val="1F2A30"/>
                 </a:solidFill>
@@ -16491,7 +16475,139 @@
                 <a:ea typeface="BIZ UDPGothic"/>
                 <a:cs typeface="BIZ UDPGothic"/>
               </a:rPr>
-              <a:t>は早番・中番がまとめて行う → 1品種の日250分、2品種の日168分（月平均209分）</a:t>
+              <a:t>は早番・中番がまとめて行う </a:t>
+            </a:r>
+            <a:endParaRPr lang="en-US" altLang="en-US" sz="1000" b="0" dirty="0">
+              <a:solidFill>
+                <a:srgbClr val="1F2A30"/>
+              </a:solidFill>
+              <a:latin typeface="BIZ UDPGothic"/>
+              <a:ea typeface="BIZ UDPGothic"/>
+              <a:cs typeface="BIZ UDPGothic"/>
+            </a:endParaRPr>
+          </a:p>
+          <a:p>
+            <a:pPr algn="l"/>
+            <a:r>
+              <a:rPr lang="ja-JP" altLang="en-US" sz="1000" b="0" dirty="0">
+                <a:solidFill>
+                  <a:srgbClr val="1F2A30"/>
+                </a:solidFill>
+                <a:latin typeface="BIZ UDPGothic"/>
+                <a:ea typeface="BIZ UDPGothic"/>
+                <a:cs typeface="BIZ UDPGothic"/>
+              </a:rPr>
+              <a:t>→ </a:t>
+            </a:r>
+            <a:r>
+              <a:rPr lang="en-US" altLang="ja-JP" sz="1000" b="0" dirty="0">
+                <a:solidFill>
+                  <a:srgbClr val="1F2A30"/>
+                </a:solidFill>
+                <a:latin typeface="BIZ UDPGothic"/>
+                <a:ea typeface="BIZ UDPGothic"/>
+                <a:cs typeface="BIZ UDPGothic"/>
+              </a:rPr>
+              <a:t>1</a:t>
+            </a:r>
+            <a:r>
+              <a:rPr lang="ja-JP" altLang="en-US" sz="1000" b="0" dirty="0">
+                <a:solidFill>
+                  <a:srgbClr val="1F2A30"/>
+                </a:solidFill>
+                <a:latin typeface="BIZ UDPGothic"/>
+                <a:ea typeface="BIZ UDPGothic"/>
+                <a:cs typeface="BIZ UDPGothic"/>
+              </a:rPr>
+              <a:t>品種の日</a:t>
+            </a:r>
+            <a:r>
+              <a:rPr lang="en-US" altLang="ja-JP" sz="1000" b="0" dirty="0">
+                <a:solidFill>
+                  <a:srgbClr val="1F2A30"/>
+                </a:solidFill>
+                <a:latin typeface="BIZ UDPGothic"/>
+                <a:ea typeface="BIZ UDPGothic"/>
+                <a:cs typeface="BIZ UDPGothic"/>
+              </a:rPr>
+              <a:t>250</a:t>
+            </a:r>
+            <a:r>
+              <a:rPr lang="ja-JP" altLang="en-US" sz="1000" b="0" dirty="0">
+                <a:solidFill>
+                  <a:srgbClr val="1F2A30"/>
+                </a:solidFill>
+                <a:latin typeface="BIZ UDPGothic"/>
+                <a:ea typeface="BIZ UDPGothic"/>
+                <a:cs typeface="BIZ UDPGothic"/>
+              </a:rPr>
+              <a:t>分、</a:t>
+            </a:r>
+            <a:r>
+              <a:rPr lang="en-US" altLang="ja-JP" sz="1000" b="0" dirty="0">
+                <a:solidFill>
+                  <a:srgbClr val="1F2A30"/>
+                </a:solidFill>
+                <a:latin typeface="BIZ UDPGothic"/>
+                <a:ea typeface="BIZ UDPGothic"/>
+                <a:cs typeface="BIZ UDPGothic"/>
+              </a:rPr>
+              <a:t>2</a:t>
+            </a:r>
+            <a:r>
+              <a:rPr lang="ja-JP" altLang="en-US" sz="1000" b="0" dirty="0">
+                <a:solidFill>
+                  <a:srgbClr val="1F2A30"/>
+                </a:solidFill>
+                <a:latin typeface="BIZ UDPGothic"/>
+                <a:ea typeface="BIZ UDPGothic"/>
+                <a:cs typeface="BIZ UDPGothic"/>
+              </a:rPr>
+              <a:t>品種の日</a:t>
+            </a:r>
+            <a:r>
+              <a:rPr lang="en-US" altLang="ja-JP" sz="1000" b="0" dirty="0">
+                <a:solidFill>
+                  <a:srgbClr val="1F2A30"/>
+                </a:solidFill>
+                <a:latin typeface="BIZ UDPGothic"/>
+                <a:ea typeface="BIZ UDPGothic"/>
+                <a:cs typeface="BIZ UDPGothic"/>
+              </a:rPr>
+              <a:t>168</a:t>
+            </a:r>
+            <a:r>
+              <a:rPr lang="ja-JP" altLang="en-US" sz="1000" b="0" dirty="0">
+                <a:solidFill>
+                  <a:srgbClr val="1F2A30"/>
+                </a:solidFill>
+                <a:latin typeface="BIZ UDPGothic"/>
+                <a:ea typeface="BIZ UDPGothic"/>
+                <a:cs typeface="BIZ UDPGothic"/>
+              </a:rPr>
+              <a:t>分（月平均</a:t>
+            </a:r>
+            <a:r>
+              <a:rPr lang="en-US" altLang="ja-JP" sz="1000" b="0" dirty="0">
+                <a:solidFill>
+                  <a:srgbClr val="1F2A30"/>
+                </a:solidFill>
+                <a:latin typeface="BIZ UDPGothic"/>
+                <a:ea typeface="BIZ UDPGothic"/>
+                <a:cs typeface="BIZ UDPGothic"/>
+              </a:rPr>
+              <a:t>209</a:t>
+            </a:r>
+            <a:r>
+              <a:rPr lang="ja-JP" altLang="en-US" sz="1000" b="0" dirty="0">
+                <a:solidFill>
+                  <a:srgbClr val="1F2A30"/>
+                </a:solidFill>
+                <a:latin typeface="BIZ UDPGothic"/>
+                <a:ea typeface="BIZ UDPGothic"/>
+                <a:cs typeface="BIZ UDPGothic"/>
+              </a:rPr>
+              <a:t>分）</a:t>
             </a:r>
           </a:p>
         </p:txBody>
@@ -16511,6 +16627,11 @@
             <a:avLst/>
           </a:prstGeom>
           <a:noFill/>
+          <a:ln>
+            <a:solidFill>
+              <a:schemeClr val="tx1"/>
+            </a:solidFill>
+          </a:ln>
         </p:spPr>
         <p:txBody>
           <a:bodyPr wrap="square" lIns="0" tIns="0" rIns="0" bIns="0" anchor="t">
@@ -16520,7 +16641,7 @@
           <a:p>
             <a:pPr algn="l"/>
             <a:r>
-              <a:rPr sz="850" b="1">
+              <a:rPr sz="1000" b="1" dirty="0">
                 <a:solidFill>
                   <a:srgbClr val="0F4C5C"/>
                 </a:solidFill>
@@ -16531,7 +16652,7 @@
               <a:t>入替（約3分）</a:t>
             </a:r>
             <a:r>
-              <a:rPr sz="850" b="0">
+              <a:rPr sz="1000" b="0" dirty="0">
                 <a:solidFill>
                   <a:srgbClr val="1F2A30"/>
                 </a:solidFill>
@@ -16539,7 +16660,84 @@
                 <a:ea typeface="BIZ UDPGothic"/>
                 <a:cs typeface="BIZ UDPGothic"/>
               </a:rPr>
-              <a:t>は生産量÷24,000袋で1品種の日6回＝18分、2品種の日4回＝12分。遅番はオペレーターが兼務し、投入担当が不要に</a:t>
+              <a:t>は生産量÷24,000袋で1品種の日6回＝18分、</a:t>
+            </a:r>
+            <a:endParaRPr lang="en-US" altLang="en-US" sz="1000" b="0" dirty="0">
+              <a:solidFill>
+                <a:srgbClr val="1F2A30"/>
+              </a:solidFill>
+              <a:latin typeface="BIZ UDPGothic"/>
+              <a:ea typeface="BIZ UDPGothic"/>
+              <a:cs typeface="BIZ UDPGothic"/>
+            </a:endParaRPr>
+          </a:p>
+          <a:p>
+            <a:pPr algn="l"/>
+            <a:r>
+              <a:rPr lang="en-US" altLang="ja-JP" sz="1000" b="0" dirty="0">
+                <a:solidFill>
+                  <a:srgbClr val="1F2A30"/>
+                </a:solidFill>
+                <a:latin typeface="BIZ UDPGothic"/>
+                <a:ea typeface="BIZ UDPGothic"/>
+                <a:cs typeface="BIZ UDPGothic"/>
+              </a:rPr>
+              <a:t>2</a:t>
+            </a:r>
+            <a:r>
+              <a:rPr lang="ja-JP" altLang="en-US" sz="1000" b="0" dirty="0">
+                <a:solidFill>
+                  <a:srgbClr val="1F2A30"/>
+                </a:solidFill>
+                <a:latin typeface="BIZ UDPGothic"/>
+                <a:ea typeface="BIZ UDPGothic"/>
+                <a:cs typeface="BIZ UDPGothic"/>
+              </a:rPr>
+              <a:t>品種の日</a:t>
+            </a:r>
+            <a:r>
+              <a:rPr lang="en-US" altLang="ja-JP" sz="1000" b="0" dirty="0">
+                <a:solidFill>
+                  <a:srgbClr val="1F2A30"/>
+                </a:solidFill>
+                <a:latin typeface="BIZ UDPGothic"/>
+                <a:ea typeface="BIZ UDPGothic"/>
+                <a:cs typeface="BIZ UDPGothic"/>
+              </a:rPr>
+              <a:t>4</a:t>
+            </a:r>
+            <a:r>
+              <a:rPr lang="ja-JP" altLang="en-US" sz="1000" b="0" dirty="0">
+                <a:solidFill>
+                  <a:srgbClr val="1F2A30"/>
+                </a:solidFill>
+                <a:latin typeface="BIZ UDPGothic"/>
+                <a:ea typeface="BIZ UDPGothic"/>
+                <a:cs typeface="BIZ UDPGothic"/>
+              </a:rPr>
+              <a:t>回＝</a:t>
+            </a:r>
+            <a:r>
+              <a:rPr lang="en-US" altLang="ja-JP" sz="1000" b="0" dirty="0">
+                <a:solidFill>
+                  <a:srgbClr val="1F2A30"/>
+                </a:solidFill>
+                <a:latin typeface="BIZ UDPGothic"/>
+                <a:ea typeface="BIZ UDPGothic"/>
+                <a:cs typeface="BIZ UDPGothic"/>
+              </a:rPr>
+              <a:t>12</a:t>
+            </a:r>
+            <a:r>
+              <a:rPr lang="ja-JP" altLang="en-US" sz="1000" b="0" dirty="0">
+                <a:solidFill>
+                  <a:srgbClr val="1F2A30"/>
+                </a:solidFill>
+                <a:latin typeface="BIZ UDPGothic"/>
+                <a:ea typeface="BIZ UDPGothic"/>
+                <a:cs typeface="BIZ UDPGothic"/>
+              </a:rPr>
+              <a:t>分。遅番はオペレーターが兼務し、投入担当が不要に</a:t>
             </a:r>
           </a:p>
         </p:txBody>
@@ -16570,7 +16768,7 @@
           <a:lstStyle/>
           <a:p>
             <a:pPr algn="ctr"/>
-            <a:endParaRPr/>
+            <a:endParaRPr dirty="0"/>
           </a:p>
         </p:txBody>
       </p:sp>
@@ -16598,7 +16796,7 @@
           <a:p>
             <a:pPr algn="l"/>
             <a:r>
-              <a:rPr sz="1700" b="1">
+              <a:rPr sz="1700" b="1" dirty="0">
                 <a:solidFill>
                   <a:srgbClr val="B84A0A"/>
                 </a:solidFill>
@@ -16635,7 +16833,7 @@
           <a:p>
             <a:pPr algn="l"/>
             <a:r>
-              <a:rPr sz="800" b="0">
+              <a:rPr sz="800" b="0" dirty="0">
                 <a:solidFill>
                   <a:srgbClr val="5B6770"/>
                 </a:solidFill>
@@ -16674,7 +16872,7 @@
           <a:lstStyle/>
           <a:p>
             <a:pPr algn="ctr"/>
-            <a:endParaRPr/>
+            <a:endParaRPr dirty="0"/>
           </a:p>
         </p:txBody>
       </p:sp>
@@ -16702,7 +16900,7 @@
           <a:p>
             <a:pPr algn="l"/>
             <a:r>
-              <a:rPr sz="1700" b="1">
+              <a:rPr sz="1700" b="1" dirty="0">
                 <a:solidFill>
                   <a:srgbClr val="B84A0A"/>
                 </a:solidFill>
@@ -16739,7 +16937,7 @@
           <a:p>
             <a:pPr algn="l"/>
             <a:r>
-              <a:rPr sz="800" b="0">
+              <a:rPr sz="800" b="0" dirty="0">
                 <a:solidFill>
                   <a:srgbClr val="5B6770"/>
                 </a:solidFill>
@@ -16778,7 +16976,7 @@
           <a:lstStyle/>
           <a:p>
             <a:pPr algn="ctr"/>
-            <a:endParaRPr/>
+            <a:endParaRPr dirty="0"/>
           </a:p>
         </p:txBody>
       </p:sp>
@@ -16806,7 +17004,7 @@
           <a:p>
             <a:pPr algn="l"/>
             <a:r>
-              <a:rPr sz="1700" b="1">
+              <a:rPr sz="1700" b="1" dirty="0">
                 <a:solidFill>
                   <a:srgbClr val="B84A0A"/>
                 </a:solidFill>
@@ -16843,7 +17041,7 @@
           <a:p>
             <a:pPr algn="l"/>
             <a:r>
-              <a:rPr sz="800" b="0">
+              <a:rPr sz="800" b="0" dirty="0">
                 <a:solidFill>
                   <a:srgbClr val="5B6770"/>
                 </a:solidFill>
@@ -16917,7 +17115,7 @@
           <a:bodyPr/>
           <a:lstStyle/>
           <a:p>
-            <a:endParaRPr/>
+            <a:endParaRPr dirty="0"/>
           </a:p>
         </p:txBody>
       </p:sp>
@@ -16949,7 +17147,7 @@
           <a:bodyPr/>
           <a:lstStyle/>
           <a:p>
-            <a:endParaRPr/>
+            <a:endParaRPr dirty="0"/>
           </a:p>
         </p:txBody>
       </p:sp>
@@ -16978,7 +17176,7 @@
               <a:buNone/>
             </a:pPr>
             <a:r>
-              <a:rPr sz="2200" b="1">
+              <a:rPr sz="2200" b="1" dirty="0">
                 <a:solidFill>
                   <a:srgbClr val="FFFFFF"/>
                 </a:solidFill>
@@ -16986,7 +17184,51 @@
                 <a:ea typeface="BIZ UDPGothic"/>
                 <a:cs typeface="BIZ UDPGothic"/>
               </a:rPr>
-              <a:t>6. パウチ供給工程のビフォー・アフター（1日の人手作業時間）</a:t>
+              <a:t>6. </a:t>
+            </a:r>
+            <a:r>
+              <a:rPr sz="2200" b="1" dirty="0" err="1">
+                <a:solidFill>
+                  <a:srgbClr val="FFFFFF"/>
+                </a:solidFill>
+                <a:latin typeface="BIZ UDPGothic"/>
+                <a:ea typeface="BIZ UDPGothic"/>
+                <a:cs typeface="BIZ UDPGothic"/>
+              </a:rPr>
+              <a:t>パウチ供給工程のビフォ</a:t>
+            </a:r>
+            <a:r>
+              <a:rPr sz="2200" b="1" dirty="0">
+                <a:solidFill>
+                  <a:srgbClr val="FFFFFF"/>
+                </a:solidFill>
+                <a:latin typeface="BIZ UDPGothic"/>
+                <a:ea typeface="BIZ UDPGothic"/>
+                <a:cs typeface="BIZ UDPGothic"/>
+              </a:rPr>
+              <a:t>ー・</a:t>
+            </a:r>
+            <a:r>
+              <a:rPr sz="2200" b="1" dirty="0" err="1">
+                <a:solidFill>
+                  <a:srgbClr val="FFFFFF"/>
+                </a:solidFill>
+                <a:latin typeface="BIZ UDPGothic"/>
+                <a:ea typeface="BIZ UDPGothic"/>
+                <a:cs typeface="BIZ UDPGothic"/>
+              </a:rPr>
+              <a:t>アフタ</a:t>
+            </a:r>
+            <a:r>
+              <a:rPr sz="2200" b="1" dirty="0">
+                <a:solidFill>
+                  <a:srgbClr val="FFFFFF"/>
+                </a:solidFill>
+                <a:latin typeface="BIZ UDPGothic"/>
+                <a:ea typeface="BIZ UDPGothic"/>
+                <a:cs typeface="BIZ UDPGothic"/>
+              </a:rPr>
+              <a:t>ー（1日の人手作業時間）</a:t>
             </a:r>
             <a:endParaRPr lang="en-US" sz="2200" dirty="0"/>
           </a:p>
@@ -20123,7 +20365,7 @@
           <a:p>
             <a:pPr algn="l"/>
             <a:r>
-              <a:rPr sz="1000" b="1">
+              <a:rPr sz="1000" b="1" dirty="0">
                 <a:solidFill>
                   <a:srgbClr val="0F4C5C"/>
                 </a:solidFill>
@@ -20134,7 +20376,7 @@
               <a:t>別紙1の計算：</a:t>
             </a:r>
             <a:r>
-              <a:rPr sz="1000" b="0">
+              <a:rPr sz="1000" b="0" dirty="0">
                 <a:solidFill>
                   <a:srgbClr val="1F2A30"/>
                 </a:solidFill>
@@ -20142,21 +20384,54 @@
                 <a:ea typeface="BIZ UDPGothic"/>
                 <a:cs typeface="BIZ UDPGothic"/>
               </a:rPr>
-              <a:t>削減 1,030分／日（17.2時間） − 発生 231分／日（3.9時間） ＝ 799分／日（13.3時間）　</a:t>
-            </a:r>
-            <a:r>
-              <a:rPr sz="1000" b="1">
-                <a:solidFill>
-                  <a:srgbClr val="B84A0A"/>
+              <a:t>削減 1,030分／日（17.2時間） − </a:t>
+            </a:r>
+            <a:r>
+              <a:rPr sz="1000" b="0" dirty="0" err="1">
+                <a:solidFill>
+                  <a:srgbClr val="1F2A30"/>
                 </a:solidFill>
                 <a:latin typeface="BIZ UDPGothic"/>
                 <a:ea typeface="BIZ UDPGothic"/>
                 <a:cs typeface="BIZ UDPGothic"/>
               </a:rPr>
-              <a:t>省力化指数 0.78</a:t>
-            </a:r>
-            <a:r>
-              <a:rPr sz="1000" b="0">
+              <a:t>発生</a:t>
+            </a:r>
+            <a:r>
+              <a:rPr sz="1000" b="0" dirty="0">
+                <a:solidFill>
+                  <a:srgbClr val="1F2A30"/>
+                </a:solidFill>
+                <a:latin typeface="BIZ UDPGothic"/>
+                <a:ea typeface="BIZ UDPGothic"/>
+                <a:cs typeface="BIZ UDPGothic"/>
+              </a:rPr>
+              <a:t> 231分／日（3.9時間） ＝ 799分／日（13.3時間）　</a:t>
+            </a:r>
+            <a:r>
+              <a:rPr sz="1000" b="1" dirty="0" err="1">
+                <a:solidFill>
+                  <a:srgbClr val="B84A0A"/>
+                </a:solidFill>
+                <a:latin typeface="BIZ UDPGothic"/>
+                <a:ea typeface="BIZ UDPGothic"/>
+                <a:cs typeface="BIZ UDPGothic"/>
+              </a:rPr>
+              <a:t>省力化指数</a:t>
+            </a:r>
+            <a:r>
+              <a:rPr sz="1000" b="1" dirty="0">
+                <a:solidFill>
+                  <a:srgbClr val="B84A0A"/>
+                </a:solidFill>
+                <a:latin typeface="BIZ UDPGothic"/>
+                <a:ea typeface="BIZ UDPGothic"/>
+                <a:cs typeface="BIZ UDPGothic"/>
+              </a:rPr>
+              <a:t> 0.78</a:t>
+            </a:r>
+            <a:r>
+              <a:rPr sz="1000" b="0" dirty="0">
                 <a:solidFill>
                   <a:srgbClr val="1F2A30"/>
                 </a:solidFill>
@@ -20518,7 +20793,7 @@
               <a:buNone/>
             </a:pPr>
             <a:r>
-              <a:rPr sz="800" b="0">
+              <a:rPr sz="1000" b="0" dirty="0">
                 <a:solidFill>
                   <a:srgbClr val="5B6770"/>
                 </a:solidFill>
@@ -20528,7 +20803,7 @@
               </a:rPr>
               <a:t>投入担当の作業→導入後の関連作業（月平均。搬入20分は変わらず）</a:t>
             </a:r>
-            <a:endParaRPr lang="en-US" sz="800" dirty="0"/>
+            <a:endParaRPr lang="en-US" sz="1000" dirty="0"/>
           </a:p>
         </p:txBody>
       </p:sp>
@@ -20628,7 +20903,7 @@
               <a:buNone/>
             </a:pPr>
             <a:r>
-              <a:rPr sz="800" b="0">
+              <a:rPr sz="1000" b="0">
                 <a:solidFill>
                   <a:srgbClr val="5B6770"/>
                 </a:solidFill>
@@ -20638,7 +20913,7 @@
               </a:rPr>
               <a:t>≒13.3時間／日。主に中番と遅番で創出</a:t>
             </a:r>
-            <a:endParaRPr lang="en-US" sz="800" dirty="0"/>
+            <a:endParaRPr lang="en-US" sz="1000" dirty="0"/>
           </a:p>
         </p:txBody>
       </p:sp>
@@ -20738,7 +21013,7 @@
               <a:buNone/>
             </a:pPr>
             <a:r>
-              <a:rPr sz="800" b="0">
+              <a:rPr sz="1000" b="0" dirty="0">
                 <a:solidFill>
                   <a:srgbClr val="5B6770"/>
                 </a:solidFill>
@@ -20746,9 +21021,20 @@
                 <a:ea typeface="BIZ UDPGothic"/>
                 <a:cs typeface="BIZ UDPGothic"/>
               </a:rPr>
-              <a:t>（1,030−231）÷1,030。別紙1の自動計算と同じ</a:t>
-            </a:r>
-            <a:endParaRPr lang="en-US" sz="800" dirty="0"/>
+              <a:t>（1,030−231）÷1,030。別紙1</a:t>
+            </a:r>
+            <a:r>
+              <a:rPr lang="ja-JP" altLang="en-US" sz="1000" b="0" dirty="0">
+                <a:solidFill>
+                  <a:srgbClr val="5B6770"/>
+                </a:solidFill>
+                <a:latin typeface="BIZ UDPGothic"/>
+                <a:ea typeface="BIZ UDPGothic"/>
+                <a:cs typeface="BIZ UDPGothic"/>
+              </a:rPr>
+              <a:t>参照</a:t>
+            </a:r>
+            <a:endParaRPr lang="en-US" sz="1000" dirty="0"/>
           </a:p>
         </p:txBody>
       </p:sp>
@@ -20761,7 +21047,7 @@
           <p:nvPr>
             <p:extLst>
               <p:ext uri="{D42A27DB-BD31-4B8C-83A1-F6EECF244321}">
-                <p14:modId xmlns:p14="http://schemas.microsoft.com/office/powerpoint/2010/main" val="1330079892"/>
+                <p14:modId xmlns:p14="http://schemas.microsoft.com/office/powerpoint/2010/main" val="2383716480"/>
               </p:ext>
             </p:extLst>
           </p:nvPr>
@@ -20835,7 +21121,7 @@
                         <a:buNone/>
                       </a:pPr>
                       <a:r>
-                        <a:rPr lang="en-US" sz="850" b="1" dirty="0">
+                        <a:rPr lang="en-US" sz="900" b="1" dirty="0">
                           <a:solidFill>
                             <a:srgbClr val="FFFFFF"/>
                           </a:solidFill>
@@ -20845,7 +21131,7 @@
                         </a:rPr>
                         <a:t>シフト・作業</a:t>
                       </a:r>
-                      <a:endParaRPr lang="en-US" sz="850" dirty="0">
+                      <a:endParaRPr lang="en-US" sz="900" dirty="0">
                         <a:latin typeface="BIZ UDPGothic" charset="0"/>
                         <a:ea typeface="BIZ UDPGothic" charset="0"/>
                         <a:cs typeface="BIZ UDPGothic" charset="0"/>
@@ -20903,7 +21189,7 @@
                         <a:buNone/>
                       </a:pPr>
                       <a:r>
-                        <a:rPr lang="en-US" sz="850" b="1" dirty="0">
+                        <a:rPr lang="en-US" sz="900" b="1" dirty="0">
                           <a:solidFill>
                             <a:srgbClr val="FFFFFF"/>
                           </a:solidFill>
@@ -20913,7 +21199,7 @@
                         </a:rPr>
                         <a:t>時間帯</a:t>
                       </a:r>
-                      <a:endParaRPr lang="en-US" sz="850" dirty="0">
+                      <a:endParaRPr lang="en-US" sz="900" dirty="0">
                         <a:latin typeface="BIZ UDPGothic" charset="0"/>
                         <a:ea typeface="BIZ UDPGothic" charset="0"/>
                         <a:cs typeface="BIZ UDPGothic" charset="0"/>
@@ -20971,7 +21257,7 @@
                         <a:buNone/>
                       </a:pPr>
                       <a:r>
-                        <a:rPr lang="en-US" sz="850" b="1" dirty="0">
+                        <a:rPr lang="en-US" sz="900" b="1" dirty="0">
                           <a:solidFill>
                             <a:srgbClr val="FFFFFF"/>
                           </a:solidFill>
@@ -20981,7 +21267,7 @@
                         </a:rPr>
                         <a:t>現状の担当</a:t>
                       </a:r>
-                      <a:endParaRPr lang="en-US" sz="850" dirty="0">
+                      <a:endParaRPr lang="en-US" sz="900" dirty="0">
                         <a:latin typeface="BIZ UDPGothic" charset="0"/>
                         <a:ea typeface="BIZ UDPGothic" charset="0"/>
                         <a:cs typeface="BIZ UDPGothic" charset="0"/>
@@ -21039,7 +21325,7 @@
                         <a:buNone/>
                       </a:pPr>
                       <a:r>
-                        <a:rPr lang="en-US" sz="850" b="1" dirty="0">
+                        <a:rPr lang="en-US" sz="900" b="1" dirty="0">
                           <a:solidFill>
                             <a:srgbClr val="FFFFFF"/>
                           </a:solidFill>
@@ -21049,7 +21335,7 @@
                         </a:rPr>
                         <a:t>導入後の担当</a:t>
                       </a:r>
-                      <a:endParaRPr lang="en-US" sz="850" dirty="0">
+                      <a:endParaRPr lang="en-US" sz="900" dirty="0">
                         <a:latin typeface="BIZ UDPGothic" charset="0"/>
                         <a:ea typeface="BIZ UDPGothic" charset="0"/>
                         <a:cs typeface="BIZ UDPGothic" charset="0"/>
@@ -21107,7 +21393,7 @@
                         <a:buNone/>
                       </a:pPr>
                       <a:r>
-                        <a:rPr lang="en-US" sz="850" b="1" dirty="0">
+                        <a:rPr lang="en-US" sz="900" b="1" dirty="0">
                           <a:solidFill>
                             <a:srgbClr val="FFFFFF"/>
                           </a:solidFill>
@@ -21117,7 +21403,7 @@
                         </a:rPr>
                         <a:t>現状</a:t>
                       </a:r>
-                      <a:endParaRPr lang="en-US" sz="850" dirty="0">
+                      <a:endParaRPr lang="en-US" sz="900" dirty="0">
                         <a:latin typeface="BIZ UDPGothic" charset="0"/>
                         <a:ea typeface="BIZ UDPGothic" charset="0"/>
                         <a:cs typeface="BIZ UDPGothic" charset="0"/>
@@ -21128,7 +21414,7 @@
                         <a:buNone/>
                       </a:pPr>
                       <a:r>
-                        <a:rPr lang="en-US" sz="850" b="1" dirty="0">
+                        <a:rPr lang="en-US" sz="900" b="1" dirty="0">
                           <a:solidFill>
                             <a:srgbClr val="FFFFFF"/>
                           </a:solidFill>
@@ -21138,7 +21424,7 @@
                         </a:rPr>
                         <a:t>（分）</a:t>
                       </a:r>
-                      <a:endParaRPr lang="en-US" sz="850" dirty="0">
+                      <a:endParaRPr lang="en-US" sz="900" dirty="0">
                         <a:latin typeface="BIZ UDPGothic" charset="0"/>
                         <a:ea typeface="BIZ UDPGothic" charset="0"/>
                         <a:cs typeface="BIZ UDPGothic" charset="0"/>
@@ -21196,7 +21482,7 @@
                         <a:buNone/>
                       </a:pPr>
                       <a:r>
-                        <a:rPr lang="en-US" sz="850" b="1" dirty="0">
+                        <a:rPr lang="en-US" sz="900" b="1" dirty="0">
                           <a:solidFill>
                             <a:srgbClr val="FFFFFF"/>
                           </a:solidFill>
@@ -21206,7 +21492,7 @@
                         </a:rPr>
                         <a:t>導入後</a:t>
                       </a:r>
-                      <a:endParaRPr lang="en-US" sz="850" dirty="0">
+                      <a:endParaRPr lang="en-US" sz="900" dirty="0">
                         <a:latin typeface="BIZ UDPGothic" charset="0"/>
                         <a:ea typeface="BIZ UDPGothic" charset="0"/>
                         <a:cs typeface="BIZ UDPGothic" charset="0"/>
@@ -21217,7 +21503,7 @@
                         <a:buNone/>
                       </a:pPr>
                       <a:r>
-                        <a:rPr lang="en-US" sz="850" b="1" dirty="0">
+                        <a:rPr lang="en-US" sz="900" b="1" dirty="0">
                           <a:solidFill>
                             <a:srgbClr val="FFFFFF"/>
                           </a:solidFill>
@@ -21227,7 +21513,7 @@
                         </a:rPr>
                         <a:t>1品種／2品種</a:t>
                       </a:r>
-                      <a:endParaRPr lang="en-US" sz="850" dirty="0">
+                      <a:endParaRPr lang="en-US" sz="900" dirty="0">
                         <a:latin typeface="BIZ UDPGothic" charset="0"/>
                         <a:ea typeface="BIZ UDPGothic" charset="0"/>
                         <a:cs typeface="BIZ UDPGothic" charset="0"/>
@@ -21285,7 +21571,7 @@
                         <a:buNone/>
                       </a:pPr>
                       <a:r>
-                        <a:rPr lang="en-US" sz="850" b="1" dirty="0">
+                        <a:rPr lang="en-US" sz="900" b="1" dirty="0">
                           <a:solidFill>
                             <a:srgbClr val="FFFFFF"/>
                           </a:solidFill>
@@ -21295,7 +21581,7 @@
                         </a:rPr>
                         <a:t>創出時間</a:t>
                       </a:r>
-                      <a:endParaRPr lang="en-US" sz="850" dirty="0">
+                      <a:endParaRPr lang="en-US" sz="900" dirty="0">
                         <a:latin typeface="BIZ UDPGothic" charset="0"/>
                         <a:ea typeface="BIZ UDPGothic" charset="0"/>
                         <a:cs typeface="BIZ UDPGothic" charset="0"/>
@@ -21306,7 +21592,7 @@
                         <a:buNone/>
                       </a:pPr>
                       <a:r>
-                        <a:rPr lang="en-US" sz="850" b="1" dirty="0">
+                        <a:rPr lang="en-US" sz="900" b="1" dirty="0">
                           <a:solidFill>
                             <a:srgbClr val="FFFFFF"/>
                           </a:solidFill>
@@ -21316,7 +21602,7 @@
                         </a:rPr>
                         <a:t>1品種／2品種</a:t>
                       </a:r>
-                      <a:endParaRPr lang="en-US" sz="850" dirty="0">
+                      <a:endParaRPr lang="en-US" sz="900" dirty="0">
                         <a:latin typeface="BIZ UDPGothic" charset="0"/>
                         <a:ea typeface="BIZ UDPGothic" charset="0"/>
                         <a:cs typeface="BIZ UDPGothic" charset="0"/>
@@ -21381,7 +21667,7 @@
                         <a:buNone/>
                       </a:pPr>
                       <a:r>
-                        <a:rPr sz="850" b="1">
+                        <a:rPr sz="900" b="1" dirty="0" err="1">
                           <a:solidFill>
                             <a:srgbClr val="1F2A30"/>
                           </a:solidFill>
@@ -21391,7 +21677,7 @@
                         </a:rPr>
                         <a:t>早番</a:t>
                       </a:r>
-                      <a:endParaRPr lang="en-US" sz="850" dirty="0">
+                      <a:endParaRPr lang="en-US" sz="900" dirty="0">
                         <a:latin typeface="BIZ UDPGothic" charset="0"/>
                         <a:ea typeface="BIZ UDPGothic" charset="0"/>
                         <a:cs typeface="BIZ UDPGothic" charset="0"/>
@@ -21446,7 +21732,7 @@
                         <a:buNone/>
                       </a:pPr>
                       <a:r>
-                        <a:rPr sz="850" b="0">
+                        <a:rPr sz="900" b="0">
                           <a:solidFill>
                             <a:srgbClr val="1F2A30"/>
                           </a:solidFill>
@@ -21456,7 +21742,7 @@
                         </a:rPr>
                         <a:t>6:30〜11:00</a:t>
                       </a:r>
-                      <a:endParaRPr lang="en-US" sz="850" dirty="0">
+                      <a:endParaRPr lang="en-US" sz="900" dirty="0">
                         <a:latin typeface="BIZ UDPGothic" charset="0"/>
                         <a:ea typeface="BIZ UDPGothic" charset="0"/>
                         <a:cs typeface="BIZ UDPGothic" charset="0"/>
@@ -21464,7 +21750,7 @@
                     </a:p>
                     <a:p>
                       <a:r>
-                        <a:rPr sz="850" b="0">
+                        <a:rPr sz="900" b="0">
                           <a:solidFill>
                             <a:srgbClr val="1F2A30"/>
                           </a:solidFill>
@@ -21524,7 +21810,7 @@
                         <a:buNone/>
                       </a:pPr>
                       <a:r>
-                        <a:rPr sz="850" b="0">
+                        <a:rPr sz="900" b="0">
                           <a:solidFill>
                             <a:srgbClr val="1F2A30"/>
                           </a:solidFill>
@@ -21534,7 +21820,7 @@
                         </a:rPr>
                         <a:t>投入パート1名</a:t>
                       </a:r>
-                      <a:endParaRPr lang="en-US" sz="850" dirty="0">
+                      <a:endParaRPr lang="en-US" sz="900" dirty="0">
                         <a:latin typeface="BIZ UDPGothic" charset="0"/>
                         <a:ea typeface="BIZ UDPGothic" charset="0"/>
                         <a:cs typeface="BIZ UDPGothic" charset="0"/>
@@ -21589,7 +21875,7 @@
                         <a:buNone/>
                       </a:pPr>
                       <a:r>
-                        <a:rPr sz="850" b="0">
+                        <a:rPr sz="900" b="0">
                           <a:solidFill>
                             <a:srgbClr val="1F2A30"/>
                           </a:solidFill>
@@ -21599,7 +21885,7 @@
                         </a:rPr>
                         <a:t>同じ方が詰め作業へ転換</a:t>
                       </a:r>
-                      <a:endParaRPr lang="en-US" sz="850" dirty="0">
+                      <a:endParaRPr lang="en-US" sz="900" dirty="0">
                         <a:latin typeface="BIZ UDPGothic" charset="0"/>
                         <a:ea typeface="BIZ UDPGothic" charset="0"/>
                         <a:cs typeface="BIZ UDPGothic" charset="0"/>
@@ -21654,7 +21940,7 @@
                         <a:buNone/>
                       </a:pPr>
                       <a:r>
-                        <a:rPr sz="850" b="0">
+                        <a:rPr sz="900" b="0">
                           <a:solidFill>
                             <a:srgbClr val="1F2A30"/>
                           </a:solidFill>
@@ -21664,7 +21950,7 @@
                         </a:rPr>
                         <a:t>150</a:t>
                       </a:r>
-                      <a:endParaRPr lang="en-US" sz="850" dirty="0">
+                      <a:endParaRPr lang="en-US" sz="900" dirty="0">
                         <a:latin typeface="BIZ UDPGothic" charset="0"/>
                         <a:ea typeface="BIZ UDPGothic" charset="0"/>
                         <a:cs typeface="BIZ UDPGothic" charset="0"/>
@@ -21719,7 +22005,7 @@
                         <a:buNone/>
                       </a:pPr>
                       <a:r>
-                        <a:rPr sz="850" b="0">
+                        <a:rPr sz="900" b="0">
                           <a:solidFill>
                             <a:srgbClr val="1F2A30"/>
                           </a:solidFill>
@@ -21729,7 +22015,7 @@
                         </a:rPr>
                         <a:t>150／150</a:t>
                       </a:r>
-                      <a:endParaRPr lang="en-US" sz="850" dirty="0">
+                      <a:endParaRPr lang="en-US" sz="900" dirty="0">
                         <a:latin typeface="BIZ UDPGothic" charset="0"/>
                         <a:ea typeface="BIZ UDPGothic" charset="0"/>
                         <a:cs typeface="BIZ UDPGothic" charset="0"/>
@@ -21784,7 +22070,7 @@
                         <a:buNone/>
                       </a:pPr>
                       <a:r>
-                        <a:rPr sz="850" b="0">
+                        <a:rPr sz="900" b="0">
                           <a:solidFill>
                             <a:srgbClr val="1F2A30"/>
                           </a:solidFill>
@@ -21794,7 +22080,7 @@
                         </a:rPr>
                         <a:t>0／0（業務転換）</a:t>
                       </a:r>
-                      <a:endParaRPr lang="en-US" sz="850" dirty="0">
+                      <a:endParaRPr lang="en-US" sz="900" dirty="0">
                         <a:latin typeface="BIZ UDPGothic" charset="0"/>
                         <a:ea typeface="BIZ UDPGothic" charset="0"/>
                         <a:cs typeface="BIZ UDPGothic" charset="0"/>
@@ -21856,7 +22142,7 @@
                         <a:buNone/>
                       </a:pPr>
                       <a:r>
-                        <a:rPr sz="850" b="1">
+                        <a:rPr sz="900" b="1" dirty="0" err="1">
                           <a:solidFill>
                             <a:srgbClr val="1F2A30"/>
                           </a:solidFill>
@@ -21866,7 +22152,7 @@
                         </a:rPr>
                         <a:t>中番</a:t>
                       </a:r>
-                      <a:endParaRPr lang="en-US" sz="850" dirty="0">
+                      <a:endParaRPr lang="en-US" sz="900" dirty="0">
                         <a:latin typeface="BIZ UDPGothic" charset="0"/>
                         <a:ea typeface="BIZ UDPGothic" charset="0"/>
                         <a:cs typeface="BIZ UDPGothic" charset="0"/>
@@ -21921,7 +22207,7 @@
                         <a:buNone/>
                       </a:pPr>
                       <a:r>
-                        <a:rPr sz="850" b="0">
+                        <a:rPr sz="900" b="0" dirty="0">
                           <a:solidFill>
                             <a:srgbClr val="1F2A30"/>
                           </a:solidFill>
@@ -21931,7 +22217,7 @@
                         </a:rPr>
                         <a:t>11:00〜19:00</a:t>
                       </a:r>
-                      <a:endParaRPr lang="en-US" sz="850" dirty="0">
+                      <a:endParaRPr lang="en-US" sz="900" dirty="0">
                         <a:latin typeface="BIZ UDPGothic" charset="0"/>
                         <a:ea typeface="BIZ UDPGothic" charset="0"/>
                         <a:cs typeface="BIZ UDPGothic" charset="0"/>
@@ -21986,7 +22272,7 @@
                         <a:buNone/>
                       </a:pPr>
                       <a:r>
-                        <a:rPr sz="850" b="0">
+                        <a:rPr sz="900" b="0">
                           <a:solidFill>
                             <a:srgbClr val="1F2A30"/>
                           </a:solidFill>
@@ -21996,7 +22282,7 @@
                         </a:rPr>
                         <a:t>投入パート1名</a:t>
                       </a:r>
-                      <a:endParaRPr lang="en-US" sz="850" dirty="0">
+                      <a:endParaRPr lang="en-US" sz="900" dirty="0">
                         <a:latin typeface="BIZ UDPGothic" charset="0"/>
                         <a:ea typeface="BIZ UDPGothic" charset="0"/>
                         <a:cs typeface="BIZ UDPGothic" charset="0"/>
@@ -22051,7 +22337,7 @@
                         <a:buNone/>
                       </a:pPr>
                       <a:r>
-                        <a:rPr sz="850" b="0">
+                        <a:rPr sz="900" b="0">
                           <a:solidFill>
                             <a:srgbClr val="1F2A30"/>
                           </a:solidFill>
@@ -22061,7 +22347,7 @@
                         </a:rPr>
                         <a:t>早番の残りを詰め、以降は多能工化へ</a:t>
                       </a:r>
-                      <a:endParaRPr lang="en-US" sz="850" dirty="0">
+                      <a:endParaRPr lang="en-US" sz="900" dirty="0">
                         <a:latin typeface="BIZ UDPGothic" charset="0"/>
                         <a:ea typeface="BIZ UDPGothic" charset="0"/>
                         <a:cs typeface="BIZ UDPGothic" charset="0"/>
@@ -22116,7 +22402,7 @@
                         <a:buNone/>
                       </a:pPr>
                       <a:r>
-                        <a:rPr sz="850" b="0">
+                        <a:rPr sz="900" b="0">
                           <a:solidFill>
                             <a:srgbClr val="1F2A30"/>
                           </a:solidFill>
@@ -22126,7 +22412,7 @@
                         </a:rPr>
                         <a:t>480</a:t>
                       </a:r>
-                      <a:endParaRPr lang="en-US" sz="850" dirty="0">
+                      <a:endParaRPr lang="en-US" sz="900" dirty="0">
                         <a:latin typeface="BIZ UDPGothic" charset="0"/>
                         <a:ea typeface="BIZ UDPGothic" charset="0"/>
                         <a:cs typeface="BIZ UDPGothic" charset="0"/>
@@ -22181,7 +22467,7 @@
                         <a:buNone/>
                       </a:pPr>
                       <a:r>
-                        <a:rPr sz="850" b="0">
+                        <a:rPr sz="900" b="0">
                           <a:solidFill>
                             <a:srgbClr val="1F2A30"/>
                           </a:solidFill>
@@ -22191,7 +22477,7 @@
                         </a:rPr>
                         <a:t>100／18</a:t>
                       </a:r>
-                      <a:endParaRPr lang="en-US" sz="850" dirty="0">
+                      <a:endParaRPr lang="en-US" sz="900" dirty="0">
                         <a:latin typeface="BIZ UDPGothic" charset="0"/>
                         <a:ea typeface="BIZ UDPGothic" charset="0"/>
                         <a:cs typeface="BIZ UDPGothic" charset="0"/>
@@ -22246,7 +22532,7 @@
                         <a:buNone/>
                       </a:pPr>
                       <a:r>
-                        <a:rPr sz="850" b="1">
+                        <a:rPr sz="900" b="1">
                           <a:solidFill>
                             <a:srgbClr val="B84A0A"/>
                           </a:solidFill>
@@ -22256,7 +22542,7 @@
                         </a:rPr>
                         <a:t>380／462</a:t>
                       </a:r>
-                      <a:endParaRPr lang="en-US" sz="850" dirty="0">
+                      <a:endParaRPr lang="en-US" sz="900" dirty="0">
                         <a:latin typeface="BIZ UDPGothic" charset="0"/>
                         <a:ea typeface="BIZ UDPGothic" charset="0"/>
                         <a:cs typeface="BIZ UDPGothic" charset="0"/>
@@ -22318,7 +22604,7 @@
                         <a:buNone/>
                       </a:pPr>
                       <a:r>
-                        <a:rPr sz="850" b="1">
+                        <a:rPr sz="900" b="1">
                           <a:solidFill>
                             <a:srgbClr val="1F2A30"/>
                           </a:solidFill>
@@ -22328,7 +22614,7 @@
                         </a:rPr>
                         <a:t>遅番（夜勤）</a:t>
                       </a:r>
-                      <a:endParaRPr lang="en-US" sz="850" dirty="0">
+                      <a:endParaRPr lang="en-US" sz="900" dirty="0">
                         <a:latin typeface="BIZ UDPGothic" charset="0"/>
                         <a:ea typeface="BIZ UDPGothic" charset="0"/>
                         <a:cs typeface="BIZ UDPGothic" charset="0"/>
@@ -22383,7 +22669,7 @@
                         <a:buNone/>
                       </a:pPr>
                       <a:r>
-                        <a:rPr sz="850" b="0">
+                        <a:rPr sz="900" b="0" dirty="0">
                           <a:solidFill>
                             <a:srgbClr val="1F2A30"/>
                           </a:solidFill>
@@ -22393,7 +22679,7 @@
                         </a:rPr>
                         <a:t>19:00〜26:00</a:t>
                       </a:r>
-                      <a:endParaRPr lang="en-US" sz="850" dirty="0">
+                      <a:endParaRPr lang="en-US" sz="900" dirty="0">
                         <a:latin typeface="BIZ UDPGothic" charset="0"/>
                         <a:ea typeface="BIZ UDPGothic" charset="0"/>
                         <a:cs typeface="BIZ UDPGothic" charset="0"/>
@@ -22448,7 +22734,7 @@
                         <a:buNone/>
                       </a:pPr>
                       <a:r>
-                        <a:rPr sz="850" b="0">
+                        <a:rPr sz="900" b="0" dirty="0">
                           <a:solidFill>
                             <a:srgbClr val="1F2A30"/>
                           </a:solidFill>
@@ -22458,7 +22744,7 @@
                         </a:rPr>
                         <a:t>派遣1名</a:t>
                       </a:r>
-                      <a:endParaRPr lang="en-US" sz="850" dirty="0">
+                      <a:endParaRPr lang="en-US" sz="900" dirty="0">
                         <a:latin typeface="BIZ UDPGothic" charset="0"/>
                         <a:ea typeface="BIZ UDPGothic" charset="0"/>
                         <a:cs typeface="BIZ UDPGothic" charset="0"/>
@@ -22466,7 +22752,7 @@
                     </a:p>
                     <a:p>
                       <a:r>
-                        <a:rPr sz="850" b="0">
+                        <a:rPr sz="900" b="0" dirty="0">
                           <a:solidFill>
                             <a:srgbClr val="1F2A30"/>
                           </a:solidFill>
@@ -22474,7 +22760,29 @@
                           <a:ea typeface="BIZ UDPGothic"/>
                           <a:cs typeface="BIZ UDPGothic"/>
                         </a:rPr>
-                        <a:t>（社員がカバーも）</a:t>
+                        <a:t>（</a:t>
+                      </a:r>
+                      <a:r>
+                        <a:rPr sz="900" b="0" dirty="0" err="1">
+                          <a:solidFill>
+                            <a:srgbClr val="1F2A30"/>
+                          </a:solidFill>
+                          <a:latin typeface="BIZ UDPGothic"/>
+                          <a:ea typeface="BIZ UDPGothic"/>
+                          <a:cs typeface="BIZ UDPGothic"/>
+                        </a:rPr>
+                        <a:t>社員がカバーも</a:t>
+                      </a:r>
+                      <a:r>
+                        <a:rPr sz="900" b="0" dirty="0">
+                          <a:solidFill>
+                            <a:srgbClr val="1F2A30"/>
+                          </a:solidFill>
+                          <a:latin typeface="BIZ UDPGothic"/>
+                          <a:ea typeface="BIZ UDPGothic"/>
+                          <a:cs typeface="BIZ UDPGothic"/>
+                        </a:rPr>
+                        <a:t>）</a:t>
                       </a:r>
                     </a:p>
                   </a:txBody>
@@ -22526,7 +22834,7 @@
                         <a:buNone/>
                       </a:pPr>
                       <a:r>
-                        <a:rPr sz="850" b="0">
+                        <a:rPr sz="900" b="0">
                           <a:solidFill>
                             <a:srgbClr val="1F2A30"/>
                           </a:solidFill>
@@ -22536,7 +22844,7 @@
                         </a:rPr>
                         <a:t>投入専任なし。入替はオペレーター兼務</a:t>
                       </a:r>
-                      <a:endParaRPr lang="en-US" sz="850" dirty="0">
+                      <a:endParaRPr lang="en-US" sz="900" dirty="0">
                         <a:latin typeface="BIZ UDPGothic" charset="0"/>
                         <a:ea typeface="BIZ UDPGothic" charset="0"/>
                         <a:cs typeface="BIZ UDPGothic" charset="0"/>
@@ -22591,7 +22899,7 @@
                         <a:buNone/>
                       </a:pPr>
                       <a:r>
-                        <a:rPr sz="850" b="0">
+                        <a:rPr sz="900" b="0">
                           <a:solidFill>
                             <a:srgbClr val="1F2A30"/>
                           </a:solidFill>
@@ -22601,7 +22909,7 @@
                         </a:rPr>
                         <a:t>420</a:t>
                       </a:r>
-                      <a:endParaRPr lang="en-US" sz="850" dirty="0">
+                      <a:endParaRPr lang="en-US" sz="900" dirty="0">
                         <a:latin typeface="BIZ UDPGothic" charset="0"/>
                         <a:ea typeface="BIZ UDPGothic" charset="0"/>
                         <a:cs typeface="BIZ UDPGothic" charset="0"/>
@@ -22656,7 +22964,7 @@
                         <a:buNone/>
                       </a:pPr>
                       <a:r>
-                        <a:rPr sz="850" b="0">
+                        <a:rPr sz="900" b="0">
                           <a:solidFill>
                             <a:srgbClr val="1F2A30"/>
                           </a:solidFill>
@@ -22666,7 +22974,7 @@
                         </a:rPr>
                         <a:t>0／0</a:t>
                       </a:r>
-                      <a:endParaRPr lang="en-US" sz="850" dirty="0">
+                      <a:endParaRPr lang="en-US" sz="900" dirty="0">
                         <a:latin typeface="BIZ UDPGothic" charset="0"/>
                         <a:ea typeface="BIZ UDPGothic" charset="0"/>
                         <a:cs typeface="BIZ UDPGothic" charset="0"/>
@@ -22721,7 +23029,7 @@
                         <a:buNone/>
                       </a:pPr>
                       <a:r>
-                        <a:rPr sz="850" b="1">
+                        <a:rPr sz="900" b="1">
                           <a:solidFill>
                             <a:srgbClr val="B84A0A"/>
                           </a:solidFill>
@@ -22731,7 +23039,7 @@
                         </a:rPr>
                         <a:t>420／420</a:t>
                       </a:r>
-                      <a:endParaRPr lang="en-US" sz="850" dirty="0">
+                      <a:endParaRPr lang="en-US" sz="900" dirty="0">
                         <a:latin typeface="BIZ UDPGothic" charset="0"/>
                         <a:ea typeface="BIZ UDPGothic" charset="0"/>
                         <a:cs typeface="BIZ UDPGothic" charset="0"/>
@@ -22793,7 +23101,7 @@
                         <a:buNone/>
                       </a:pPr>
                       <a:r>
-                        <a:rPr sz="850" b="1">
+                        <a:rPr sz="900" b="1">
                           <a:solidFill>
                             <a:srgbClr val="1F2A30"/>
                           </a:solidFill>
@@ -22803,7 +23111,7 @@
                         </a:rPr>
                         <a:t>搬入（変わらない）</a:t>
                       </a:r>
-                      <a:endParaRPr lang="en-US" sz="850" dirty="0">
+                      <a:endParaRPr lang="en-US" sz="900" dirty="0">
                         <a:latin typeface="BIZ UDPGothic" charset="0"/>
                         <a:ea typeface="BIZ UDPGothic" charset="0"/>
                         <a:cs typeface="BIZ UDPGothic" charset="0"/>
@@ -22858,7 +23166,7 @@
                         <a:buNone/>
                       </a:pPr>
                       <a:r>
-                        <a:rPr sz="850" b="0">
+                        <a:rPr sz="900" b="0">
                           <a:solidFill>
                             <a:srgbClr val="1F2A30"/>
                           </a:solidFill>
@@ -22868,7 +23176,7 @@
                         </a:rPr>
                         <a:t>全シフト</a:t>
                       </a:r>
-                      <a:endParaRPr lang="en-US" sz="850" dirty="0">
+                      <a:endParaRPr lang="en-US" sz="900" dirty="0">
                         <a:latin typeface="BIZ UDPGothic" charset="0"/>
                         <a:ea typeface="BIZ UDPGothic" charset="0"/>
                         <a:cs typeface="BIZ UDPGothic" charset="0"/>
@@ -22923,7 +23231,7 @@
                         <a:buNone/>
                       </a:pPr>
                       <a:r>
-                        <a:rPr sz="850" b="0">
+                        <a:rPr sz="900" b="0" dirty="0">
                           <a:solidFill>
                             <a:srgbClr val="1F2A30"/>
                           </a:solidFill>
@@ -22933,7 +23241,7 @@
                         </a:rPr>
                         <a:t>上3行の内数（20分）</a:t>
                       </a:r>
-                      <a:endParaRPr lang="en-US" sz="850" dirty="0">
+                      <a:endParaRPr lang="en-US" sz="900" dirty="0">
                         <a:latin typeface="BIZ UDPGothic" charset="0"/>
                         <a:ea typeface="BIZ UDPGothic" charset="0"/>
                         <a:cs typeface="BIZ UDPGothic" charset="0"/>
@@ -22988,7 +23296,7 @@
                         <a:buNone/>
                       </a:pPr>
                       <a:r>
-                        <a:rPr sz="850" b="0">
+                        <a:rPr sz="900" b="0" dirty="0">
                           <a:solidFill>
                             <a:srgbClr val="1F2A30"/>
                           </a:solidFill>
@@ -22998,7 +23306,7 @@
                         </a:rPr>
                         <a:t>詰め担当が同じ回数を運ぶ（20分）</a:t>
                       </a:r>
-                      <a:endParaRPr lang="en-US" sz="850" dirty="0">
+                      <a:endParaRPr lang="en-US" sz="900" dirty="0">
                         <a:latin typeface="BIZ UDPGothic" charset="0"/>
                         <a:ea typeface="BIZ UDPGothic" charset="0"/>
                         <a:cs typeface="BIZ UDPGothic" charset="0"/>
@@ -23053,7 +23361,7 @@
                         <a:buNone/>
                       </a:pPr>
                       <a:r>
-                        <a:rPr sz="850" b="0">
+                        <a:rPr sz="900" b="0">
                           <a:solidFill>
                             <a:srgbClr val="1F2A30"/>
                           </a:solidFill>
@@ -23063,7 +23371,7 @@
                         </a:rPr>
                         <a:t>（内数）</a:t>
                       </a:r>
-                      <a:endParaRPr lang="en-US" sz="850" dirty="0">
+                      <a:endParaRPr lang="en-US" sz="900" dirty="0">
                         <a:latin typeface="BIZ UDPGothic" charset="0"/>
                         <a:ea typeface="BIZ UDPGothic" charset="0"/>
                         <a:cs typeface="BIZ UDPGothic" charset="0"/>
@@ -23118,7 +23426,7 @@
                         <a:buNone/>
                       </a:pPr>
                       <a:r>
-                        <a:rPr sz="850" b="0">
+                        <a:rPr sz="900" b="0">
                           <a:solidFill>
                             <a:srgbClr val="1F2A30"/>
                           </a:solidFill>
@@ -23128,7 +23436,7 @@
                         </a:rPr>
                         <a:t>20／20</a:t>
                       </a:r>
-                      <a:endParaRPr lang="en-US" sz="850" dirty="0">
+                      <a:endParaRPr lang="en-US" sz="900" dirty="0">
                         <a:latin typeface="BIZ UDPGothic" charset="0"/>
                         <a:ea typeface="BIZ UDPGothic" charset="0"/>
                         <a:cs typeface="BIZ UDPGothic" charset="0"/>
@@ -23183,7 +23491,7 @@
                         <a:buNone/>
                       </a:pPr>
                       <a:r>
-                        <a:rPr sz="850" b="0">
+                        <a:rPr sz="900" b="0">
                           <a:solidFill>
                             <a:srgbClr val="1F2A30"/>
                           </a:solidFill>
@@ -23193,7 +23501,7 @@
                         </a:rPr>
                         <a:t>−20／−20</a:t>
                       </a:r>
-                      <a:endParaRPr lang="en-US" sz="850" dirty="0">
+                      <a:endParaRPr lang="en-US" sz="900" dirty="0">
                         <a:latin typeface="BIZ UDPGothic" charset="0"/>
                         <a:ea typeface="BIZ UDPGothic" charset="0"/>
                         <a:cs typeface="BIZ UDPGothic" charset="0"/>
@@ -23255,7 +23563,7 @@
                         <a:buNone/>
                       </a:pPr>
                       <a:r>
-                        <a:rPr sz="850" b="1">
+                        <a:rPr sz="900" b="1">
                           <a:solidFill>
                             <a:srgbClr val="1F2A30"/>
                           </a:solidFill>
@@ -23265,7 +23573,7 @@
                         </a:rPr>
                         <a:t>装填・入替</a:t>
                       </a:r>
-                      <a:endParaRPr lang="en-US" sz="850" dirty="0">
+                      <a:endParaRPr lang="en-US" sz="900" dirty="0">
                         <a:latin typeface="BIZ UDPGothic" charset="0"/>
                         <a:ea typeface="BIZ UDPGothic" charset="0"/>
                         <a:cs typeface="BIZ UDPGothic" charset="0"/>
@@ -23320,7 +23628,7 @@
                         <a:buNone/>
                       </a:pPr>
                       <a:r>
-                        <a:rPr sz="850" b="0">
+                        <a:rPr sz="900" b="0">
                           <a:solidFill>
                             <a:srgbClr val="1F2A30"/>
                           </a:solidFill>
@@ -23330,7 +23638,7 @@
                         </a:rPr>
                         <a:t>約2時間に1回×約3分</a:t>
                       </a:r>
-                      <a:endParaRPr lang="en-US" sz="850" dirty="0">
+                      <a:endParaRPr lang="en-US" sz="900" dirty="0">
                         <a:latin typeface="BIZ UDPGothic" charset="0"/>
                         <a:ea typeface="BIZ UDPGothic" charset="0"/>
                         <a:cs typeface="BIZ UDPGothic" charset="0"/>
@@ -23385,7 +23693,7 @@
                         <a:buNone/>
                       </a:pPr>
                       <a:r>
-                        <a:rPr sz="850" b="0">
+                        <a:rPr sz="900" b="0">
                           <a:solidFill>
                             <a:srgbClr val="1F2A30"/>
                           </a:solidFill>
@@ -23395,7 +23703,7 @@
                         </a:rPr>
                         <a:t>なし</a:t>
                       </a:r>
-                      <a:endParaRPr lang="en-US" sz="850" dirty="0">
+                      <a:endParaRPr lang="en-US" sz="900" dirty="0">
                         <a:latin typeface="BIZ UDPGothic" charset="0"/>
                         <a:ea typeface="BIZ UDPGothic" charset="0"/>
                         <a:cs typeface="BIZ UDPGothic" charset="0"/>
@@ -23450,7 +23758,7 @@
                         <a:buNone/>
                       </a:pPr>
                       <a:r>
-                        <a:rPr sz="850" b="0">
+                        <a:rPr sz="900" b="0" dirty="0" err="1">
                           <a:solidFill>
                             <a:srgbClr val="1F2A30"/>
                           </a:solidFill>
@@ -23458,9 +23766,20 @@
                           <a:ea typeface="BIZ UDPGothic"/>
                           <a:cs typeface="BIZ UDPGothic"/>
                         </a:rPr>
-                        <a:t>新規。日中は詰め担当、</a:t>
+                        <a:t>新規。日中は詰め担当</a:t>
                       </a:r>
-                      <a:endParaRPr lang="en-US" sz="850" dirty="0">
+                      <a:r>
+                        <a:rPr sz="900" b="0" dirty="0">
+                          <a:solidFill>
+                            <a:srgbClr val="1F2A30"/>
+                          </a:solidFill>
+                          <a:latin typeface="BIZ UDPGothic"/>
+                          <a:ea typeface="BIZ UDPGothic"/>
+                          <a:cs typeface="BIZ UDPGothic"/>
+                        </a:rPr>
+                        <a:t>、</a:t>
+                      </a:r>
+                      <a:endParaRPr lang="en-US" sz="900" dirty="0">
                         <a:latin typeface="BIZ UDPGothic" charset="0"/>
                         <a:ea typeface="BIZ UDPGothic" charset="0"/>
                         <a:cs typeface="BIZ UDPGothic" charset="0"/>
@@ -23468,7 +23787,7 @@
                     </a:p>
                     <a:p>
                       <a:r>
-                        <a:rPr sz="850" b="0">
+                        <a:rPr sz="900" b="0" dirty="0" err="1">
                           <a:solidFill>
                             <a:srgbClr val="1F2A30"/>
                           </a:solidFill>
@@ -23478,6 +23797,14 @@
                         </a:rPr>
                         <a:t>遅番はオペレーターが兼務</a:t>
                       </a:r>
+                      <a:endParaRPr sz="900" b="0" dirty="0">
+                        <a:solidFill>
+                          <a:srgbClr val="1F2A30"/>
+                        </a:solidFill>
+                        <a:latin typeface="BIZ UDPGothic"/>
+                        <a:ea typeface="BIZ UDPGothic"/>
+                        <a:cs typeface="BIZ UDPGothic"/>
+                      </a:endParaRPr>
                     </a:p>
                   </a:txBody>
                   <a:tcPr marL="27432" marR="27432" marT="27432" marB="27432" anchor="ctr">
@@ -23528,7 +23855,7 @@
                         <a:buNone/>
                       </a:pPr>
                       <a:r>
-                        <a:rPr sz="850" b="0">
+                        <a:rPr sz="900" b="0" dirty="0">
                           <a:solidFill>
                             <a:srgbClr val="1F2A30"/>
                           </a:solidFill>
@@ -23538,7 +23865,7 @@
                         </a:rPr>
                         <a:t>0</a:t>
                       </a:r>
-                      <a:endParaRPr lang="en-US" sz="850" dirty="0">
+                      <a:endParaRPr lang="en-US" sz="900" dirty="0">
                         <a:latin typeface="BIZ UDPGothic" charset="0"/>
                         <a:ea typeface="BIZ UDPGothic" charset="0"/>
                         <a:cs typeface="BIZ UDPGothic" charset="0"/>
@@ -23593,7 +23920,7 @@
                         <a:buNone/>
                       </a:pPr>
                       <a:r>
-                        <a:rPr sz="850" b="0">
+                        <a:rPr sz="900" b="0" dirty="0">
                           <a:solidFill>
                             <a:srgbClr val="1F2A30"/>
                           </a:solidFill>
@@ -23603,7 +23930,7 @@
                         </a:rPr>
                         <a:t>18／12</a:t>
                       </a:r>
-                      <a:endParaRPr lang="en-US" sz="850" dirty="0">
+                      <a:endParaRPr lang="en-US" sz="900" dirty="0">
                         <a:latin typeface="BIZ UDPGothic" charset="0"/>
                         <a:ea typeface="BIZ UDPGothic" charset="0"/>
                         <a:cs typeface="BIZ UDPGothic" charset="0"/>
@@ -23658,7 +23985,7 @@
                         <a:buNone/>
                       </a:pPr>
                       <a:r>
-                        <a:rPr sz="850" b="0">
+                        <a:rPr sz="900" b="0">
                           <a:solidFill>
                             <a:srgbClr val="1F2A30"/>
                           </a:solidFill>
@@ -23668,7 +23995,7 @@
                         </a:rPr>
                         <a:t>−18／−12</a:t>
                       </a:r>
-                      <a:endParaRPr lang="en-US" sz="850" dirty="0">
+                      <a:endParaRPr lang="en-US" sz="900" dirty="0">
                         <a:latin typeface="BIZ UDPGothic" charset="0"/>
                         <a:ea typeface="BIZ UDPGothic" charset="0"/>
                         <a:cs typeface="BIZ UDPGothic" charset="0"/>
@@ -23730,7 +24057,7 @@
                         <a:buNone/>
                       </a:pPr>
                       <a:r>
-                        <a:rPr sz="850" b="1">
+                        <a:rPr sz="900" b="1">
                           <a:solidFill>
                             <a:srgbClr val="1F2A30"/>
                           </a:solidFill>
@@ -23740,7 +24067,7 @@
                         </a:rPr>
                         <a:t>型替え</a:t>
                       </a:r>
-                      <a:endParaRPr lang="en-US" sz="850" dirty="0">
+                      <a:endParaRPr lang="en-US" sz="900" dirty="0">
                         <a:latin typeface="BIZ UDPGothic" charset="0"/>
                         <a:ea typeface="BIZ UDPGothic" charset="0"/>
                         <a:cs typeface="BIZ UDPGothic" charset="0"/>
@@ -23795,7 +24122,7 @@
                         <a:buNone/>
                       </a:pPr>
                       <a:r>
-                        <a:rPr sz="850" b="0">
+                        <a:rPr sz="900" b="0">
                           <a:solidFill>
                             <a:srgbClr val="1F2A30"/>
                           </a:solidFill>
@@ -23805,7 +24132,7 @@
                         </a:rPr>
                         <a:t>パウチ形状が変わる日</a:t>
                       </a:r>
-                      <a:endParaRPr lang="en-US" sz="850" dirty="0">
+                      <a:endParaRPr lang="en-US" sz="900" dirty="0">
                         <a:latin typeface="BIZ UDPGothic" charset="0"/>
                         <a:ea typeface="BIZ UDPGothic" charset="0"/>
                         <a:cs typeface="BIZ UDPGothic" charset="0"/>
@@ -23860,7 +24187,7 @@
                         <a:buNone/>
                       </a:pPr>
                       <a:r>
-                        <a:rPr sz="850" b="0">
+                        <a:rPr sz="900" b="0">
                           <a:solidFill>
                             <a:srgbClr val="1F2A30"/>
                           </a:solidFill>
@@ -23870,7 +24197,7 @@
                         </a:rPr>
                         <a:t>なし</a:t>
                       </a:r>
-                      <a:endParaRPr lang="en-US" sz="850" dirty="0">
+                      <a:endParaRPr lang="en-US" sz="900" dirty="0">
                         <a:latin typeface="BIZ UDPGothic" charset="0"/>
                         <a:ea typeface="BIZ UDPGothic" charset="0"/>
                         <a:cs typeface="BIZ UDPGothic" charset="0"/>
@@ -23925,7 +24252,7 @@
                         <a:buNone/>
                       </a:pPr>
                       <a:r>
-                        <a:rPr sz="850" b="0">
+                        <a:rPr sz="900" b="0">
                           <a:solidFill>
                             <a:srgbClr val="1F2A30"/>
                           </a:solidFill>
@@ -23935,7 +24262,7 @@
                         </a:rPr>
                         <a:t>新規。機内25枚×約1.1分≒28分</a:t>
                       </a:r>
-                      <a:endParaRPr lang="en-US" sz="850" dirty="0">
+                      <a:endParaRPr lang="en-US" sz="900" dirty="0">
                         <a:latin typeface="BIZ UDPGothic" charset="0"/>
                         <a:ea typeface="BIZ UDPGothic" charset="0"/>
                         <a:cs typeface="BIZ UDPGothic" charset="0"/>
@@ -23943,7 +24270,7 @@
                     </a:p>
                     <a:p>
                       <a:r>
-                        <a:rPr sz="850" b="0">
+                        <a:rPr sz="900" b="0">
                           <a:solidFill>
                             <a:srgbClr val="1F2A30"/>
                           </a:solidFill>
@@ -24003,7 +24330,7 @@
                         <a:buNone/>
                       </a:pPr>
                       <a:r>
-                        <a:rPr sz="850" b="0">
+                        <a:rPr sz="900" b="0">
                           <a:solidFill>
                             <a:srgbClr val="1F2A30"/>
                           </a:solidFill>
@@ -24013,7 +24340,7 @@
                         </a:rPr>
                         <a:t>0</a:t>
                       </a:r>
-                      <a:endParaRPr lang="en-US" sz="850" dirty="0">
+                      <a:endParaRPr lang="en-US" sz="900" dirty="0">
                         <a:latin typeface="BIZ UDPGothic" charset="0"/>
                         <a:ea typeface="BIZ UDPGothic" charset="0"/>
                         <a:cs typeface="BIZ UDPGothic" charset="0"/>
@@ -24068,7 +24395,7 @@
                         <a:buNone/>
                       </a:pPr>
                       <a:r>
-                        <a:rPr sz="850" b="0">
+                        <a:rPr sz="900" b="0" dirty="0">
                           <a:solidFill>
                             <a:srgbClr val="1F2A30"/>
                           </a:solidFill>
@@ -24078,7 +24405,7 @@
                         </a:rPr>
                         <a:t>0／14</a:t>
                       </a:r>
-                      <a:endParaRPr lang="en-US" sz="850" dirty="0">
+                      <a:endParaRPr lang="en-US" sz="900" dirty="0">
                         <a:latin typeface="BIZ UDPGothic" charset="0"/>
                         <a:ea typeface="BIZ UDPGothic" charset="0"/>
                         <a:cs typeface="BIZ UDPGothic" charset="0"/>
@@ -24133,7 +24460,7 @@
                         <a:buNone/>
                       </a:pPr>
                       <a:r>
-                        <a:rPr sz="850" b="0">
+                        <a:rPr sz="900" b="0" dirty="0">
                           <a:solidFill>
                             <a:srgbClr val="1F2A30"/>
                           </a:solidFill>
@@ -24143,7 +24470,7 @@
                         </a:rPr>
                         <a:t>0／−14</a:t>
                       </a:r>
-                      <a:endParaRPr lang="en-US" sz="850" dirty="0">
+                      <a:endParaRPr lang="en-US" sz="900" dirty="0">
                         <a:latin typeface="BIZ UDPGothic" charset="0"/>
                         <a:ea typeface="BIZ UDPGothic" charset="0"/>
                         <a:cs typeface="BIZ UDPGothic" charset="0"/>
@@ -24205,7 +24532,7 @@
                         <a:buNone/>
                       </a:pPr>
                       <a:r>
-                        <a:rPr sz="850" b="1">
+                        <a:rPr sz="900" b="1">
                           <a:solidFill>
                             <a:srgbClr val="1F2A30"/>
                           </a:solidFill>
@@ -24215,7 +24542,7 @@
                         </a:rPr>
                         <a:t>合計</a:t>
                       </a:r>
-                      <a:endParaRPr lang="en-US" sz="850" dirty="0">
+                      <a:endParaRPr lang="en-US" sz="900" dirty="0">
                         <a:latin typeface="BIZ UDPGothic" charset="0"/>
                         <a:ea typeface="BIZ UDPGothic" charset="0"/>
                         <a:cs typeface="BIZ UDPGothic" charset="0"/>
@@ -24273,7 +24600,7 @@
                         <a:buNone/>
                       </a:pPr>
                       <a:r>
-                        <a:rPr sz="850" b="0">
+                        <a:rPr sz="900" b="0">
                           <a:solidFill>
                             <a:srgbClr val="1F2A30"/>
                           </a:solidFill>
@@ -24283,7 +24610,7 @@
                         </a:rPr>
                         <a:t>8:30〜26:00（17.5時間）</a:t>
                       </a:r>
-                      <a:endParaRPr lang="en-US" sz="850" dirty="0">
+                      <a:endParaRPr lang="en-US" sz="900" dirty="0">
                         <a:latin typeface="BIZ UDPGothic" charset="0"/>
                         <a:ea typeface="BIZ UDPGothic" charset="0"/>
                         <a:cs typeface="BIZ UDPGothic" charset="0"/>
@@ -24341,7 +24668,7 @@
                         <a:buNone/>
                       </a:pPr>
                       <a:r>
-                        <a:rPr sz="850" b="1">
+                        <a:rPr sz="900" b="1">
                           <a:solidFill>
                             <a:srgbClr val="1F2A30"/>
                           </a:solidFill>
@@ -24351,7 +24678,7 @@
                         </a:rPr>
                         <a:t>延べ3名／日</a:t>
                       </a:r>
-                      <a:endParaRPr lang="en-US" sz="850" dirty="0">
+                      <a:endParaRPr lang="en-US" sz="900" dirty="0">
                         <a:latin typeface="BIZ UDPGothic" charset="0"/>
                         <a:ea typeface="BIZ UDPGothic" charset="0"/>
                         <a:cs typeface="BIZ UDPGothic" charset="0"/>
@@ -24409,7 +24736,7 @@
                         <a:buNone/>
                       </a:pPr>
                       <a:r>
-                        <a:rPr sz="850" b="0">
+                        <a:rPr sz="900" b="0">
                           <a:solidFill>
                             <a:srgbClr val="1F2A30"/>
                           </a:solidFill>
@@ -24419,7 +24746,7 @@
                         </a:rPr>
                         <a:t>詰めは早番・中番のみ</a:t>
                       </a:r>
-                      <a:endParaRPr lang="en-US" sz="850" dirty="0">
+                      <a:endParaRPr lang="en-US" sz="900" dirty="0">
                         <a:latin typeface="BIZ UDPGothic" charset="0"/>
                         <a:ea typeface="BIZ UDPGothic" charset="0"/>
                         <a:cs typeface="BIZ UDPGothic" charset="0"/>
@@ -24477,7 +24804,7 @@
                         <a:buNone/>
                       </a:pPr>
                       <a:r>
-                        <a:rPr sz="850" b="1">
+                        <a:rPr sz="900" b="1">
                           <a:solidFill>
                             <a:srgbClr val="1F2A30"/>
                           </a:solidFill>
@@ -24487,7 +24814,7 @@
                         </a:rPr>
                         <a:t>1,050</a:t>
                       </a:r>
-                      <a:endParaRPr lang="en-US" sz="850" dirty="0">
+                      <a:endParaRPr lang="en-US" sz="900" dirty="0">
                         <a:latin typeface="BIZ UDPGothic" charset="0"/>
                         <a:ea typeface="BIZ UDPGothic" charset="0"/>
                         <a:cs typeface="BIZ UDPGothic" charset="0"/>
@@ -24545,7 +24872,7 @@
                         <a:buNone/>
                       </a:pPr>
                       <a:r>
-                        <a:rPr sz="850" b="1">
+                        <a:rPr sz="900" b="1">
                           <a:solidFill>
                             <a:srgbClr val="1F2A30"/>
                           </a:solidFill>
@@ -24555,7 +24882,7 @@
                         </a:rPr>
                         <a:t>288／214</a:t>
                       </a:r>
-                      <a:endParaRPr lang="en-US" sz="850" dirty="0">
+                      <a:endParaRPr lang="en-US" sz="900" dirty="0">
                         <a:latin typeface="BIZ UDPGothic" charset="0"/>
                         <a:ea typeface="BIZ UDPGothic" charset="0"/>
                         <a:cs typeface="BIZ UDPGothic" charset="0"/>
@@ -24564,7 +24891,7 @@
                     <a:p>
                       <a:pPr algn="ctr"/>
                       <a:r>
-                        <a:rPr sz="850" b="1">
+                        <a:rPr sz="900" b="1">
                           <a:solidFill>
                             <a:srgbClr val="1F2A30"/>
                           </a:solidFill>
@@ -24627,7 +24954,7 @@
                         <a:buNone/>
                       </a:pPr>
                       <a:r>
-                        <a:rPr sz="850" b="1">
+                        <a:rPr sz="900" b="1" dirty="0">
                           <a:solidFill>
                             <a:srgbClr val="B84A0A"/>
                           </a:solidFill>
@@ -24637,7 +24964,7 @@
                         </a:rPr>
                         <a:t>762／836</a:t>
                       </a:r>
-                      <a:endParaRPr lang="en-US" sz="850" dirty="0">
+                      <a:endParaRPr lang="en-US" sz="900" dirty="0">
                         <a:latin typeface="BIZ UDPGothic" charset="0"/>
                         <a:ea typeface="BIZ UDPGothic" charset="0"/>
                         <a:cs typeface="BIZ UDPGothic" charset="0"/>
@@ -24646,7 +24973,7 @@
                     <a:p>
                       <a:pPr algn="ctr"/>
                       <a:r>
-                        <a:rPr sz="850" b="1">
+                        <a:rPr sz="900" b="1" dirty="0">
                           <a:solidFill>
                             <a:srgbClr val="B84A0A"/>
                           </a:solidFill>
@@ -24718,7 +25045,7 @@
         </p:nvSpPr>
         <p:spPr>
           <a:xfrm>
-            <a:off x="320040" y="4572000"/>
+            <a:off x="320040" y="4505960"/>
             <a:ext cx="8503920" cy="237744"/>
           </a:xfrm>
           <a:prstGeom prst="rect">
@@ -24735,7 +25062,7 @@
               <a:buNone/>
             </a:pPr>
             <a:r>
-              <a:rPr lang="en-US" sz="850" b="1" dirty="0">
+              <a:rPr lang="en-US" sz="900" b="1" dirty="0">
                 <a:solidFill>
                   <a:srgbClr val="0F4C5C"/>
                 </a:solidFill>
@@ -24746,7 +25073,7 @@
               <a:t>製袋室の配置人数：</a:t>
             </a:r>
             <a:r>
-              <a:rPr lang="en-US" sz="850" dirty="0">
+              <a:rPr lang="en-US" sz="900" dirty="0">
                 <a:solidFill>
                   <a:srgbClr val="1F2A30"/>
                 </a:solidFill>
@@ -24756,7 +25083,7 @@
               </a:rPr>
               <a:t>現状2名／シフト → 導入後 早番2名・中番2名・遅番1名（オペレーターのみ）。　</a:t>
             </a:r>
-            <a:endParaRPr lang="en-US" sz="850" dirty="0"/>
+            <a:endParaRPr lang="en-US" sz="900" dirty="0"/>
           </a:p>
         </p:txBody>
       </p:sp>
@@ -24819,7 +25146,10 @@
         </p:spPr>
         <p:txBody>
           <a:bodyPr/>
-          <a:p/>
+          <a:lstStyle/>
+          <a:p>
+            <a:endParaRPr/>
+          </a:p>
         </p:txBody>
       </p:sp>
       <p:sp>
@@ -24848,7 +25178,10 @@
         </p:spPr>
         <p:txBody>
           <a:bodyPr/>
-          <a:p/>
+          <a:lstStyle/>
+          <a:p>
+            <a:endParaRPr/>
+          </a:p>
         </p:txBody>
       </p:sp>
       <p:sp>
@@ -25033,7 +25366,10 @@
         </p:spPr>
         <p:txBody>
           <a:bodyPr/>
-          <a:p/>
+          <a:lstStyle/>
+          <a:p>
+            <a:endParaRPr/>
+          </a:p>
         </p:txBody>
       </p:sp>
       <p:sp>
@@ -25062,7 +25398,10 @@
         </p:spPr>
         <p:txBody>
           <a:bodyPr/>
-          <a:p/>
+          <a:lstStyle/>
+          <a:p>
+            <a:endParaRPr/>
+          </a:p>
         </p:txBody>
       </p:sp>
       <p:sp>
@@ -25130,7 +25469,10 @@
         </p:spPr>
         <p:txBody>
           <a:bodyPr/>
-          <a:p/>
+          <a:lstStyle/>
+          <a:p>
+            <a:endParaRPr/>
+          </a:p>
         </p:txBody>
       </p:sp>
       <p:sp>
@@ -25159,7 +25501,10 @@
         </p:spPr>
         <p:txBody>
           <a:bodyPr/>
-          <a:p/>
+          <a:lstStyle/>
+          <a:p>
+            <a:endParaRPr/>
+          </a:p>
         </p:txBody>
       </p:sp>
       <p:sp>

--- a/作成中事業計画書/★0930Gライン_レイアウト工程ビフォーアフター_トンボ飲料様_v3.pptx
+++ b/作成中事業計画書/★0930Gライン_レイアウト工程ビフォーアフター_トンボ飲料様_v3.pptx
@@ -732,7 +732,7 @@
               <a:rPr lang="en-US"/>
               <a:t>8</a:t>
             </a:fld>
-            <a:endParaRPr lang="en-US"/>
+            <a:endParaRPr lang="en-US" dirty="0"/>
           </a:p>
         </p:txBody>
       </p:sp>
@@ -20505,7 +20505,7 @@
           <a:bodyPr/>
           <a:lstStyle/>
           <a:p>
-            <a:endParaRPr/>
+            <a:endParaRPr dirty="0"/>
           </a:p>
         </p:txBody>
       </p:sp>
@@ -20537,7 +20537,7 @@
           <a:bodyPr/>
           <a:lstStyle/>
           <a:p>
-            <a:endParaRPr/>
+            <a:endParaRPr dirty="0"/>
           </a:p>
         </p:txBody>
       </p:sp>
@@ -20566,7 +20566,7 @@
               <a:buNone/>
             </a:pPr>
             <a:r>
-              <a:rPr sz="2200" b="1">
+              <a:rPr sz="2200" b="1" dirty="0">
                 <a:solidFill>
                   <a:srgbClr val="FFFFFF"/>
                 </a:solidFill>
@@ -20683,7 +20683,7 @@
               <a:buNone/>
             </a:pPr>
             <a:r>
-              <a:rPr sz="900" b="0">
+              <a:rPr sz="900" b="0" dirty="0">
                 <a:solidFill>
                   <a:srgbClr val="8A9BA8"/>
                 </a:solidFill>
@@ -20725,7 +20725,7 @@
           <a:bodyPr/>
           <a:lstStyle/>
           <a:p>
-            <a:endParaRPr/>
+            <a:endParaRPr dirty="0"/>
           </a:p>
         </p:txBody>
       </p:sp>
@@ -20754,7 +20754,7 @@
               <a:buNone/>
             </a:pPr>
             <a:r>
-              <a:rPr sz="1700" b="1">
+              <a:rPr sz="1700" b="1" dirty="0">
                 <a:solidFill>
                   <a:srgbClr val="B84A0A"/>
                 </a:solidFill>
@@ -20835,7 +20835,7 @@
           <a:bodyPr/>
           <a:lstStyle/>
           <a:p>
-            <a:endParaRPr/>
+            <a:endParaRPr dirty="0"/>
           </a:p>
         </p:txBody>
       </p:sp>
@@ -20864,7 +20864,7 @@
               <a:buNone/>
             </a:pPr>
             <a:r>
-              <a:rPr sz="1700" b="1">
+              <a:rPr sz="1700" b="1" dirty="0">
                 <a:solidFill>
                   <a:srgbClr val="B84A0A"/>
                 </a:solidFill>
@@ -20903,7 +20903,7 @@
               <a:buNone/>
             </a:pPr>
             <a:r>
-              <a:rPr sz="1000" b="0">
+              <a:rPr sz="1000" b="0" dirty="0">
                 <a:solidFill>
                   <a:srgbClr val="5B6770"/>
                 </a:solidFill>
@@ -20945,7 +20945,7 @@
           <a:bodyPr/>
           <a:lstStyle/>
           <a:p>
-            <a:endParaRPr/>
+            <a:endParaRPr dirty="0"/>
           </a:p>
         </p:txBody>
       </p:sp>
@@ -20974,7 +20974,7 @@
               <a:buNone/>
             </a:pPr>
             <a:r>
-              <a:rPr sz="1700" b="1">
+              <a:rPr sz="1700" b="1" dirty="0">
                 <a:solidFill>
                   <a:srgbClr val="B84A0A"/>
                 </a:solidFill>
@@ -21047,7 +21047,7 @@
           <p:nvPr>
             <p:extLst>
               <p:ext uri="{D42A27DB-BD31-4B8C-83A1-F6EECF244321}">
-                <p14:modId xmlns:p14="http://schemas.microsoft.com/office/powerpoint/2010/main" val="2383716480"/>
+                <p14:modId xmlns:p14="http://schemas.microsoft.com/office/powerpoint/2010/main" val="903529431"/>
               </p:ext>
             </p:extLst>
           </p:nvPr>
@@ -21667,7 +21667,7 @@
                         <a:buNone/>
                       </a:pPr>
                       <a:r>
-                        <a:rPr sz="900" b="1" dirty="0" err="1">
+                        <a:rPr sz="900" b="1" dirty="0">
                           <a:solidFill>
                             <a:srgbClr val="1F2A30"/>
                           </a:solidFill>
@@ -21732,7 +21732,7 @@
                         <a:buNone/>
                       </a:pPr>
                       <a:r>
-                        <a:rPr sz="900" b="0">
+                        <a:rPr sz="900" b="0" dirty="0">
                           <a:solidFill>
                             <a:srgbClr val="1F2A30"/>
                           </a:solidFill>
@@ -21750,7 +21750,7 @@
                     </a:p>
                     <a:p>
                       <a:r>
-                        <a:rPr sz="900" b="0">
+                        <a:rPr sz="900" b="0" dirty="0">
                           <a:solidFill>
                             <a:srgbClr val="1F2A30"/>
                           </a:solidFill>
@@ -21810,7 +21810,7 @@
                         <a:buNone/>
                       </a:pPr>
                       <a:r>
-                        <a:rPr sz="900" b="0">
+                        <a:rPr sz="900" b="0" dirty="0">
                           <a:solidFill>
                             <a:srgbClr val="1F2A30"/>
                           </a:solidFill>
@@ -21875,7 +21875,7 @@
                         <a:buNone/>
                       </a:pPr>
                       <a:r>
-                        <a:rPr sz="900" b="0">
+                        <a:rPr sz="900" b="0" dirty="0">
                           <a:solidFill>
                             <a:srgbClr val="1F2A30"/>
                           </a:solidFill>
@@ -21940,7 +21940,7 @@
                         <a:buNone/>
                       </a:pPr>
                       <a:r>
-                        <a:rPr sz="900" b="0">
+                        <a:rPr sz="900" b="0" dirty="0">
                           <a:solidFill>
                             <a:srgbClr val="1F2A30"/>
                           </a:solidFill>
@@ -22005,7 +22005,7 @@
                         <a:buNone/>
                       </a:pPr>
                       <a:r>
-                        <a:rPr sz="900" b="0">
+                        <a:rPr sz="900" b="0" dirty="0">
                           <a:solidFill>
                             <a:srgbClr val="1F2A30"/>
                           </a:solidFill>
@@ -22070,7 +22070,7 @@
                         <a:buNone/>
                       </a:pPr>
                       <a:r>
-                        <a:rPr sz="900" b="0">
+                        <a:rPr sz="900" b="0" dirty="0">
                           <a:solidFill>
                             <a:srgbClr val="1F2A30"/>
                           </a:solidFill>
@@ -22142,7 +22142,7 @@
                         <a:buNone/>
                       </a:pPr>
                       <a:r>
-                        <a:rPr sz="900" b="1" dirty="0" err="1">
+                        <a:rPr sz="900" b="1" dirty="0">
                           <a:solidFill>
                             <a:srgbClr val="1F2A30"/>
                           </a:solidFill>
@@ -22272,7 +22272,7 @@
                         <a:buNone/>
                       </a:pPr>
                       <a:r>
-                        <a:rPr sz="900" b="0">
+                        <a:rPr sz="900" b="0" dirty="0">
                           <a:solidFill>
                             <a:srgbClr val="1F2A30"/>
                           </a:solidFill>
@@ -22337,7 +22337,7 @@
                         <a:buNone/>
                       </a:pPr>
                       <a:r>
-                        <a:rPr sz="900" b="0">
+                        <a:rPr sz="900" b="0" dirty="0">
                           <a:solidFill>
                             <a:srgbClr val="1F2A30"/>
                           </a:solidFill>
@@ -22402,7 +22402,7 @@
                         <a:buNone/>
                       </a:pPr>
                       <a:r>
-                        <a:rPr sz="900" b="0">
+                        <a:rPr sz="900" b="0" dirty="0">
                           <a:solidFill>
                             <a:srgbClr val="1F2A30"/>
                           </a:solidFill>
@@ -22467,7 +22467,7 @@
                         <a:buNone/>
                       </a:pPr>
                       <a:r>
-                        <a:rPr sz="900" b="0">
+                        <a:rPr sz="900" b="0" dirty="0">
                           <a:solidFill>
                             <a:srgbClr val="1F2A30"/>
                           </a:solidFill>
@@ -22532,7 +22532,7 @@
                         <a:buNone/>
                       </a:pPr>
                       <a:r>
-                        <a:rPr sz="900" b="1">
+                        <a:rPr sz="900" b="1" dirty="0">
                           <a:solidFill>
                             <a:srgbClr val="B84A0A"/>
                           </a:solidFill>
@@ -22604,7 +22604,7 @@
                         <a:buNone/>
                       </a:pPr>
                       <a:r>
-                        <a:rPr sz="900" b="1">
+                        <a:rPr sz="900" b="1" dirty="0">
                           <a:solidFill>
                             <a:srgbClr val="1F2A30"/>
                           </a:solidFill>
@@ -22760,29 +22760,7 @@
                           <a:ea typeface="BIZ UDPGothic"/>
                           <a:cs typeface="BIZ UDPGothic"/>
                         </a:rPr>
-                        <a:t>（</a:t>
-                      </a:r>
-                      <a:r>
-                        <a:rPr sz="900" b="0" dirty="0" err="1">
-                          <a:solidFill>
-                            <a:srgbClr val="1F2A30"/>
-                          </a:solidFill>
-                          <a:latin typeface="BIZ UDPGothic"/>
-                          <a:ea typeface="BIZ UDPGothic"/>
-                          <a:cs typeface="BIZ UDPGothic"/>
-                        </a:rPr>
-                        <a:t>社員がカバーも</a:t>
-                      </a:r>
-                      <a:r>
-                        <a:rPr sz="900" b="0" dirty="0">
-                          <a:solidFill>
-                            <a:srgbClr val="1F2A30"/>
-                          </a:solidFill>
-                          <a:latin typeface="BIZ UDPGothic"/>
-                          <a:ea typeface="BIZ UDPGothic"/>
-                          <a:cs typeface="BIZ UDPGothic"/>
-                        </a:rPr>
-                        <a:t>）</a:t>
+                        <a:t>（社員がカバーも）</a:t>
                       </a:r>
                     </a:p>
                   </a:txBody>
@@ -22834,7 +22812,7 @@
                         <a:buNone/>
                       </a:pPr>
                       <a:r>
-                        <a:rPr sz="900" b="0">
+                        <a:rPr sz="900" b="0" dirty="0">
                           <a:solidFill>
                             <a:srgbClr val="1F2A30"/>
                           </a:solidFill>
@@ -22899,7 +22877,7 @@
                         <a:buNone/>
                       </a:pPr>
                       <a:r>
-                        <a:rPr sz="900" b="0">
+                        <a:rPr sz="900" b="0" dirty="0">
                           <a:solidFill>
                             <a:srgbClr val="1F2A30"/>
                           </a:solidFill>
@@ -22964,7 +22942,7 @@
                         <a:buNone/>
                       </a:pPr>
                       <a:r>
-                        <a:rPr sz="900" b="0">
+                        <a:rPr sz="900" b="0" dirty="0">
                           <a:solidFill>
                             <a:srgbClr val="1F2A30"/>
                           </a:solidFill>
@@ -23029,7 +23007,7 @@
                         <a:buNone/>
                       </a:pPr>
                       <a:r>
-                        <a:rPr sz="900" b="1">
+                        <a:rPr sz="900" b="1" dirty="0">
                           <a:solidFill>
                             <a:srgbClr val="B84A0A"/>
                           </a:solidFill>
@@ -23101,7 +23079,7 @@
                         <a:buNone/>
                       </a:pPr>
                       <a:r>
-                        <a:rPr sz="900" b="1">
+                        <a:rPr sz="900" b="1" dirty="0">
                           <a:solidFill>
                             <a:srgbClr val="1F2A30"/>
                           </a:solidFill>
@@ -23166,7 +23144,7 @@
                         <a:buNone/>
                       </a:pPr>
                       <a:r>
-                        <a:rPr sz="900" b="0">
+                        <a:rPr sz="900" b="0" dirty="0">
                           <a:solidFill>
                             <a:srgbClr val="1F2A30"/>
                           </a:solidFill>
@@ -23361,7 +23339,7 @@
                         <a:buNone/>
                       </a:pPr>
                       <a:r>
-                        <a:rPr sz="900" b="0">
+                        <a:rPr sz="900" b="0" dirty="0">
                           <a:solidFill>
                             <a:srgbClr val="1F2A30"/>
                           </a:solidFill>
@@ -23426,7 +23404,7 @@
                         <a:buNone/>
                       </a:pPr>
                       <a:r>
-                        <a:rPr sz="900" b="0">
+                        <a:rPr sz="900" b="0" dirty="0">
                           <a:solidFill>
                             <a:srgbClr val="1F2A30"/>
                           </a:solidFill>
@@ -23491,7 +23469,7 @@
                         <a:buNone/>
                       </a:pPr>
                       <a:r>
-                        <a:rPr sz="900" b="0">
+                        <a:rPr sz="900" b="0" dirty="0">
                           <a:solidFill>
                             <a:srgbClr val="1F2A30"/>
                           </a:solidFill>
@@ -23563,7 +23541,7 @@
                         <a:buNone/>
                       </a:pPr>
                       <a:r>
-                        <a:rPr sz="900" b="1">
+                        <a:rPr sz="900" b="1" dirty="0">
                           <a:solidFill>
                             <a:srgbClr val="1F2A30"/>
                           </a:solidFill>
@@ -23628,7 +23606,7 @@
                         <a:buNone/>
                       </a:pPr>
                       <a:r>
-                        <a:rPr sz="900" b="0">
+                        <a:rPr sz="900" b="0" dirty="0">
                           <a:solidFill>
                             <a:srgbClr val="1F2A30"/>
                           </a:solidFill>
@@ -23693,7 +23671,7 @@
                         <a:buNone/>
                       </a:pPr>
                       <a:r>
-                        <a:rPr sz="900" b="0">
+                        <a:rPr sz="900" b="0" dirty="0">
                           <a:solidFill>
                             <a:srgbClr val="1F2A30"/>
                           </a:solidFill>
@@ -23758,7 +23736,7 @@
                         <a:buNone/>
                       </a:pPr>
                       <a:r>
-                        <a:rPr sz="900" b="0" dirty="0" err="1">
+                        <a:rPr sz="900" b="0" dirty="0">
                           <a:solidFill>
                             <a:srgbClr val="1F2A30"/>
                           </a:solidFill>
@@ -23766,8 +23744,15 @@
                           <a:ea typeface="BIZ UDPGothic"/>
                           <a:cs typeface="BIZ UDPGothic"/>
                         </a:rPr>
-                        <a:t>新規。日中は詰め担当</a:t>
+                        <a:t>新規。日中は詰め担当、</a:t>
                       </a:r>
+                      <a:endParaRPr lang="en-US" sz="900" dirty="0">
+                        <a:latin typeface="BIZ UDPGothic" charset="0"/>
+                        <a:ea typeface="BIZ UDPGothic" charset="0"/>
+                        <a:cs typeface="BIZ UDPGothic" charset="0"/>
+                      </a:endParaRPr>
+                    </a:p>
+                    <a:p>
                       <a:r>
                         <a:rPr sz="900" b="0" dirty="0">
                           <a:solidFill>
@@ -23777,34 +23762,8 @@
                           <a:ea typeface="BIZ UDPGothic"/>
                           <a:cs typeface="BIZ UDPGothic"/>
                         </a:rPr>
-                        <a:t>、</a:t>
-                      </a:r>
-                      <a:endParaRPr lang="en-US" sz="900" dirty="0">
-                        <a:latin typeface="BIZ UDPGothic" charset="0"/>
-                        <a:ea typeface="BIZ UDPGothic" charset="0"/>
-                        <a:cs typeface="BIZ UDPGothic" charset="0"/>
-                      </a:endParaRPr>
-                    </a:p>
-                    <a:p>
-                      <a:r>
-                        <a:rPr sz="900" b="0" dirty="0" err="1">
-                          <a:solidFill>
-                            <a:srgbClr val="1F2A30"/>
-                          </a:solidFill>
-                          <a:latin typeface="BIZ UDPGothic"/>
-                          <a:ea typeface="BIZ UDPGothic"/>
-                          <a:cs typeface="BIZ UDPGothic"/>
-                        </a:rPr>
                         <a:t>遅番はオペレーターが兼務</a:t>
                       </a:r>
-                      <a:endParaRPr sz="900" b="0" dirty="0">
-                        <a:solidFill>
-                          <a:srgbClr val="1F2A30"/>
-                        </a:solidFill>
-                        <a:latin typeface="BIZ UDPGothic"/>
-                        <a:ea typeface="BIZ UDPGothic"/>
-                        <a:cs typeface="BIZ UDPGothic"/>
-                      </a:endParaRPr>
                     </a:p>
                   </a:txBody>
                   <a:tcPr marL="27432" marR="27432" marT="27432" marB="27432" anchor="ctr">
@@ -23985,7 +23944,7 @@
                         <a:buNone/>
                       </a:pPr>
                       <a:r>
-                        <a:rPr sz="900" b="0">
+                        <a:rPr sz="900" b="0" dirty="0">
                           <a:solidFill>
                             <a:srgbClr val="1F2A30"/>
                           </a:solidFill>
@@ -24057,7 +24016,7 @@
                         <a:buNone/>
                       </a:pPr>
                       <a:r>
-                        <a:rPr sz="900" b="1">
+                        <a:rPr sz="900" b="1" dirty="0">
                           <a:solidFill>
                             <a:srgbClr val="1F2A30"/>
                           </a:solidFill>
@@ -24122,7 +24081,7 @@
                         <a:buNone/>
                       </a:pPr>
                       <a:r>
-                        <a:rPr sz="900" b="0">
+                        <a:rPr sz="900" b="0" dirty="0">
                           <a:solidFill>
                             <a:srgbClr val="1F2A30"/>
                           </a:solidFill>
@@ -24187,7 +24146,7 @@
                         <a:buNone/>
                       </a:pPr>
                       <a:r>
-                        <a:rPr sz="900" b="0">
+                        <a:rPr sz="900" b="0" dirty="0">
                           <a:solidFill>
                             <a:srgbClr val="1F2A30"/>
                           </a:solidFill>
@@ -24252,7 +24211,7 @@
                         <a:buNone/>
                       </a:pPr>
                       <a:r>
-                        <a:rPr sz="900" b="0">
+                        <a:rPr sz="900" b="0" dirty="0">
                           <a:solidFill>
                             <a:srgbClr val="1F2A30"/>
                           </a:solidFill>
@@ -24270,7 +24229,7 @@
                     </a:p>
                     <a:p>
                       <a:r>
-                        <a:rPr sz="900" b="0">
+                        <a:rPr sz="900" b="0" dirty="0">
                           <a:solidFill>
                             <a:srgbClr val="1F2A30"/>
                           </a:solidFill>
@@ -24330,7 +24289,7 @@
                         <a:buNone/>
                       </a:pPr>
                       <a:r>
-                        <a:rPr sz="900" b="0">
+                        <a:rPr sz="900" b="0" dirty="0">
                           <a:solidFill>
                             <a:srgbClr val="1F2A30"/>
                           </a:solidFill>
@@ -24532,7 +24491,7 @@
                         <a:buNone/>
                       </a:pPr>
                       <a:r>
-                        <a:rPr sz="900" b="1">
+                        <a:rPr sz="900" b="1" dirty="0">
                           <a:solidFill>
                             <a:srgbClr val="1F2A30"/>
                           </a:solidFill>
@@ -24600,7 +24559,7 @@
                         <a:buNone/>
                       </a:pPr>
                       <a:r>
-                        <a:rPr sz="900" b="0">
+                        <a:rPr sz="900" b="0" dirty="0">
                           <a:solidFill>
                             <a:srgbClr val="1F2A30"/>
                           </a:solidFill>
@@ -24668,7 +24627,7 @@
                         <a:buNone/>
                       </a:pPr>
                       <a:r>
-                        <a:rPr sz="900" b="1">
+                        <a:rPr sz="900" b="1" dirty="0">
                           <a:solidFill>
                             <a:srgbClr val="1F2A30"/>
                           </a:solidFill>
@@ -24736,7 +24695,7 @@
                         <a:buNone/>
                       </a:pPr>
                       <a:r>
-                        <a:rPr sz="900" b="0">
+                        <a:rPr sz="900" b="0" dirty="0">
                           <a:solidFill>
                             <a:srgbClr val="1F2A30"/>
                           </a:solidFill>
@@ -24804,7 +24763,7 @@
                         <a:buNone/>
                       </a:pPr>
                       <a:r>
-                        <a:rPr sz="900" b="1">
+                        <a:rPr sz="900" b="1" dirty="0">
                           <a:solidFill>
                             <a:srgbClr val="1F2A30"/>
                           </a:solidFill>
@@ -24872,7 +24831,7 @@
                         <a:buNone/>
                       </a:pPr>
                       <a:r>
-                        <a:rPr sz="900" b="1">
+                        <a:rPr sz="900" b="1" dirty="0">
                           <a:solidFill>
                             <a:srgbClr val="1F2A30"/>
                           </a:solidFill>
@@ -24891,7 +24850,7 @@
                     <a:p>
                       <a:pPr algn="ctr"/>
                       <a:r>
-                        <a:rPr sz="900" b="1">
+                        <a:rPr sz="900" b="1" dirty="0">
                           <a:solidFill>
                             <a:srgbClr val="1F2A30"/>
                           </a:solidFill>
@@ -25148,7 +25107,7 @@
           <a:bodyPr/>
           <a:lstStyle/>
           <a:p>
-            <a:endParaRPr/>
+            <a:endParaRPr dirty="0"/>
           </a:p>
         </p:txBody>
       </p:sp>
@@ -25180,7 +25139,7 @@
           <a:bodyPr/>
           <a:lstStyle/>
           <a:p>
-            <a:endParaRPr/>
+            <a:endParaRPr dirty="0"/>
           </a:p>
         </p:txBody>
       </p:sp>
@@ -25209,7 +25168,7 @@
               <a:buNone/>
             </a:pPr>
             <a:r>
-              <a:rPr sz="2200" b="1">
+              <a:rPr sz="2200" b="1" dirty="0">
                 <a:solidFill>
                   <a:srgbClr val="FFFFFF"/>
                 </a:solidFill>
@@ -25217,7 +25176,18 @@
                 <a:ea typeface="BIZ UDPGothic"/>
                 <a:cs typeface="BIZ UDPGothic"/>
               </a:rPr>
-              <a:t>8. 導入する設備の概要と見積の構成</a:t>
+              <a:t>8. </a:t>
+            </a:r>
+            <a:r>
+              <a:rPr sz="2200" b="1" dirty="0" err="1">
+                <a:solidFill>
+                  <a:srgbClr val="FFFFFF"/>
+                </a:solidFill>
+                <a:latin typeface="BIZ UDPGothic"/>
+                <a:ea typeface="BIZ UDPGothic"/>
+                <a:cs typeface="BIZ UDPGothic"/>
+              </a:rPr>
+              <a:t>導入する設備の概要と見積の構成</a:t>
             </a:r>
             <a:endParaRPr lang="en-US" sz="2200" dirty="0"/>
           </a:p>
@@ -25562,7 +25532,7 @@
         </p:nvGraphicFramePr>
         <p:xfrm>
           <a:off x="502920" y="1517904"/>
-          <a:ext cx="3703320" cy="2831592"/>
+          <a:ext cx="3703320" cy="2976372"/>
         </p:xfrm>
         <a:graphic>
           <a:graphicData uri="http://schemas.openxmlformats.org/drawingml/2006/table">
